--- a/policy/proposal_011.pptx
+++ b/policy/proposal_011.pptx
@@ -3260,7 +3260,7 @@
     <p:bg>
       <p:bgPr>
         <a:solidFill>
-          <a:srgbClr val="0A0A0A"/>
+          <a:srgbClr val="F5F6F8"/>
         </a:solidFill>
       </p:bgPr>
     </p:bg>
@@ -3305,11 +3305,11 @@
             <a:r>
               <a:rPr lang="en-US" sz="1300" b="1" spc="200" kern="0" dirty="0">
                 <a:solidFill>
-                  <a:srgbClr val="D62828"/>
-                </a:solidFill>
-                <a:latin typeface="Noto Sans JP" pitchFamily="34" charset="0"/>
-                <a:ea typeface="Noto Sans JP" pitchFamily="34" charset="-122"/>
-                <a:cs typeface="Noto Sans JP" pitchFamily="34" charset="-120"/>
+                  <a:srgbClr val="C8161D"/>
+                </a:solidFill>
+                <a:latin typeface="BIZ UDPGothic" pitchFamily="34" charset="0"/>
+                <a:ea typeface="BIZ UDPGothic" pitchFamily="34" charset="-122"/>
+                <a:cs typeface="BIZ UDPGothic" pitchFamily="34" charset="-120"/>
               </a:rPr>
               <a:t>政策提言プラットフォーム ── 提言011</a:t>
             </a:r>
@@ -3347,11 +3347,11 @@
             <a:r>
               <a:rPr lang="en-US" sz="3400" b="1" dirty="0">
                 <a:solidFill>
-                  <a:srgbClr val="F5F5F0"/>
-                </a:solidFill>
-                <a:latin typeface="Noto Sans JP" pitchFamily="34" charset="0"/>
-                <a:ea typeface="Noto Sans JP" pitchFamily="34" charset="-122"/>
-                <a:cs typeface="Noto Sans JP" pitchFamily="34" charset="-120"/>
+                  <a:srgbClr val="16181D"/>
+                </a:solidFill>
+                <a:latin typeface="BIZ UDPGothic" pitchFamily="34" charset="0"/>
+                <a:ea typeface="BIZ UDPGothic" pitchFamily="34" charset="-122"/>
+                <a:cs typeface="BIZ UDPGothic" pitchFamily="34" charset="-120"/>
               </a:rPr>
               <a:t>自動運転・無人物流特区</a:t>
             </a:r>
@@ -3367,11 +3367,11 @@
             <a:r>
               <a:rPr lang="en-US" sz="3400" b="1" dirty="0">
                 <a:solidFill>
-                  <a:srgbClr val="F5F5F0"/>
-                </a:solidFill>
-                <a:latin typeface="Noto Sans JP" pitchFamily="34" charset="0"/>
-                <a:ea typeface="Noto Sans JP" pitchFamily="34" charset="-122"/>
-                <a:cs typeface="Noto Sans JP" pitchFamily="34" charset="-120"/>
+                  <a:srgbClr val="16181D"/>
+                </a:solidFill>
+                <a:latin typeface="BIZ UDPGothic" pitchFamily="34" charset="0"/>
+                <a:ea typeface="BIZ UDPGothic" pitchFamily="34" charset="-122"/>
+                <a:cs typeface="BIZ UDPGothic" pitchFamily="34" charset="-120"/>
               </a:rPr>
               <a:t>による地域インフラ変革戦略</a:t>
             </a:r>
@@ -3406,13 +3406,13 @@
             <a:r>
               <a:rPr lang="en-US" sz="1350" dirty="0">
                 <a:solidFill>
-                  <a:srgbClr val="F5F5F0">
+                  <a:srgbClr val="16181D">
                     <a:alpha val="85000"/>
                   </a:srgbClr>
                 </a:solidFill>
-                <a:latin typeface="Noto Sans JP" pitchFamily="34" charset="0"/>
-                <a:ea typeface="Noto Sans JP" pitchFamily="34" charset="-122"/>
-                <a:cs typeface="Noto Sans JP" pitchFamily="34" charset="-120"/>
+                <a:latin typeface="BIZ UDPGothic" pitchFamily="34" charset="0"/>
+                <a:ea typeface="BIZ UDPGothic" pitchFamily="34" charset="-122"/>
+                <a:cs typeface="BIZ UDPGothic" pitchFamily="34" charset="-120"/>
               </a:rPr>
               <a:t>～業界団体の延命補助金を全廃し、業態転換に挑む民間企業への直接投資と規制緩和を断行せよ～</a:t>
             </a:r>
@@ -3447,13 +3447,13 @@
             <a:r>
               <a:rPr lang="en-US" sz="900" dirty="0">
                 <a:solidFill>
-                  <a:srgbClr val="F5F5F0">
+                  <a:srgbClr val="16181D">
                     <a:alpha val="45000"/>
                   </a:srgbClr>
                 </a:solidFill>
-                <a:latin typeface="Noto Sans JP" pitchFamily="34" charset="0"/>
-                <a:ea typeface="Noto Sans JP" pitchFamily="34" charset="-122"/>
-                <a:cs typeface="Noto Sans JP" pitchFamily="34" charset="-120"/>
+                <a:latin typeface="BIZ UDPGothic" pitchFamily="34" charset="0"/>
+                <a:ea typeface="BIZ UDPGothic" pitchFamily="34" charset="-122"/>
+                <a:cs typeface="BIZ UDPGothic" pitchFamily="34" charset="-120"/>
               </a:rPr>
               <a:t>REBOOT JAPAN ── 市民による政策提言プラットフォーム</a:t>
             </a:r>
@@ -3488,13 +3488,13 @@
             <a:r>
               <a:rPr lang="en-US" sz="900" dirty="0">
                 <a:solidFill>
-                  <a:srgbClr val="F5F5F0">
+                  <a:srgbClr val="16181D">
                     <a:alpha val="45000"/>
                   </a:srgbClr>
                 </a:solidFill>
-                <a:latin typeface="Noto Sans JP" pitchFamily="34" charset="0"/>
-                <a:ea typeface="Noto Sans JP" pitchFamily="34" charset="-122"/>
-                <a:cs typeface="Noto Sans JP" pitchFamily="34" charset="-120"/>
+                <a:latin typeface="BIZ UDPGothic" pitchFamily="34" charset="0"/>
+                <a:ea typeface="BIZ UDPGothic" pitchFamily="34" charset="-122"/>
+                <a:cs typeface="BIZ UDPGothic" pitchFamily="34" charset="-120"/>
               </a:rPr>
               <a:t>1</a:t>
             </a:r>
@@ -3516,7 +3516,7 @@
     <p:bg>
       <p:bgPr>
         <a:solidFill>
-          <a:srgbClr val="0A0A0A"/>
+          <a:srgbClr val="F5F6F8"/>
         </a:solidFill>
       </p:bgPr>
     </p:bg>
@@ -3561,11 +3561,11 @@
             <a:r>
               <a:rPr lang="en-US" sz="1200" b="1" spc="200" kern="0" dirty="0">
                 <a:solidFill>
-                  <a:srgbClr val="D62828"/>
+                  <a:srgbClr val="C8161D"/>
                 </a:solidFill>
                 <a:latin typeface="Arial" pitchFamily="34" charset="0"/>
-                <a:ea typeface="Arial" pitchFamily="34" charset="-122"/>
-                <a:cs typeface="Arial" pitchFamily="34" charset="-120"/>
+                <a:ea typeface="BIZ UDPGothic" pitchFamily="34" charset="-122"/>
+                <a:cs typeface="BIZ UDPGothic" pitchFamily="34" charset="-120"/>
               </a:rPr>
               <a:t>RULE 03</a:t>
             </a:r>
@@ -3600,11 +3600,11 @@
             <a:r>
               <a:rPr lang="en-US" sz="2300" b="1" dirty="0">
                 <a:solidFill>
-                  <a:srgbClr val="F5F5F0"/>
-                </a:solidFill>
-                <a:latin typeface="Noto Sans JP" pitchFamily="34" charset="0"/>
-                <a:ea typeface="Noto Sans JP" pitchFamily="34" charset="-122"/>
-                <a:cs typeface="Noto Sans JP" pitchFamily="34" charset="-120"/>
+                  <a:srgbClr val="16181D"/>
+                </a:solidFill>
+                <a:latin typeface="BIZ UDPGothic" pitchFamily="34" charset="0"/>
+                <a:ea typeface="BIZ UDPGothic" pitchFamily="34" charset="-122"/>
+                <a:cs typeface="BIZ UDPGothic" pitchFamily="34" charset="-120"/>
               </a:rPr>
               <a:t>特区は都道府県単位、判定は企業単位</a:t>
             </a:r>
@@ -3642,11 +3642,11 @@
             <a:r>
               <a:rPr lang="en-US" sz="1500" dirty="0">
                 <a:solidFill>
-                  <a:srgbClr val="F5F5F0"/>
-                </a:solidFill>
-                <a:latin typeface="Noto Sans JP" pitchFamily="34" charset="0"/>
-                <a:ea typeface="Noto Sans JP" pitchFamily="34" charset="-122"/>
-                <a:cs typeface="Noto Sans JP" pitchFamily="34" charset="-120"/>
+                  <a:srgbClr val="16181D"/>
+                </a:solidFill>
+                <a:latin typeface="BIZ UDPGothic" pitchFamily="34" charset="0"/>
+                <a:ea typeface="BIZ UDPGothic" pitchFamily="34" charset="-122"/>
+                <a:cs typeface="BIZ UDPGothic" pitchFamily="34" charset="-120"/>
               </a:rPr>
               <a:t>特区の認定は都道府県単位だが、実際に恩恵を受けるのは個別企業。剥奪・継続の判定は都道府県単位ではなく企業単位で独立して行う。</a:t>
             </a:r>
@@ -3671,7 +3671,7 @@
             </a:avLst>
           </a:prstGeom>
           <a:solidFill>
-            <a:srgbClr val="2E2E2E"/>
+            <a:srgbClr val="DDE0E6"/>
           </a:solidFill>
           <a:ln/>
           <a:effectLst>
@@ -3713,8 +3713,8 @@
                   <a:srgbClr val="000000"/>
                 </a:solidFill>
                 <a:latin typeface="Arial" pitchFamily="34" charset="0"/>
-                <a:ea typeface="Arial" pitchFamily="34" charset="-122"/>
-                <a:cs typeface="Arial" pitchFamily="34" charset="-120"/>
+                <a:ea typeface="BIZ UDPGothic" pitchFamily="34" charset="-122"/>
+                <a:cs typeface="BIZ UDPGothic" pitchFamily="34" charset="-120"/>
               </a:rPr>
               <a:t>🏛️</a:t>
             </a:r>
@@ -3749,11 +3749,11 @@
             <a:r>
               <a:rPr lang="en-US" sz="1400" b="1" dirty="0">
                 <a:solidFill>
-                  <a:srgbClr val="F5F5F0"/>
-                </a:solidFill>
-                <a:latin typeface="Noto Sans JP" pitchFamily="34" charset="0"/>
-                <a:ea typeface="Noto Sans JP" pitchFamily="34" charset="-122"/>
-                <a:cs typeface="Noto Sans JP" pitchFamily="34" charset="-120"/>
+                  <a:srgbClr val="16181D"/>
+                </a:solidFill>
+                <a:latin typeface="BIZ UDPGothic" pitchFamily="34" charset="0"/>
+                <a:ea typeface="BIZ UDPGothic" pitchFamily="34" charset="-122"/>
+                <a:cs typeface="BIZ UDPGothic" pitchFamily="34" charset="-120"/>
               </a:rPr>
               <a:t>都道府県（特区）</a:t>
             </a:r>
@@ -3788,13 +3788,13 @@
             <a:r>
               <a:rPr lang="en-US" sz="1250" dirty="0">
                 <a:solidFill>
-                  <a:srgbClr val="F5F5F0">
+                  <a:srgbClr val="16181D">
                     <a:alpha val="85000"/>
                   </a:srgbClr>
                 </a:solidFill>
-                <a:latin typeface="Noto Sans JP" pitchFamily="34" charset="0"/>
-                <a:ea typeface="Noto Sans JP" pitchFamily="34" charset="-122"/>
-                <a:cs typeface="Noto Sans JP" pitchFamily="34" charset="-120"/>
+                <a:latin typeface="BIZ UDPGothic" pitchFamily="34" charset="0"/>
+                <a:ea typeface="BIZ UDPGothic" pitchFamily="34" charset="-122"/>
+                <a:cs typeface="BIZ UDPGothic" pitchFamily="34" charset="-120"/>
               </a:rPr>
               <a:t>特区自体が一括で評価されるのではない</a:t>
             </a:r>
@@ -3819,11 +3819,11 @@
             </a:avLst>
           </a:prstGeom>
           <a:solidFill>
-            <a:srgbClr val="1A1A1A"/>
+            <a:srgbClr val="FFFFFF"/>
           </a:solidFill>
           <a:ln w="19050">
             <a:solidFill>
-              <a:srgbClr val="D62828"/>
+              <a:srgbClr val="C8161D"/>
             </a:solidFill>
             <a:prstDash val="solid"/>
           </a:ln>
@@ -3866,8 +3866,8 @@
                   <a:srgbClr val="000000"/>
                 </a:solidFill>
                 <a:latin typeface="Arial" pitchFamily="34" charset="0"/>
-                <a:ea typeface="Arial" pitchFamily="34" charset="-122"/>
-                <a:cs typeface="Arial" pitchFamily="34" charset="-120"/>
+                <a:ea typeface="BIZ UDPGothic" pitchFamily="34" charset="-122"/>
+                <a:cs typeface="BIZ UDPGothic" pitchFamily="34" charset="-120"/>
               </a:rPr>
               <a:t>🤖</a:t>
             </a:r>
@@ -3902,11 +3902,11 @@
             <a:r>
               <a:rPr lang="en-US" sz="1400" b="1" dirty="0">
                 <a:solidFill>
-                  <a:srgbClr val="D62828"/>
-                </a:solidFill>
-                <a:latin typeface="Noto Sans JP" pitchFamily="34" charset="0"/>
-                <a:ea typeface="Noto Sans JP" pitchFamily="34" charset="-122"/>
-                <a:cs typeface="Noto Sans JP" pitchFamily="34" charset="-120"/>
+                  <a:srgbClr val="C8161D"/>
+                </a:solidFill>
+                <a:latin typeface="BIZ UDPGothic" pitchFamily="34" charset="0"/>
+                <a:ea typeface="BIZ UDPGothic" pitchFamily="34" charset="-122"/>
+                <a:cs typeface="BIZ UDPGothic" pitchFamily="34" charset="-120"/>
               </a:rPr>
               <a:t>個別企業</a:t>
             </a:r>
@@ -3941,11 +3941,11 @@
             <a:r>
               <a:rPr lang="en-US" sz="1250" dirty="0">
                 <a:solidFill>
-                  <a:srgbClr val="F5F5F0"/>
-                </a:solidFill>
-                <a:latin typeface="Noto Sans JP" pitchFamily="34" charset="0"/>
-                <a:ea typeface="Noto Sans JP" pitchFamily="34" charset="-122"/>
-                <a:cs typeface="Noto Sans JP" pitchFamily="34" charset="-120"/>
+                  <a:srgbClr val="16181D"/>
+                </a:solidFill>
+                <a:latin typeface="BIZ UDPGothic" pitchFamily="34" charset="0"/>
+                <a:ea typeface="BIZ UDPGothic" pitchFamily="34" charset="-122"/>
+                <a:cs typeface="BIZ UDPGothic" pitchFamily="34" charset="-120"/>
               </a:rPr>
               <a:t>達成状況を個別に評価。他社の不振に巻き添えを受けない</a:t>
             </a:r>
@@ -3980,13 +3980,13 @@
             <a:r>
               <a:rPr lang="en-US" sz="900" dirty="0">
                 <a:solidFill>
-                  <a:srgbClr val="F5F5F0">
+                  <a:srgbClr val="16181D">
                     <a:alpha val="45000"/>
                   </a:srgbClr>
                 </a:solidFill>
-                <a:latin typeface="Noto Sans JP" pitchFamily="34" charset="0"/>
-                <a:ea typeface="Noto Sans JP" pitchFamily="34" charset="-122"/>
-                <a:cs typeface="Noto Sans JP" pitchFamily="34" charset="-120"/>
+                <a:latin typeface="BIZ UDPGothic" pitchFamily="34" charset="0"/>
+                <a:ea typeface="BIZ UDPGothic" pitchFamily="34" charset="-122"/>
+                <a:cs typeface="BIZ UDPGothic" pitchFamily="34" charset="-120"/>
               </a:rPr>
               <a:t>REBOOT JAPAN ── 市民による政策提言プラットフォーム</a:t>
             </a:r>
@@ -4021,13 +4021,13 @@
             <a:r>
               <a:rPr lang="en-US" sz="900" dirty="0">
                 <a:solidFill>
-                  <a:srgbClr val="F5F5F0">
+                  <a:srgbClr val="16181D">
                     <a:alpha val="45000"/>
                   </a:srgbClr>
                 </a:solidFill>
-                <a:latin typeface="Noto Sans JP" pitchFamily="34" charset="0"/>
-                <a:ea typeface="Noto Sans JP" pitchFamily="34" charset="-122"/>
-                <a:cs typeface="Noto Sans JP" pitchFamily="34" charset="-120"/>
+                <a:latin typeface="BIZ UDPGothic" pitchFamily="34" charset="0"/>
+                <a:ea typeface="BIZ UDPGothic" pitchFamily="34" charset="-122"/>
+                <a:cs typeface="BIZ UDPGothic" pitchFamily="34" charset="-120"/>
               </a:rPr>
               <a:t>10</a:t>
             </a:r>
@@ -4049,7 +4049,7 @@
     <p:bg>
       <p:bgPr>
         <a:solidFill>
-          <a:srgbClr val="0A0A0A"/>
+          <a:srgbClr val="F5F6F8"/>
         </a:solidFill>
       </p:bgPr>
     </p:bg>
@@ -4094,11 +4094,11 @@
             <a:r>
               <a:rPr lang="en-US" sz="1200" b="1" spc="200" kern="0" dirty="0">
                 <a:solidFill>
-                  <a:srgbClr val="D62828"/>
+                  <a:srgbClr val="C8161D"/>
                 </a:solidFill>
                 <a:latin typeface="Arial" pitchFamily="34" charset="0"/>
-                <a:ea typeface="Arial" pitchFamily="34" charset="-122"/>
-                <a:cs typeface="Arial" pitchFamily="34" charset="-120"/>
+                <a:ea typeface="BIZ UDPGothic" pitchFamily="34" charset="-122"/>
+                <a:cs typeface="BIZ UDPGothic" pitchFamily="34" charset="-120"/>
               </a:rPr>
               <a:t>RULE 03 — DETAIL</a:t>
             </a:r>
@@ -4133,11 +4133,11 @@
             <a:r>
               <a:rPr lang="en-US" sz="2300" b="1" dirty="0">
                 <a:solidFill>
-                  <a:srgbClr val="F5F5F0"/>
-                </a:solidFill>
-                <a:latin typeface="Noto Sans JP" pitchFamily="34" charset="0"/>
-                <a:ea typeface="Noto Sans JP" pitchFamily="34" charset="-122"/>
-                <a:cs typeface="Noto Sans JP" pitchFamily="34" charset="-120"/>
+                  <a:srgbClr val="16181D"/>
+                </a:solidFill>
+                <a:latin typeface="BIZ UDPGothic" pitchFamily="34" charset="0"/>
+                <a:ea typeface="BIZ UDPGothic" pitchFamily="34" charset="-122"/>
+                <a:cs typeface="BIZ UDPGothic" pitchFamily="34" charset="-120"/>
               </a:rPr>
               <a:t>達成率に応じた段階的な補助金カーブ</a:t>
             </a:r>
@@ -4160,7 +4160,7 @@
             <a:avLst/>
           </a:prstGeom>
           <a:solidFill>
-            <a:srgbClr val="2E2E2E"/>
+            <a:srgbClr val="DDE0E6"/>
           </a:solidFill>
           <a:ln/>
         </p:spPr>
@@ -4180,7 +4180,7 @@
             <a:avLst/>
           </a:prstGeom>
           <a:solidFill>
-            <a:srgbClr val="D62828"/>
+            <a:srgbClr val="C8161D"/>
           </a:solidFill>
           <a:ln/>
         </p:spPr>
@@ -4212,11 +4212,11 @@
             <a:r>
               <a:rPr lang="en-US" sz="1300" b="1" dirty="0">
                 <a:solidFill>
-                  <a:srgbClr val="D62828"/>
-                </a:solidFill>
-                <a:latin typeface="Noto Sans JP" pitchFamily="34" charset="0"/>
-                <a:ea typeface="Noto Sans JP" pitchFamily="34" charset="-122"/>
-                <a:cs typeface="Noto Sans JP" pitchFamily="34" charset="-120"/>
+                  <a:srgbClr val="C8161D"/>
+                </a:solidFill>
+                <a:latin typeface="BIZ UDPGothic" pitchFamily="34" charset="0"/>
+                <a:ea typeface="BIZ UDPGothic" pitchFamily="34" charset="-122"/>
+                <a:cs typeface="BIZ UDPGothic" pitchFamily="34" charset="-120"/>
               </a:rPr>
               <a:t>0〜3年目</a:t>
             </a:r>
@@ -4241,7 +4241,7 @@
             </a:avLst>
           </a:prstGeom>
           <a:solidFill>
-            <a:srgbClr val="1A1A1A"/>
+            <a:srgbClr val="FFFFFF"/>
           </a:solidFill>
           <a:ln/>
           <a:effectLst>
@@ -4280,11 +4280,11 @@
             <a:r>
               <a:rPr lang="en-US" sz="1400" b="1" dirty="0">
                 <a:solidFill>
-                  <a:srgbClr val="F5F5F0"/>
-                </a:solidFill>
-                <a:latin typeface="Noto Sans JP" pitchFamily="34" charset="0"/>
-                <a:ea typeface="Noto Sans JP" pitchFamily="34" charset="-122"/>
-                <a:cs typeface="Noto Sans JP" pitchFamily="34" charset="-120"/>
+                  <a:srgbClr val="16181D"/>
+                </a:solidFill>
+                <a:latin typeface="BIZ UDPGothic" pitchFamily="34" charset="0"/>
+                <a:ea typeface="BIZ UDPGothic" pitchFamily="34" charset="-122"/>
+                <a:cs typeface="BIZ UDPGothic" pitchFamily="34" charset="-120"/>
               </a:rPr>
               <a:t>フル支援</a:t>
             </a:r>
@@ -4322,11 +4322,11 @@
             <a:r>
               <a:rPr lang="en-US" sz="1100" dirty="0">
                 <a:solidFill>
-                  <a:srgbClr val="F5F5F0"/>
-                </a:solidFill>
-                <a:latin typeface="Noto Sans JP" pitchFamily="34" charset="0"/>
-                <a:ea typeface="Noto Sans JP" pitchFamily="34" charset="-122"/>
-                <a:cs typeface="Noto Sans JP" pitchFamily="34" charset="-120"/>
+                  <a:srgbClr val="16181D"/>
+                </a:solidFill>
+                <a:latin typeface="BIZ UDPGothic" pitchFamily="34" charset="0"/>
+                <a:ea typeface="BIZ UDPGothic" pitchFamily="34" charset="-122"/>
+                <a:cs typeface="BIZ UDPGothic" pitchFamily="34" charset="-120"/>
               </a:rPr>
               <a:t>事業計画・数値目標を提出。企業ごとに達成状況を評価</a:t>
             </a:r>
@@ -4349,7 +4349,7 @@
             <a:avLst/>
           </a:prstGeom>
           <a:solidFill>
-            <a:srgbClr val="2E2E2E"/>
+            <a:srgbClr val="DDE0E6"/>
           </a:solidFill>
           <a:ln/>
         </p:spPr>
@@ -4369,7 +4369,7 @@
             <a:avLst/>
           </a:prstGeom>
           <a:solidFill>
-            <a:srgbClr val="D62828"/>
+            <a:srgbClr val="C8161D"/>
           </a:solidFill>
           <a:ln/>
         </p:spPr>
@@ -4401,11 +4401,11 @@
             <a:r>
               <a:rPr lang="en-US" sz="1300" b="1" dirty="0">
                 <a:solidFill>
-                  <a:srgbClr val="D62828"/>
-                </a:solidFill>
-                <a:latin typeface="Noto Sans JP" pitchFamily="34" charset="0"/>
-                <a:ea typeface="Noto Sans JP" pitchFamily="34" charset="-122"/>
-                <a:cs typeface="Noto Sans JP" pitchFamily="34" charset="-120"/>
+                  <a:srgbClr val="C8161D"/>
+                </a:solidFill>
+                <a:latin typeface="BIZ UDPGothic" pitchFamily="34" charset="0"/>
+                <a:ea typeface="BIZ UDPGothic" pitchFamily="34" charset="-122"/>
+                <a:cs typeface="BIZ UDPGothic" pitchFamily="34" charset="-120"/>
               </a:rPr>
               <a:t>3〜7年目</a:t>
             </a:r>
@@ -4430,7 +4430,7 @@
             </a:avLst>
           </a:prstGeom>
           <a:solidFill>
-            <a:srgbClr val="1A1A1A"/>
+            <a:srgbClr val="FFFFFF"/>
           </a:solidFill>
           <a:ln/>
           <a:effectLst>
@@ -4469,11 +4469,11 @@
             <a:r>
               <a:rPr lang="en-US" sz="1400" b="1" dirty="0">
                 <a:solidFill>
-                  <a:srgbClr val="F5F5F0"/>
-                </a:solidFill>
-                <a:latin typeface="Noto Sans JP" pitchFamily="34" charset="0"/>
-                <a:ea typeface="Noto Sans JP" pitchFamily="34" charset="-122"/>
-                <a:cs typeface="Noto Sans JP" pitchFamily="34" charset="-120"/>
+                  <a:srgbClr val="16181D"/>
+                </a:solidFill>
+                <a:latin typeface="BIZ UDPGothic" pitchFamily="34" charset="0"/>
+                <a:ea typeface="BIZ UDPGothic" pitchFamily="34" charset="-122"/>
+                <a:cs typeface="BIZ UDPGothic" pitchFamily="34" charset="-120"/>
               </a:rPr>
               <a:t>段階的に減額</a:t>
             </a:r>
@@ -4511,11 +4511,11 @@
             <a:r>
               <a:rPr lang="en-US" sz="1100" dirty="0">
                 <a:solidFill>
-                  <a:srgbClr val="F5F5F0"/>
-                </a:solidFill>
-                <a:latin typeface="Noto Sans JP" pitchFamily="34" charset="0"/>
-                <a:ea typeface="Noto Sans JP" pitchFamily="34" charset="-122"/>
-                <a:cs typeface="Noto Sans JP" pitchFamily="34" charset="-120"/>
+                  <a:srgbClr val="16181D"/>
+                </a:solidFill>
+                <a:latin typeface="BIZ UDPGothic" pitchFamily="34" charset="0"/>
+                <a:ea typeface="BIZ UDPGothic" pitchFamily="34" charset="-122"/>
+                <a:cs typeface="BIZ UDPGothic" pitchFamily="34" charset="-120"/>
               </a:rPr>
               <a:t>達成率が高いほど緩やか、低いほど急に減額</a:t>
             </a:r>
@@ -4538,7 +4538,7 @@
             <a:avLst/>
           </a:prstGeom>
           <a:solidFill>
-            <a:srgbClr val="2E2E2E"/>
+            <a:srgbClr val="DDE0E6"/>
           </a:solidFill>
           <a:ln/>
         </p:spPr>
@@ -4558,7 +4558,7 @@
             <a:avLst/>
           </a:prstGeom>
           <a:solidFill>
-            <a:srgbClr val="D62828"/>
+            <a:srgbClr val="C8161D"/>
           </a:solidFill>
           <a:ln/>
         </p:spPr>
@@ -4590,11 +4590,11 @@
             <a:r>
               <a:rPr lang="en-US" sz="1300" b="1" dirty="0">
                 <a:solidFill>
-                  <a:srgbClr val="D62828"/>
-                </a:solidFill>
-                <a:latin typeface="Noto Sans JP" pitchFamily="34" charset="0"/>
-                <a:ea typeface="Noto Sans JP" pitchFamily="34" charset="-122"/>
-                <a:cs typeface="Noto Sans JP" pitchFamily="34" charset="-120"/>
+                  <a:srgbClr val="C8161D"/>
+                </a:solidFill>
+                <a:latin typeface="BIZ UDPGothic" pitchFamily="34" charset="0"/>
+                <a:ea typeface="BIZ UDPGothic" pitchFamily="34" charset="-122"/>
+                <a:cs typeface="BIZ UDPGothic" pitchFamily="34" charset="-120"/>
               </a:rPr>
               <a:t>7年目</a:t>
             </a:r>
@@ -4619,7 +4619,7 @@
             </a:avLst>
           </a:prstGeom>
           <a:solidFill>
-            <a:srgbClr val="1A1A1A"/>
+            <a:srgbClr val="FFFFFF"/>
           </a:solidFill>
           <a:ln/>
           <a:effectLst>
@@ -4658,11 +4658,11 @@
             <a:r>
               <a:rPr lang="en-US" sz="1400" b="1" dirty="0">
                 <a:solidFill>
-                  <a:srgbClr val="F5F5F0"/>
-                </a:solidFill>
-                <a:latin typeface="Noto Sans JP" pitchFamily="34" charset="0"/>
-                <a:ea typeface="Noto Sans JP" pitchFamily="34" charset="-122"/>
-                <a:cs typeface="Noto Sans JP" pitchFamily="34" charset="-120"/>
+                  <a:srgbClr val="16181D"/>
+                </a:solidFill>
+                <a:latin typeface="BIZ UDPGothic" pitchFamily="34" charset="0"/>
+                <a:ea typeface="BIZ UDPGothic" pitchFamily="34" charset="-122"/>
+                <a:cs typeface="BIZ UDPGothic" pitchFamily="34" charset="-120"/>
               </a:rPr>
               <a:t>プログラム終了</a:t>
             </a:r>
@@ -4700,11 +4700,11 @@
             <a:r>
               <a:rPr lang="en-US" sz="1100" dirty="0">
                 <a:solidFill>
-                  <a:srgbClr val="F5F5F0"/>
-                </a:solidFill>
-                <a:latin typeface="Noto Sans JP" pitchFamily="34" charset="0"/>
-                <a:ea typeface="Noto Sans JP" pitchFamily="34" charset="-122"/>
-                <a:cs typeface="Noto Sans JP" pitchFamily="34" charset="-120"/>
+                  <a:srgbClr val="16181D"/>
+                </a:solidFill>
+                <a:latin typeface="BIZ UDPGothic" pitchFamily="34" charset="0"/>
+                <a:ea typeface="BIZ UDPGothic" pitchFamily="34" charset="-122"/>
+                <a:cs typeface="BIZ UDPGothic" pitchFamily="34" charset="-120"/>
               </a:rPr>
               <a:t>補助金プログラム自体が終了する</a:t>
             </a:r>
@@ -4727,7 +4727,7 @@
             <a:avLst/>
           </a:prstGeom>
           <a:solidFill>
-            <a:srgbClr val="D62828"/>
+            <a:srgbClr val="C8161D"/>
           </a:solidFill>
           <a:ln/>
         </p:spPr>
@@ -4747,7 +4747,7 @@
             <a:avLst/>
           </a:prstGeom>
           <a:solidFill>
-            <a:srgbClr val="D62828"/>
+            <a:srgbClr val="C8161D"/>
           </a:solidFill>
           <a:ln/>
         </p:spPr>
@@ -4779,11 +4779,11 @@
             <a:r>
               <a:rPr lang="en-US" sz="1300" b="1" dirty="0">
                 <a:solidFill>
-                  <a:srgbClr val="D62828"/>
-                </a:solidFill>
-                <a:latin typeface="Noto Sans JP" pitchFamily="34" charset="0"/>
-                <a:ea typeface="Noto Sans JP" pitchFamily="34" charset="-122"/>
-                <a:cs typeface="Noto Sans JP" pitchFamily="34" charset="-120"/>
+                  <a:srgbClr val="C8161D"/>
+                </a:solidFill>
+                <a:latin typeface="BIZ UDPGothic" pitchFamily="34" charset="0"/>
+                <a:ea typeface="BIZ UDPGothic" pitchFamily="34" charset="-122"/>
+                <a:cs typeface="BIZ UDPGothic" pitchFamily="34" charset="-120"/>
               </a:rPr>
               <a:t>8年目〜</a:t>
             </a:r>
@@ -4808,7 +4808,7 @@
             </a:avLst>
           </a:prstGeom>
           <a:solidFill>
-            <a:srgbClr val="1A1A1A"/>
+            <a:srgbClr val="FFFFFF"/>
           </a:solidFill>
           <a:ln/>
           <a:effectLst>
@@ -4847,11 +4847,11 @@
             <a:r>
               <a:rPr lang="en-US" sz="1400" b="1" dirty="0">
                 <a:solidFill>
-                  <a:srgbClr val="F5F5F0"/>
-                </a:solidFill>
-                <a:latin typeface="Noto Sans JP" pitchFamily="34" charset="0"/>
-                <a:ea typeface="Noto Sans JP" pitchFamily="34" charset="-122"/>
-                <a:cs typeface="Noto Sans JP" pitchFamily="34" charset="-120"/>
+                  <a:srgbClr val="16181D"/>
+                </a:solidFill>
+                <a:latin typeface="BIZ UDPGothic" pitchFamily="34" charset="0"/>
+                <a:ea typeface="BIZ UDPGothic" pitchFamily="34" charset="-122"/>
+                <a:cs typeface="BIZ UDPGothic" pitchFamily="34" charset="-120"/>
               </a:rPr>
               <a:t>完全ゼロ</a:t>
             </a:r>
@@ -4889,11 +4889,11 @@
             <a:r>
               <a:rPr lang="en-US" sz="1100" dirty="0">
                 <a:solidFill>
-                  <a:srgbClr val="F5F5F0"/>
-                </a:solidFill>
-                <a:latin typeface="Noto Sans JP" pitchFamily="34" charset="0"/>
-                <a:ea typeface="Noto Sans JP" pitchFamily="34" charset="-122"/>
-                <a:cs typeface="Noto Sans JP" pitchFamily="34" charset="-120"/>
+                  <a:srgbClr val="16181D"/>
+                </a:solidFill>
+                <a:latin typeface="BIZ UDPGothic" pitchFamily="34" charset="0"/>
+                <a:ea typeface="BIZ UDPGothic" pitchFamily="34" charset="-122"/>
+                <a:cs typeface="BIZ UDPGothic" pitchFamily="34" charset="-120"/>
               </a:rPr>
               <a:t>全企業一律で補助金ゼロ、完全自走へ</a:t>
             </a:r>
@@ -4928,13 +4928,13 @@
             <a:r>
               <a:rPr lang="en-US" sz="900" dirty="0">
                 <a:solidFill>
-                  <a:srgbClr val="F5F5F0">
+                  <a:srgbClr val="16181D">
                     <a:alpha val="45000"/>
                   </a:srgbClr>
                 </a:solidFill>
-                <a:latin typeface="Noto Sans JP" pitchFamily="34" charset="0"/>
-                <a:ea typeface="Noto Sans JP" pitchFamily="34" charset="-122"/>
-                <a:cs typeface="Noto Sans JP" pitchFamily="34" charset="-120"/>
+                <a:latin typeface="BIZ UDPGothic" pitchFamily="34" charset="0"/>
+                <a:ea typeface="BIZ UDPGothic" pitchFamily="34" charset="-122"/>
+                <a:cs typeface="BIZ UDPGothic" pitchFamily="34" charset="-120"/>
               </a:rPr>
               <a:t>REBOOT JAPAN ── 市民による政策提言プラットフォーム</a:t>
             </a:r>
@@ -4969,13 +4969,13 @@
             <a:r>
               <a:rPr lang="en-US" sz="900" dirty="0">
                 <a:solidFill>
-                  <a:srgbClr val="F5F5F0">
+                  <a:srgbClr val="16181D">
                     <a:alpha val="45000"/>
                   </a:srgbClr>
                 </a:solidFill>
-                <a:latin typeface="Noto Sans JP" pitchFamily="34" charset="0"/>
-                <a:ea typeface="Noto Sans JP" pitchFamily="34" charset="-122"/>
-                <a:cs typeface="Noto Sans JP" pitchFamily="34" charset="-120"/>
+                <a:latin typeface="BIZ UDPGothic" pitchFamily="34" charset="0"/>
+                <a:ea typeface="BIZ UDPGothic" pitchFamily="34" charset="-122"/>
+                <a:cs typeface="BIZ UDPGothic" pitchFamily="34" charset="-120"/>
               </a:rPr>
               <a:t>11</a:t>
             </a:r>
@@ -4997,7 +4997,7 @@
     <p:bg>
       <p:bgPr>
         <a:solidFill>
-          <a:srgbClr val="0A0A0A"/>
+          <a:srgbClr val="F5F6F8"/>
         </a:solidFill>
       </p:bgPr>
     </p:bg>
@@ -5042,11 +5042,11 @@
             <a:r>
               <a:rPr lang="en-US" sz="1200" b="1" spc="200" kern="0" dirty="0">
                 <a:solidFill>
-                  <a:srgbClr val="D62828"/>
+                  <a:srgbClr val="C8161D"/>
                 </a:solidFill>
                 <a:latin typeface="Arial" pitchFamily="34" charset="0"/>
-                <a:ea typeface="Arial" pitchFamily="34" charset="-122"/>
-                <a:cs typeface="Arial" pitchFamily="34" charset="-120"/>
+                <a:ea typeface="BIZ UDPGothic" pitchFamily="34" charset="-122"/>
+                <a:cs typeface="BIZ UDPGothic" pitchFamily="34" charset="-120"/>
               </a:rPr>
               <a:t>RULE 03 — MONITORING</a:t>
             </a:r>
@@ -5081,11 +5081,11 @@
             <a:r>
               <a:rPr lang="en-US" sz="2100" b="1" dirty="0">
                 <a:solidFill>
-                  <a:srgbClr val="F5F5F0"/>
-                </a:solidFill>
-                <a:latin typeface="Noto Sans JP" pitchFamily="34" charset="0"/>
-                <a:ea typeface="Noto Sans JP" pitchFamily="34" charset="-122"/>
-                <a:cs typeface="Noto Sans JP" pitchFamily="34" charset="-120"/>
+                  <a:srgbClr val="16181D"/>
+                </a:solidFill>
+                <a:latin typeface="BIZ UDPGothic" pitchFamily="34" charset="0"/>
+                <a:ea typeface="BIZ UDPGothic" pitchFamily="34" charset="-122"/>
+                <a:cs typeface="BIZ UDPGothic" pitchFamily="34" charset="-120"/>
               </a:rPr>
               <a:t>不正やごまかしは、達成率に関係なく即アウト</a:t>
             </a:r>
@@ -5110,11 +5110,11 @@
             </a:avLst>
           </a:prstGeom>
           <a:solidFill>
-            <a:srgbClr val="1A1A1A"/>
+            <a:srgbClr val="FFFFFF"/>
           </a:solidFill>
           <a:ln w="19050">
             <a:solidFill>
-              <a:srgbClr val="D62828"/>
+              <a:srgbClr val="C8161D"/>
             </a:solidFill>
             <a:prstDash val="solid"/>
           </a:ln>
@@ -5157,8 +5157,8 @@
                   <a:srgbClr val="000000"/>
                 </a:solidFill>
                 <a:latin typeface="Arial" pitchFamily="34" charset="0"/>
-                <a:ea typeface="Arial" pitchFamily="34" charset="-122"/>
-                <a:cs typeface="Arial" pitchFamily="34" charset="-120"/>
+                <a:ea typeface="BIZ UDPGothic" pitchFamily="34" charset="-122"/>
+                <a:cs typeface="BIZ UDPGothic" pitchFamily="34" charset="-120"/>
               </a:rPr>
               <a:t>⚠️</a:t>
             </a:r>
@@ -5193,11 +5193,11 @@
             <a:r>
               <a:rPr lang="en-US" sz="1600" b="1" dirty="0">
                 <a:solidFill>
-                  <a:srgbClr val="D62828"/>
-                </a:solidFill>
-                <a:latin typeface="Noto Sans JP" pitchFamily="34" charset="0"/>
-                <a:ea typeface="Noto Sans JP" pitchFamily="34" charset="-122"/>
-                <a:cs typeface="Noto Sans JP" pitchFamily="34" charset="-120"/>
+                  <a:srgbClr val="C8161D"/>
+                </a:solidFill>
+                <a:latin typeface="BIZ UDPGothic" pitchFamily="34" charset="0"/>
+                <a:ea typeface="BIZ UDPGothic" pitchFamily="34" charset="-122"/>
+                <a:cs typeface="BIZ UDPGothic" pitchFamily="34" charset="-120"/>
               </a:rPr>
               <a:t>達成率連動モデルとは別軸で、即時剥奪の対象とする</a:t>
             </a:r>
@@ -5236,11 +5236,11 @@
             <a:r>
               <a:rPr lang="en-US" sz="1400" dirty="0">
                 <a:solidFill>
-                  <a:srgbClr val="F5F5F0"/>
-                </a:solidFill>
-                <a:latin typeface="Noto Sans JP" pitchFamily="34" charset="0"/>
-                <a:ea typeface="Noto Sans JP" pitchFamily="34" charset="-122"/>
-                <a:cs typeface="Noto Sans JP" pitchFamily="34" charset="-120"/>
+                  <a:srgbClr val="16181D"/>
+                </a:solidFill>
+                <a:latin typeface="BIZ UDPGothic" pitchFamily="34" charset="0"/>
+                <a:ea typeface="BIZ UDPGothic" pitchFamily="34" charset="-122"/>
+                <a:cs typeface="BIZ UDPGothic" pitchFamily="34" charset="-120"/>
               </a:rPr>
               <a:t>予算の不透明な流用・目的外使用が発覚した場合</a:t>
             </a:r>
@@ -5257,11 +5257,11 @@
             <a:r>
               <a:rPr lang="en-US" sz="1400" dirty="0">
                 <a:solidFill>
-                  <a:srgbClr val="F5F5F0"/>
-                </a:solidFill>
-                <a:latin typeface="Noto Sans JP" pitchFamily="34" charset="0"/>
-                <a:ea typeface="Noto Sans JP" pitchFamily="34" charset="-122"/>
-                <a:cs typeface="Noto Sans JP" pitchFamily="34" charset="-120"/>
+                  <a:srgbClr val="16181D"/>
+                </a:solidFill>
+                <a:latin typeface="BIZ UDPGothic" pitchFamily="34" charset="0"/>
+                <a:ea typeface="BIZ UDPGothic" pitchFamily="34" charset="-122"/>
+                <a:cs typeface="BIZ UDPGothic" pitchFamily="34" charset="-120"/>
               </a:rPr>
               <a:t>重大事故（安全基準を著しく下回る事故）を起こした場合</a:t>
             </a:r>
@@ -5296,13 +5296,13 @@
             <a:r>
               <a:rPr lang="en-US" sz="1200" dirty="0">
                 <a:solidFill>
-                  <a:srgbClr val="F5F5F0">
+                  <a:srgbClr val="16181D">
                     <a:alpha val="80000"/>
                   </a:srgbClr>
                 </a:solidFill>
-                <a:latin typeface="Noto Sans JP" pitchFamily="34" charset="0"/>
-                <a:ea typeface="Noto Sans JP" pitchFamily="34" charset="-122"/>
-                <a:cs typeface="Noto Sans JP" pitchFamily="34" charset="-120"/>
+                <a:latin typeface="BIZ UDPGothic" pitchFamily="34" charset="0"/>
+                <a:ea typeface="BIZ UDPGothic" pitchFamily="34" charset="-122"/>
+                <a:cs typeface="BIZ UDPGothic" pitchFamily="34" charset="-120"/>
               </a:rPr>
               <a:t>達成率評価は「頑張りの度合い」を測るもの。不正・重大事故は頑張りとは無関係に即退場させるべきレッドラインとして明確に切り分ける。</a:t>
             </a:r>
@@ -5337,13 +5337,13 @@
             <a:r>
               <a:rPr lang="en-US" sz="900" dirty="0">
                 <a:solidFill>
-                  <a:srgbClr val="F5F5F0">
+                  <a:srgbClr val="16181D">
                     <a:alpha val="45000"/>
                   </a:srgbClr>
                 </a:solidFill>
-                <a:latin typeface="Noto Sans JP" pitchFamily="34" charset="0"/>
-                <a:ea typeface="Noto Sans JP" pitchFamily="34" charset="-122"/>
-                <a:cs typeface="Noto Sans JP" pitchFamily="34" charset="-120"/>
+                <a:latin typeface="BIZ UDPGothic" pitchFamily="34" charset="0"/>
+                <a:ea typeface="BIZ UDPGothic" pitchFamily="34" charset="-122"/>
+                <a:cs typeface="BIZ UDPGothic" pitchFamily="34" charset="-120"/>
               </a:rPr>
               <a:t>REBOOT JAPAN ── 市民による政策提言プラットフォーム</a:t>
             </a:r>
@@ -5378,13 +5378,13 @@
             <a:r>
               <a:rPr lang="en-US" sz="900" dirty="0">
                 <a:solidFill>
-                  <a:srgbClr val="F5F5F0">
+                  <a:srgbClr val="16181D">
                     <a:alpha val="45000"/>
                   </a:srgbClr>
                 </a:solidFill>
-                <a:latin typeface="Noto Sans JP" pitchFamily="34" charset="0"/>
-                <a:ea typeface="Noto Sans JP" pitchFamily="34" charset="-122"/>
-                <a:cs typeface="Noto Sans JP" pitchFamily="34" charset="-120"/>
+                <a:latin typeface="BIZ UDPGothic" pitchFamily="34" charset="0"/>
+                <a:ea typeface="BIZ UDPGothic" pitchFamily="34" charset="-122"/>
+                <a:cs typeface="BIZ UDPGothic" pitchFamily="34" charset="-120"/>
               </a:rPr>
               <a:t>12</a:t>
             </a:r>
@@ -5406,7 +5406,7 @@
     <p:bg>
       <p:bgPr>
         <a:solidFill>
-          <a:srgbClr val="0A0A0A"/>
+          <a:srgbClr val="F5F6F8"/>
         </a:solidFill>
       </p:bgPr>
     </p:bg>
@@ -5451,11 +5451,11 @@
             <a:r>
               <a:rPr lang="en-US" sz="1200" b="1" spc="200" kern="0" dirty="0">
                 <a:solidFill>
-                  <a:srgbClr val="D62828"/>
+                  <a:srgbClr val="C8161D"/>
                 </a:solidFill>
                 <a:latin typeface="Arial" pitchFamily="34" charset="0"/>
-                <a:ea typeface="Arial" pitchFamily="34" charset="-122"/>
-                <a:cs typeface="Arial" pitchFamily="34" charset="-120"/>
+                <a:ea typeface="BIZ UDPGothic" pitchFamily="34" charset="-122"/>
+                <a:cs typeface="BIZ UDPGothic" pitchFamily="34" charset="-120"/>
               </a:rPr>
               <a:t>RULE 03 — DETAIL</a:t>
             </a:r>
@@ -5490,11 +5490,11 @@
             <a:r>
               <a:rPr lang="en-US" sz="2400" b="1" dirty="0">
                 <a:solidFill>
-                  <a:srgbClr val="F5F5F0"/>
-                </a:solidFill>
-                <a:latin typeface="Noto Sans JP" pitchFamily="34" charset="0"/>
-                <a:ea typeface="Noto Sans JP" pitchFamily="34" charset="-122"/>
-                <a:cs typeface="Noto Sans JP" pitchFamily="34" charset="-120"/>
+                  <a:srgbClr val="16181D"/>
+                </a:solidFill>
+                <a:latin typeface="BIZ UDPGothic" pitchFamily="34" charset="0"/>
+                <a:ea typeface="BIZ UDPGothic" pitchFamily="34" charset="-122"/>
+                <a:cs typeface="BIZ UDPGothic" pitchFamily="34" charset="-120"/>
               </a:rPr>
               <a:t>資金の使い道はすべて見える化</a:t>
             </a:r>
@@ -5519,11 +5519,11 @@
             </a:avLst>
           </a:prstGeom>
           <a:solidFill>
-            <a:srgbClr val="1A1A1A"/>
+            <a:srgbClr val="FFFFFF"/>
           </a:solidFill>
           <a:ln w="12700">
             <a:solidFill>
-              <a:srgbClr val="2E2E2E"/>
+              <a:srgbClr val="DDE0E6"/>
             </a:solidFill>
             <a:prstDash val="solid"/>
           </a:ln>
@@ -5566,8 +5566,8 @@
                   <a:srgbClr val="000000"/>
                 </a:solidFill>
                 <a:latin typeface="Arial" pitchFamily="34" charset="0"/>
-                <a:ea typeface="Arial" pitchFamily="34" charset="-122"/>
-                <a:cs typeface="Arial" pitchFamily="34" charset="-120"/>
+                <a:ea typeface="BIZ UDPGothic" pitchFamily="34" charset="-122"/>
+                <a:cs typeface="BIZ UDPGothic" pitchFamily="34" charset="-120"/>
               </a:rPr>
               <a:t>🔍</a:t>
             </a:r>
@@ -5605,11 +5605,11 @@
             <a:r>
               <a:rPr lang="en-US" sz="1400" b="1" dirty="0">
                 <a:solidFill>
-                  <a:srgbClr val="F5F5F0"/>
-                </a:solidFill>
-                <a:latin typeface="Noto Sans JP" pitchFamily="34" charset="0"/>
-                <a:ea typeface="Noto Sans JP" pitchFamily="34" charset="-122"/>
-                <a:cs typeface="Noto Sans JP" pitchFamily="34" charset="-120"/>
+                  <a:srgbClr val="16181D"/>
+                </a:solidFill>
+                <a:latin typeface="BIZ UDPGothic" pitchFamily="34" charset="0"/>
+                <a:ea typeface="BIZ UDPGothic" pitchFamily="34" charset="-122"/>
+                <a:cs typeface="BIZ UDPGothic" pitchFamily="34" charset="-120"/>
               </a:rPr>
               <a:t>資金使途ダッシュボード</a:t>
             </a:r>
@@ -5647,11 +5647,11 @@
             <a:r>
               <a:rPr lang="en-US" sz="1150" dirty="0">
                 <a:solidFill>
-                  <a:srgbClr val="F5F5F0"/>
-                </a:solidFill>
-                <a:latin typeface="Noto Sans JP" pitchFamily="34" charset="0"/>
-                <a:ea typeface="Noto Sans JP" pitchFamily="34" charset="-122"/>
-                <a:cs typeface="Noto Sans JP" pitchFamily="34" charset="-120"/>
+                  <a:srgbClr val="16181D"/>
+                </a:solidFill>
+                <a:latin typeface="BIZ UDPGothic" pitchFamily="34" charset="0"/>
+                <a:ea typeface="BIZ UDPGothic" pitchFamily="34" charset="-122"/>
+                <a:cs typeface="BIZ UDPGothic" pitchFamily="34" charset="-120"/>
               </a:rPr>
               <a:t>補助金がどのベンダー・車両調達に使われたか、全契約・領収書をオンラインでリアルタイム公開</a:t>
             </a:r>
@@ -5676,11 +5676,11 @@
             </a:avLst>
           </a:prstGeom>
           <a:solidFill>
-            <a:srgbClr val="1A1A1A"/>
+            <a:srgbClr val="FFFFFF"/>
           </a:solidFill>
           <a:ln w="12700">
             <a:solidFill>
-              <a:srgbClr val="2E2E2E"/>
+              <a:srgbClr val="DDE0E6"/>
             </a:solidFill>
             <a:prstDash val="solid"/>
           </a:ln>
@@ -5723,8 +5723,8 @@
                   <a:srgbClr val="000000"/>
                 </a:solidFill>
                 <a:latin typeface="Arial" pitchFamily="34" charset="0"/>
-                <a:ea typeface="Arial" pitchFamily="34" charset="-122"/>
-                <a:cs typeface="Arial" pitchFamily="34" charset="-120"/>
+                <a:ea typeface="BIZ UDPGothic" pitchFamily="34" charset="-122"/>
+                <a:cs typeface="BIZ UDPGothic" pitchFamily="34" charset="-120"/>
               </a:rPr>
               <a:t>📋</a:t>
             </a:r>
@@ -5762,11 +5762,11 @@
             <a:r>
               <a:rPr lang="en-US" sz="1400" b="1" dirty="0">
                 <a:solidFill>
-                  <a:srgbClr val="F5F5F0"/>
-                </a:solidFill>
-                <a:latin typeface="Noto Sans JP" pitchFamily="34" charset="0"/>
-                <a:ea typeface="Noto Sans JP" pitchFamily="34" charset="-122"/>
-                <a:cs typeface="Noto Sans JP" pitchFamily="34" charset="-120"/>
+                  <a:srgbClr val="16181D"/>
+                </a:solidFill>
+                <a:latin typeface="BIZ UDPGothic" pitchFamily="34" charset="0"/>
+                <a:ea typeface="BIZ UDPGothic" pitchFamily="34" charset="-122"/>
+                <a:cs typeface="BIZ UDPGothic" pitchFamily="34" charset="-120"/>
               </a:rPr>
               <a:t>事前の厳密な審査</a:t>
             </a:r>
@@ -5804,11 +5804,11 @@
             <a:r>
               <a:rPr lang="en-US" sz="1150" dirty="0">
                 <a:solidFill>
-                  <a:srgbClr val="F5F5F0"/>
-                </a:solidFill>
-                <a:latin typeface="Noto Sans JP" pitchFamily="34" charset="0"/>
-                <a:ea typeface="Noto Sans JP" pitchFamily="34" charset="-122"/>
-                <a:cs typeface="Noto Sans JP" pitchFamily="34" charset="-120"/>
+                  <a:srgbClr val="16181D"/>
+                </a:solidFill>
+                <a:latin typeface="BIZ UDPGothic" pitchFamily="34" charset="0"/>
+                <a:ea typeface="BIZ UDPGothic" pitchFamily="34" charset="-122"/>
+                <a:cs typeface="BIZ UDPGothic" pitchFamily="34" charset="-120"/>
               </a:rPr>
               <a:t>「〇年までに〇割を完全無人化」という具体的な事業計画と数値目標の提出を義務付け</a:t>
             </a:r>
@@ -5843,13 +5843,13 @@
             <a:r>
               <a:rPr lang="en-US" sz="900" dirty="0">
                 <a:solidFill>
-                  <a:srgbClr val="F5F5F0">
+                  <a:srgbClr val="16181D">
                     <a:alpha val="45000"/>
                   </a:srgbClr>
                 </a:solidFill>
-                <a:latin typeface="Noto Sans JP" pitchFamily="34" charset="0"/>
-                <a:ea typeface="Noto Sans JP" pitchFamily="34" charset="-122"/>
-                <a:cs typeface="Noto Sans JP" pitchFamily="34" charset="-120"/>
+                <a:latin typeface="BIZ UDPGothic" pitchFamily="34" charset="0"/>
+                <a:ea typeface="BIZ UDPGothic" pitchFamily="34" charset="-122"/>
+                <a:cs typeface="BIZ UDPGothic" pitchFamily="34" charset="-120"/>
               </a:rPr>
               <a:t>REBOOT JAPAN ── 市民による政策提言プラットフォーム</a:t>
             </a:r>
@@ -5884,13 +5884,13 @@
             <a:r>
               <a:rPr lang="en-US" sz="900" dirty="0">
                 <a:solidFill>
-                  <a:srgbClr val="F5F5F0">
+                  <a:srgbClr val="16181D">
                     <a:alpha val="45000"/>
                   </a:srgbClr>
                 </a:solidFill>
-                <a:latin typeface="Noto Sans JP" pitchFamily="34" charset="0"/>
-                <a:ea typeface="Noto Sans JP" pitchFamily="34" charset="-122"/>
-                <a:cs typeface="Noto Sans JP" pitchFamily="34" charset="-120"/>
+                <a:latin typeface="BIZ UDPGothic" pitchFamily="34" charset="0"/>
+                <a:ea typeface="BIZ UDPGothic" pitchFamily="34" charset="-122"/>
+                <a:cs typeface="BIZ UDPGothic" pitchFamily="34" charset="-120"/>
               </a:rPr>
               <a:t>13</a:t>
             </a:r>
@@ -5912,7 +5912,7 @@
     <p:bg>
       <p:bgPr>
         <a:solidFill>
-          <a:srgbClr val="0A0A0A"/>
+          <a:srgbClr val="F5F6F8"/>
         </a:solidFill>
       </p:bgPr>
     </p:bg>
@@ -5957,11 +5957,11 @@
             <a:r>
               <a:rPr lang="en-US" sz="1200" b="1" spc="200" kern="0" dirty="0">
                 <a:solidFill>
-                  <a:srgbClr val="D62828"/>
+                  <a:srgbClr val="C8161D"/>
                 </a:solidFill>
                 <a:latin typeface="Arial" pitchFamily="34" charset="0"/>
-                <a:ea typeface="Arial" pitchFamily="34" charset="-122"/>
-                <a:cs typeface="Arial" pitchFamily="34" charset="-120"/>
+                <a:ea typeface="BIZ UDPGothic" pitchFamily="34" charset="-122"/>
+                <a:cs typeface="BIZ UDPGothic" pitchFamily="34" charset="-120"/>
               </a:rPr>
               <a:t>RULE 04</a:t>
             </a:r>
@@ -5996,11 +5996,11 @@
             <a:r>
               <a:rPr lang="en-US" sz="2400" b="1" dirty="0">
                 <a:solidFill>
-                  <a:srgbClr val="F5F5F0"/>
-                </a:solidFill>
-                <a:latin typeface="Noto Sans JP" pitchFamily="34" charset="0"/>
-                <a:ea typeface="Noto Sans JP" pitchFamily="34" charset="-122"/>
-                <a:cs typeface="Noto Sans JP" pitchFamily="34" charset="-120"/>
+                  <a:srgbClr val="16181D"/>
+                </a:solidFill>
+                <a:latin typeface="BIZ UDPGothic" pitchFamily="34" charset="0"/>
+                <a:ea typeface="BIZ UDPGothic" pitchFamily="34" charset="-122"/>
+                <a:cs typeface="BIZ UDPGothic" pitchFamily="34" charset="-120"/>
               </a:rPr>
               <a:t>特区限定で突破する3つの規制緩和</a:t>
             </a:r>
@@ -6025,11 +6025,11 @@
             </a:avLst>
           </a:prstGeom>
           <a:solidFill>
-            <a:srgbClr val="1A1A1A"/>
+            <a:srgbClr val="FFFFFF"/>
           </a:solidFill>
           <a:ln w="12700">
             <a:solidFill>
-              <a:srgbClr val="2E2E2E"/>
+              <a:srgbClr val="DDE0E6"/>
             </a:solidFill>
             <a:prstDash val="solid"/>
           </a:ln>
@@ -6072,8 +6072,8 @@
                   <a:srgbClr val="000000"/>
                 </a:solidFill>
                 <a:latin typeface="Arial" pitchFamily="34" charset="0"/>
-                <a:ea typeface="Arial" pitchFamily="34" charset="-122"/>
-                <a:cs typeface="Arial" pitchFamily="34" charset="-120"/>
+                <a:ea typeface="BIZ UDPGothic" pitchFamily="34" charset="-122"/>
+                <a:cs typeface="BIZ UDPGothic" pitchFamily="34" charset="-120"/>
               </a:rPr>
               <a:t>🛣️</a:t>
             </a:r>
@@ -6111,11 +6111,11 @@
             <a:r>
               <a:rPr lang="en-US" sz="1400" b="1" dirty="0">
                 <a:solidFill>
-                  <a:srgbClr val="F5F5F0"/>
-                </a:solidFill>
-                <a:latin typeface="Noto Sans JP" pitchFamily="34" charset="0"/>
-                <a:ea typeface="Noto Sans JP" pitchFamily="34" charset="-122"/>
-                <a:cs typeface="Noto Sans JP" pitchFamily="34" charset="-120"/>
+                  <a:srgbClr val="16181D"/>
+                </a:solidFill>
+                <a:latin typeface="BIZ UDPGothic" pitchFamily="34" charset="0"/>
+                <a:ea typeface="BIZ UDPGothic" pitchFamily="34" charset="-122"/>
+                <a:cs typeface="BIZ UDPGothic" pitchFamily="34" charset="-120"/>
               </a:rPr>
               <a:t>① 深夜専用レーン</a:t>
             </a:r>
@@ -6153,11 +6153,11 @@
             <a:r>
               <a:rPr lang="en-US" sz="1150" dirty="0">
                 <a:solidFill>
-                  <a:srgbClr val="F5F5F0"/>
-                </a:solidFill>
-                <a:latin typeface="Noto Sans JP" pitchFamily="34" charset="0"/>
-                <a:ea typeface="Noto Sans JP" pitchFamily="34" charset="-122"/>
-                <a:cs typeface="Noto Sans JP" pitchFamily="34" charset="-120"/>
+                  <a:srgbClr val="16181D"/>
+                </a:solidFill>
+                <a:latin typeface="BIZ UDPGothic" pitchFamily="34" charset="0"/>
+                <a:ea typeface="BIZ UDPGothic" pitchFamily="34" charset="-122"/>
+                <a:cs typeface="BIZ UDPGothic" pitchFamily="34" charset="-120"/>
               </a:rPr>
               <a:t>無人トラック・配送ロボ専用の走行空間</a:t>
             </a:r>
@@ -6182,11 +6182,11 @@
             </a:avLst>
           </a:prstGeom>
           <a:solidFill>
-            <a:srgbClr val="1A1A1A"/>
+            <a:srgbClr val="FFFFFF"/>
           </a:solidFill>
           <a:ln w="12700">
             <a:solidFill>
-              <a:srgbClr val="2E2E2E"/>
+              <a:srgbClr val="DDE0E6"/>
             </a:solidFill>
             <a:prstDash val="solid"/>
           </a:ln>
@@ -6229,8 +6229,8 @@
                   <a:srgbClr val="000000"/>
                 </a:solidFill>
                 <a:latin typeface="Arial" pitchFamily="34" charset="0"/>
-                <a:ea typeface="Arial" pitchFamily="34" charset="-122"/>
-                <a:cs typeface="Arial" pitchFamily="34" charset="-120"/>
+                <a:ea typeface="BIZ UDPGothic" pitchFamily="34" charset="-122"/>
+                <a:cs typeface="BIZ UDPGothic" pitchFamily="34" charset="-120"/>
               </a:rPr>
               <a:t>🚜</a:t>
             </a:r>
@@ -6268,11 +6268,11 @@
             <a:r>
               <a:rPr lang="en-US" sz="1400" b="1" dirty="0">
                 <a:solidFill>
-                  <a:srgbClr val="F5F5F0"/>
-                </a:solidFill>
-                <a:latin typeface="Noto Sans JP" pitchFamily="34" charset="0"/>
-                <a:ea typeface="Noto Sans JP" pitchFamily="34" charset="-122"/>
-                <a:cs typeface="Noto Sans JP" pitchFamily="34" charset="-120"/>
+                  <a:srgbClr val="16181D"/>
+                </a:solidFill>
+                <a:latin typeface="BIZ UDPGothic" pitchFamily="34" charset="0"/>
+                <a:ea typeface="BIZ UDPGothic" pitchFamily="34" charset="-122"/>
+                <a:cs typeface="BIZ UDPGothic" pitchFamily="34" charset="-120"/>
               </a:rPr>
               <a:t>② シームレス走行</a:t>
             </a:r>
@@ -6310,11 +6310,11 @@
             <a:r>
               <a:rPr lang="en-US" sz="1150" dirty="0">
                 <a:solidFill>
-                  <a:srgbClr val="F5F5F0"/>
-                </a:solidFill>
-                <a:latin typeface="Noto Sans JP" pitchFamily="34" charset="0"/>
-                <a:ea typeface="Noto Sans JP" pitchFamily="34" charset="-122"/>
-                <a:cs typeface="Noto Sans JP" pitchFamily="34" charset="-120"/>
+                  <a:srgbClr val="16181D"/>
+                </a:solidFill>
+                <a:latin typeface="BIZ UDPGothic" pitchFamily="34" charset="0"/>
+                <a:ea typeface="BIZ UDPGothic" pitchFamily="34" charset="-122"/>
+                <a:cs typeface="BIZ UDPGothic" pitchFamily="34" charset="-120"/>
               </a:rPr>
               <a:t>農地間の公道移動をナンバー・運転手不要に</a:t>
             </a:r>
@@ -6339,11 +6339,11 @@
             </a:avLst>
           </a:prstGeom>
           <a:solidFill>
-            <a:srgbClr val="1A1A1A"/>
+            <a:srgbClr val="FFFFFF"/>
           </a:solidFill>
           <a:ln w="12700">
             <a:solidFill>
-              <a:srgbClr val="2E2E2E"/>
+              <a:srgbClr val="DDE0E6"/>
             </a:solidFill>
             <a:prstDash val="solid"/>
           </a:ln>
@@ -6386,8 +6386,8 @@
                   <a:srgbClr val="000000"/>
                 </a:solidFill>
                 <a:latin typeface="Arial" pitchFamily="34" charset="0"/>
-                <a:ea typeface="Arial" pitchFamily="34" charset="-122"/>
-                <a:cs typeface="Arial" pitchFamily="34" charset="-120"/>
+                <a:ea typeface="BIZ UDPGothic" pitchFamily="34" charset="-122"/>
+                <a:cs typeface="BIZ UDPGothic" pitchFamily="34" charset="-120"/>
               </a:rPr>
               <a:t>📡</a:t>
             </a:r>
@@ -6425,11 +6425,11 @@
             <a:r>
               <a:rPr lang="en-US" sz="1400" b="1" dirty="0">
                 <a:solidFill>
-                  <a:srgbClr val="F5F5F0"/>
-                </a:solidFill>
-                <a:latin typeface="Noto Sans JP" pitchFamily="34" charset="0"/>
-                <a:ea typeface="Noto Sans JP" pitchFamily="34" charset="-122"/>
-                <a:cs typeface="Noto Sans JP" pitchFamily="34" charset="-120"/>
+                  <a:srgbClr val="16181D"/>
+                </a:solidFill>
+                <a:latin typeface="BIZ UDPGothic" pitchFamily="34" charset="0"/>
+                <a:ea typeface="BIZ UDPGothic" pitchFamily="34" charset="-122"/>
+                <a:cs typeface="BIZ UDPGothic" pitchFamily="34" charset="-120"/>
               </a:rPr>
               <a:t>③ マルチマニング</a:t>
             </a:r>
@@ -6467,11 +6467,11 @@
             <a:r>
               <a:rPr lang="en-US" sz="1150" dirty="0">
                 <a:solidFill>
-                  <a:srgbClr val="F5F5F0"/>
-                </a:solidFill>
-                <a:latin typeface="Noto Sans JP" pitchFamily="34" charset="0"/>
-                <a:ea typeface="Noto Sans JP" pitchFamily="34" charset="-122"/>
-                <a:cs typeface="Noto Sans JP" pitchFamily="34" charset="-120"/>
+                  <a:srgbClr val="16181D"/>
+                </a:solidFill>
+                <a:latin typeface="BIZ UDPGothic" pitchFamily="34" charset="0"/>
+                <a:ea typeface="BIZ UDPGothic" pitchFamily="34" charset="-122"/>
+                <a:cs typeface="BIZ UDPGothic" pitchFamily="34" charset="-120"/>
               </a:rPr>
               <a:t>監視者1人で最大20台を管理</a:t>
             </a:r>
@@ -6506,13 +6506,13 @@
             <a:r>
               <a:rPr lang="en-US" sz="900" dirty="0">
                 <a:solidFill>
-                  <a:srgbClr val="F5F5F0">
+                  <a:srgbClr val="16181D">
                     <a:alpha val="45000"/>
                   </a:srgbClr>
                 </a:solidFill>
-                <a:latin typeface="Noto Sans JP" pitchFamily="34" charset="0"/>
-                <a:ea typeface="Noto Sans JP" pitchFamily="34" charset="-122"/>
-                <a:cs typeface="Noto Sans JP" pitchFamily="34" charset="-120"/>
+                <a:latin typeface="BIZ UDPGothic" pitchFamily="34" charset="0"/>
+                <a:ea typeface="BIZ UDPGothic" pitchFamily="34" charset="-122"/>
+                <a:cs typeface="BIZ UDPGothic" pitchFamily="34" charset="-120"/>
               </a:rPr>
               <a:t>REBOOT JAPAN ── 市民による政策提言プラットフォーム</a:t>
             </a:r>
@@ -6547,13 +6547,13 @@
             <a:r>
               <a:rPr lang="en-US" sz="900" dirty="0">
                 <a:solidFill>
-                  <a:srgbClr val="F5F5F0">
+                  <a:srgbClr val="16181D">
                     <a:alpha val="45000"/>
                   </a:srgbClr>
                 </a:solidFill>
-                <a:latin typeface="Noto Sans JP" pitchFamily="34" charset="0"/>
-                <a:ea typeface="Noto Sans JP" pitchFamily="34" charset="-122"/>
-                <a:cs typeface="Noto Sans JP" pitchFamily="34" charset="-120"/>
+                <a:latin typeface="BIZ UDPGothic" pitchFamily="34" charset="0"/>
+                <a:ea typeface="BIZ UDPGothic" pitchFamily="34" charset="-122"/>
+                <a:cs typeface="BIZ UDPGothic" pitchFamily="34" charset="-120"/>
               </a:rPr>
               <a:t>14</a:t>
             </a:r>
@@ -6575,7 +6575,7 @@
     <p:bg>
       <p:bgPr>
         <a:solidFill>
-          <a:srgbClr val="0A0A0A"/>
+          <a:srgbClr val="F5F6F8"/>
         </a:solidFill>
       </p:bgPr>
     </p:bg>
@@ -6620,11 +6620,11 @@
             <a:r>
               <a:rPr lang="en-US" sz="1200" b="1" spc="200" kern="0" dirty="0">
                 <a:solidFill>
-                  <a:srgbClr val="D62828"/>
+                  <a:srgbClr val="C8161D"/>
                 </a:solidFill>
                 <a:latin typeface="Arial" pitchFamily="34" charset="0"/>
-                <a:ea typeface="Arial" pitchFamily="34" charset="-122"/>
-                <a:cs typeface="Arial" pitchFamily="34" charset="-120"/>
+                <a:ea typeface="BIZ UDPGothic" pitchFamily="34" charset="-122"/>
+                <a:cs typeface="BIZ UDPGothic" pitchFamily="34" charset="-120"/>
               </a:rPr>
               <a:t>RULE 04 — DETAIL</a:t>
             </a:r>
@@ -6659,11 +6659,11 @@
             <a:r>
               <a:rPr lang="en-US" sz="2500" b="1" dirty="0">
                 <a:solidFill>
-                  <a:srgbClr val="F5F5F0"/>
-                </a:solidFill>
-                <a:latin typeface="Noto Sans JP" pitchFamily="34" charset="0"/>
-                <a:ea typeface="Noto Sans JP" pitchFamily="34" charset="-122"/>
-                <a:cs typeface="Noto Sans JP" pitchFamily="34" charset="-120"/>
+                  <a:srgbClr val="16181D"/>
+                </a:solidFill>
+                <a:latin typeface="BIZ UDPGothic" pitchFamily="34" charset="0"/>
+                <a:ea typeface="BIZ UDPGothic" pitchFamily="34" charset="-122"/>
+                <a:cs typeface="BIZ UDPGothic" pitchFamily="34" charset="-120"/>
               </a:rPr>
               <a:t>深夜の自動運転専用レーン</a:t>
             </a:r>
@@ -6701,8 +6701,8 @@
                   <a:srgbClr val="000000"/>
                 </a:solidFill>
                 <a:latin typeface="Arial" pitchFamily="34" charset="0"/>
-                <a:ea typeface="Arial" pitchFamily="34" charset="-122"/>
-                <a:cs typeface="Arial" pitchFamily="34" charset="-120"/>
+                <a:ea typeface="BIZ UDPGothic" pitchFamily="34" charset="-122"/>
+                <a:cs typeface="BIZ UDPGothic" pitchFamily="34" charset="-120"/>
               </a:rPr>
               <a:t>🛣️</a:t>
             </a:r>
@@ -6737,11 +6737,11 @@
             <a:r>
               <a:rPr lang="en-US" sz="1550" b="1" dirty="0">
                 <a:solidFill>
-                  <a:srgbClr val="F5F5F0"/>
-                </a:solidFill>
-                <a:latin typeface="Noto Sans JP" pitchFamily="34" charset="0"/>
-                <a:ea typeface="Noto Sans JP" pitchFamily="34" charset="-122"/>
-                <a:cs typeface="Noto Sans JP" pitchFamily="34" charset="-120"/>
+                  <a:srgbClr val="16181D"/>
+                </a:solidFill>
+                <a:latin typeface="BIZ UDPGothic" pitchFamily="34" charset="0"/>
+                <a:ea typeface="BIZ UDPGothic" pitchFamily="34" charset="-122"/>
+                <a:cs typeface="BIZ UDPGothic" pitchFamily="34" charset="-120"/>
               </a:rPr>
               <a:t>深夜22時〜翌5時、港湾や工場から高速ICを結ぶ特定幹線道路の1レーンを一般車進入禁止とする</a:t>
             </a:r>
@@ -6766,7 +6766,7 @@
             </a:avLst>
           </a:prstGeom>
           <a:solidFill>
-            <a:srgbClr val="1A1A1A"/>
+            <a:srgbClr val="FFFFFF"/>
           </a:solidFill>
           <a:ln/>
           <a:effectLst>
@@ -6808,11 +6808,11 @@
             <a:r>
               <a:rPr lang="en-US" sz="1350" dirty="0">
                 <a:solidFill>
-                  <a:srgbClr val="F5F5F0"/>
-                </a:solidFill>
-                <a:latin typeface="Noto Sans JP" pitchFamily="34" charset="0"/>
-                <a:ea typeface="Noto Sans JP" pitchFamily="34" charset="-122"/>
-                <a:cs typeface="Noto Sans JP" pitchFamily="34" charset="-120"/>
+                  <a:srgbClr val="16181D"/>
+                </a:solidFill>
+                <a:latin typeface="BIZ UDPGothic" pitchFamily="34" charset="0"/>
+                <a:ea typeface="BIZ UDPGothic" pitchFamily="34" charset="-122"/>
+                <a:cs typeface="BIZ UDPGothic" pitchFamily="34" charset="-120"/>
               </a:rPr>
               <a:t>完全無人トラック・配送ロボ専用レーンとする権限を都道府県に付与する。人通りの少ない深夜帯に限定することで、安全性を確保しながら無人物流を最速で実装する。</a:t>
             </a:r>
@@ -6847,13 +6847,13 @@
             <a:r>
               <a:rPr lang="en-US" sz="900" dirty="0">
                 <a:solidFill>
-                  <a:srgbClr val="F5F5F0">
+                  <a:srgbClr val="16181D">
                     <a:alpha val="45000"/>
                   </a:srgbClr>
                 </a:solidFill>
-                <a:latin typeface="Noto Sans JP" pitchFamily="34" charset="0"/>
-                <a:ea typeface="Noto Sans JP" pitchFamily="34" charset="-122"/>
-                <a:cs typeface="Noto Sans JP" pitchFamily="34" charset="-120"/>
+                <a:latin typeface="BIZ UDPGothic" pitchFamily="34" charset="0"/>
+                <a:ea typeface="BIZ UDPGothic" pitchFamily="34" charset="-122"/>
+                <a:cs typeface="BIZ UDPGothic" pitchFamily="34" charset="-120"/>
               </a:rPr>
               <a:t>REBOOT JAPAN ── 市民による政策提言プラットフォーム</a:t>
             </a:r>
@@ -6888,13 +6888,13 @@
             <a:r>
               <a:rPr lang="en-US" sz="900" dirty="0">
                 <a:solidFill>
-                  <a:srgbClr val="F5F5F0">
+                  <a:srgbClr val="16181D">
                     <a:alpha val="45000"/>
                   </a:srgbClr>
                 </a:solidFill>
-                <a:latin typeface="Noto Sans JP" pitchFamily="34" charset="0"/>
-                <a:ea typeface="Noto Sans JP" pitchFamily="34" charset="-122"/>
-                <a:cs typeface="Noto Sans JP" pitchFamily="34" charset="-120"/>
+                <a:latin typeface="BIZ UDPGothic" pitchFamily="34" charset="0"/>
+                <a:ea typeface="BIZ UDPGothic" pitchFamily="34" charset="-122"/>
+                <a:cs typeface="BIZ UDPGothic" pitchFamily="34" charset="-120"/>
               </a:rPr>
               <a:t>15</a:t>
             </a:r>
@@ -6916,7 +6916,7 @@
     <p:bg>
       <p:bgPr>
         <a:solidFill>
-          <a:srgbClr val="0A0A0A"/>
+          <a:srgbClr val="F5F6F8"/>
         </a:solidFill>
       </p:bgPr>
     </p:bg>
@@ -6961,11 +6961,11 @@
             <a:r>
               <a:rPr lang="en-US" sz="1200" b="1" spc="200" kern="0" dirty="0">
                 <a:solidFill>
-                  <a:srgbClr val="D62828"/>
+                  <a:srgbClr val="C8161D"/>
                 </a:solidFill>
                 <a:latin typeface="Arial" pitchFamily="34" charset="0"/>
-                <a:ea typeface="Arial" pitchFamily="34" charset="-122"/>
-                <a:cs typeface="Arial" pitchFamily="34" charset="-120"/>
+                <a:ea typeface="BIZ UDPGothic" pitchFamily="34" charset="-122"/>
+                <a:cs typeface="BIZ UDPGothic" pitchFamily="34" charset="-120"/>
               </a:rPr>
               <a:t>RULE 04 — DETAIL</a:t>
             </a:r>
@@ -7000,11 +7000,11 @@
             <a:r>
               <a:rPr lang="en-US" sz="2500" b="1" dirty="0">
                 <a:solidFill>
-                  <a:srgbClr val="F5F5F0"/>
-                </a:solidFill>
-                <a:latin typeface="Noto Sans JP" pitchFamily="34" charset="0"/>
-                <a:ea typeface="Noto Sans JP" pitchFamily="34" charset="-122"/>
-                <a:cs typeface="Noto Sans JP" pitchFamily="34" charset="-120"/>
+                  <a:srgbClr val="16181D"/>
+                </a:solidFill>
+                <a:latin typeface="BIZ UDPGothic" pitchFamily="34" charset="0"/>
+                <a:ea typeface="BIZ UDPGothic" pitchFamily="34" charset="-122"/>
+                <a:cs typeface="BIZ UDPGothic" pitchFamily="34" charset="-120"/>
               </a:rPr>
               <a:t>スマート農業のシームレス走行</a:t>
             </a:r>
@@ -7042,8 +7042,8 @@
                   <a:srgbClr val="000000"/>
                 </a:solidFill>
                 <a:latin typeface="Arial" pitchFamily="34" charset="0"/>
-                <a:ea typeface="Arial" pitchFamily="34" charset="-122"/>
-                <a:cs typeface="Arial" pitchFamily="34" charset="-120"/>
+                <a:ea typeface="BIZ UDPGothic" pitchFamily="34" charset="-122"/>
+                <a:cs typeface="BIZ UDPGothic" pitchFamily="34" charset="-120"/>
               </a:rPr>
               <a:t>🚜</a:t>
             </a:r>
@@ -7078,11 +7078,11 @@
             <a:r>
               <a:rPr lang="en-US" sz="1550" b="1" dirty="0">
                 <a:solidFill>
-                  <a:srgbClr val="F5F5F0"/>
-                </a:solidFill>
-                <a:latin typeface="Noto Sans JP" pitchFamily="34" charset="0"/>
-                <a:ea typeface="Noto Sans JP" pitchFamily="34" charset="-122"/>
-                <a:cs typeface="Noto Sans JP" pitchFamily="34" charset="-120"/>
+                  <a:srgbClr val="16181D"/>
+                </a:solidFill>
+                <a:latin typeface="BIZ UDPGothic" pitchFamily="34" charset="0"/>
+                <a:ea typeface="BIZ UDPGothic" pitchFamily="34" charset="-122"/>
+                <a:cs typeface="BIZ UDPGothic" pitchFamily="34" charset="-120"/>
               </a:rPr>
               <a:t>農地間のわずかな公道移動において、ナンバー取得や運転手配置の義務を免除する</a:t>
             </a:r>
@@ -7107,7 +7107,7 @@
             </a:avLst>
           </a:prstGeom>
           <a:solidFill>
-            <a:srgbClr val="1A1A1A"/>
+            <a:srgbClr val="FFFFFF"/>
           </a:solidFill>
           <a:ln/>
           <a:effectLst>
@@ -7149,11 +7149,11 @@
             <a:r>
               <a:rPr lang="en-US" sz="1350" dirty="0">
                 <a:solidFill>
-                  <a:srgbClr val="F5F5F0"/>
-                </a:solidFill>
-                <a:latin typeface="Noto Sans JP" pitchFamily="34" charset="0"/>
-                <a:ea typeface="Noto Sans JP" pitchFamily="34" charset="-122"/>
-                <a:cs typeface="Noto Sans JP" pitchFamily="34" charset="-120"/>
+                  <a:srgbClr val="16181D"/>
+                </a:solidFill>
+                <a:latin typeface="BIZ UDPGothic" pitchFamily="34" charset="0"/>
+                <a:ea typeface="BIZ UDPGothic" pitchFamily="34" charset="-122"/>
+                <a:cs typeface="BIZ UDPGothic" pitchFamily="34" charset="-120"/>
               </a:rPr>
               <a:t>低速（時速10km以下など）の遠隔監視のみで、農地から農地へシームレスに横断・走行可能とする。人手不足が深刻なスマート農業の現場負担を大幅に軽減する。</a:t>
             </a:r>
@@ -7188,13 +7188,13 @@
             <a:r>
               <a:rPr lang="en-US" sz="900" dirty="0">
                 <a:solidFill>
-                  <a:srgbClr val="F5F5F0">
+                  <a:srgbClr val="16181D">
                     <a:alpha val="45000"/>
                   </a:srgbClr>
                 </a:solidFill>
-                <a:latin typeface="Noto Sans JP" pitchFamily="34" charset="0"/>
-                <a:ea typeface="Noto Sans JP" pitchFamily="34" charset="-122"/>
-                <a:cs typeface="Noto Sans JP" pitchFamily="34" charset="-120"/>
+                <a:latin typeface="BIZ UDPGothic" pitchFamily="34" charset="0"/>
+                <a:ea typeface="BIZ UDPGothic" pitchFamily="34" charset="-122"/>
+                <a:cs typeface="BIZ UDPGothic" pitchFamily="34" charset="-120"/>
               </a:rPr>
               <a:t>REBOOT JAPAN ── 市民による政策提言プラットフォーム</a:t>
             </a:r>
@@ -7229,13 +7229,13 @@
             <a:r>
               <a:rPr lang="en-US" sz="900" dirty="0">
                 <a:solidFill>
-                  <a:srgbClr val="F5F5F0">
+                  <a:srgbClr val="16181D">
                     <a:alpha val="45000"/>
                   </a:srgbClr>
                 </a:solidFill>
-                <a:latin typeface="Noto Sans JP" pitchFamily="34" charset="0"/>
-                <a:ea typeface="Noto Sans JP" pitchFamily="34" charset="-122"/>
-                <a:cs typeface="Noto Sans JP" pitchFamily="34" charset="-120"/>
+                <a:latin typeface="BIZ UDPGothic" pitchFamily="34" charset="0"/>
+                <a:ea typeface="BIZ UDPGothic" pitchFamily="34" charset="-122"/>
+                <a:cs typeface="BIZ UDPGothic" pitchFamily="34" charset="-120"/>
               </a:rPr>
               <a:t>16</a:t>
             </a:r>
@@ -7257,7 +7257,7 @@
     <p:bg>
       <p:bgPr>
         <a:solidFill>
-          <a:srgbClr val="0A0A0A"/>
+          <a:srgbClr val="F5F6F8"/>
         </a:solidFill>
       </p:bgPr>
     </p:bg>
@@ -7302,11 +7302,11 @@
             <a:r>
               <a:rPr lang="en-US" sz="1200" b="1" spc="200" kern="0" dirty="0">
                 <a:solidFill>
-                  <a:srgbClr val="D62828"/>
+                  <a:srgbClr val="C8161D"/>
                 </a:solidFill>
                 <a:latin typeface="Arial" pitchFamily="34" charset="0"/>
-                <a:ea typeface="Arial" pitchFamily="34" charset="-122"/>
-                <a:cs typeface="Arial" pitchFamily="34" charset="-120"/>
+                <a:ea typeface="BIZ UDPGothic" pitchFamily="34" charset="-122"/>
+                <a:cs typeface="BIZ UDPGothic" pitchFamily="34" charset="-120"/>
               </a:rPr>
               <a:t>RULE 04 — DETAIL</a:t>
             </a:r>
@@ -7341,11 +7341,11 @@
             <a:r>
               <a:rPr lang="en-US" sz="2500" b="1" dirty="0">
                 <a:solidFill>
-                  <a:srgbClr val="F5F5F0"/>
-                </a:solidFill>
-                <a:latin typeface="Noto Sans JP" pitchFamily="34" charset="0"/>
-                <a:ea typeface="Noto Sans JP" pitchFamily="34" charset="-122"/>
-                <a:cs typeface="Noto Sans JP" pitchFamily="34" charset="-120"/>
+                  <a:srgbClr val="16181D"/>
+                </a:solidFill>
+                <a:latin typeface="BIZ UDPGothic" pitchFamily="34" charset="0"/>
+                <a:ea typeface="BIZ UDPGothic" pitchFamily="34" charset="-122"/>
+                <a:cs typeface="BIZ UDPGothic" pitchFamily="34" charset="-120"/>
               </a:rPr>
               <a:t>遠隔監視の「1対20」を完全自由化</a:t>
             </a:r>
@@ -7383,8 +7383,8 @@
                   <a:srgbClr val="000000"/>
                 </a:solidFill>
                 <a:latin typeface="Arial" pitchFamily="34" charset="0"/>
-                <a:ea typeface="Arial" pitchFamily="34" charset="-122"/>
-                <a:cs typeface="Arial" pitchFamily="34" charset="-120"/>
+                <a:ea typeface="BIZ UDPGothic" pitchFamily="34" charset="-122"/>
+                <a:cs typeface="BIZ UDPGothic" pitchFamily="34" charset="-120"/>
               </a:rPr>
               <a:t>📡</a:t>
             </a:r>
@@ -7419,11 +7419,11 @@
             <a:r>
               <a:rPr lang="en-US" sz="1550" b="1" dirty="0">
                 <a:solidFill>
-                  <a:srgbClr val="F5F5F0"/>
-                </a:solidFill>
-                <a:latin typeface="Noto Sans JP" pitchFamily="34" charset="0"/>
-                <a:ea typeface="Noto Sans JP" pitchFamily="34" charset="-122"/>
-                <a:cs typeface="Noto Sans JP" pitchFamily="34" charset="-120"/>
+                  <a:srgbClr val="16181D"/>
+                </a:solidFill>
+                <a:latin typeface="BIZ UDPGothic" pitchFamily="34" charset="0"/>
+                <a:ea typeface="BIZ UDPGothic" pitchFamily="34" charset="-122"/>
+                <a:cs typeface="BIZ UDPGothic" pitchFamily="34" charset="-120"/>
               </a:rPr>
               <a:t>1人の遠隔監視者が同時に最大20台の自動運転車両を管理してよい</a:t>
             </a:r>
@@ -7448,7 +7448,7 @@
             </a:avLst>
           </a:prstGeom>
           <a:solidFill>
-            <a:srgbClr val="1A1A1A"/>
+            <a:srgbClr val="FFFFFF"/>
           </a:solidFill>
           <a:ln/>
           <a:effectLst>
@@ -7490,11 +7490,11 @@
             <a:r>
               <a:rPr lang="en-US" sz="1350" dirty="0">
                 <a:solidFill>
-                  <a:srgbClr val="F5F5F0"/>
-                </a:solidFill>
-                <a:latin typeface="Noto Sans JP" pitchFamily="34" charset="0"/>
-                <a:ea typeface="Noto Sans JP" pitchFamily="34" charset="-122"/>
-                <a:cs typeface="Noto Sans JP" pitchFamily="34" charset="-120"/>
+                  <a:srgbClr val="16181D"/>
+                </a:solidFill>
+                <a:latin typeface="BIZ UDPGothic" pitchFamily="34" charset="0"/>
+                <a:ea typeface="BIZ UDPGothic" pitchFamily="34" charset="-122"/>
+                <a:cs typeface="BIZ UDPGothic" pitchFamily="34" charset="-120"/>
               </a:rPr>
               <a:t>無人運行のコストを有人時代の数分の1へと引き下げる。ただし、この自由化は次章で定める安全性・責任分担の設計とセットで運用される。</a:t>
             </a:r>
@@ -7529,13 +7529,13 @@
             <a:r>
               <a:rPr lang="en-US" sz="900" dirty="0">
                 <a:solidFill>
-                  <a:srgbClr val="F5F5F0">
+                  <a:srgbClr val="16181D">
                     <a:alpha val="45000"/>
                   </a:srgbClr>
                 </a:solidFill>
-                <a:latin typeface="Noto Sans JP" pitchFamily="34" charset="0"/>
-                <a:ea typeface="Noto Sans JP" pitchFamily="34" charset="-122"/>
-                <a:cs typeface="Noto Sans JP" pitchFamily="34" charset="-120"/>
+                <a:latin typeface="BIZ UDPGothic" pitchFamily="34" charset="0"/>
+                <a:ea typeface="BIZ UDPGothic" pitchFamily="34" charset="-122"/>
+                <a:cs typeface="BIZ UDPGothic" pitchFamily="34" charset="-120"/>
               </a:rPr>
               <a:t>REBOOT JAPAN ── 市民による政策提言プラットフォーム</a:t>
             </a:r>
@@ -7570,13 +7570,13 @@
             <a:r>
               <a:rPr lang="en-US" sz="900" dirty="0">
                 <a:solidFill>
-                  <a:srgbClr val="F5F5F0">
+                  <a:srgbClr val="16181D">
                     <a:alpha val="45000"/>
                   </a:srgbClr>
                 </a:solidFill>
-                <a:latin typeface="Noto Sans JP" pitchFamily="34" charset="0"/>
-                <a:ea typeface="Noto Sans JP" pitchFamily="34" charset="-122"/>
-                <a:cs typeface="Noto Sans JP" pitchFamily="34" charset="-120"/>
+                <a:latin typeface="BIZ UDPGothic" pitchFamily="34" charset="0"/>
+                <a:ea typeface="BIZ UDPGothic" pitchFamily="34" charset="-122"/>
+                <a:cs typeface="BIZ UDPGothic" pitchFamily="34" charset="-120"/>
               </a:rPr>
               <a:t>17</a:t>
             </a:r>
@@ -7598,7 +7598,7 @@
     <p:bg>
       <p:bgPr>
         <a:solidFill>
-          <a:srgbClr val="0A0A0A"/>
+          <a:srgbClr val="F5F6F8"/>
         </a:solidFill>
       </p:bgPr>
     </p:bg>
@@ -7643,11 +7643,11 @@
             <a:r>
               <a:rPr lang="en-US" sz="1200" b="1" spc="200" kern="0" dirty="0">
                 <a:solidFill>
-                  <a:srgbClr val="D62828"/>
+                  <a:srgbClr val="C8161D"/>
                 </a:solidFill>
                 <a:latin typeface="Arial" pitchFamily="34" charset="0"/>
-                <a:ea typeface="Arial" pitchFamily="34" charset="-122"/>
-                <a:cs typeface="Arial" pitchFamily="34" charset="-120"/>
+                <a:ea typeface="BIZ UDPGothic" pitchFamily="34" charset="-122"/>
+                <a:cs typeface="BIZ UDPGothic" pitchFamily="34" charset="-120"/>
               </a:rPr>
               <a:t>SAFETY</a:t>
             </a:r>
@@ -7682,11 +7682,11 @@
             <a:r>
               <a:rPr lang="en-US" sz="2100" b="1" dirty="0">
                 <a:solidFill>
-                  <a:srgbClr val="F5F5F0"/>
-                </a:solidFill>
-                <a:latin typeface="Noto Sans JP" pitchFamily="34" charset="0"/>
-                <a:ea typeface="Noto Sans JP" pitchFamily="34" charset="-122"/>
-                <a:cs typeface="Noto Sans JP" pitchFamily="34" charset="-120"/>
+                  <a:srgbClr val="16181D"/>
+                </a:solidFill>
+                <a:latin typeface="BIZ UDPGothic" pitchFamily="34" charset="0"/>
+                <a:ea typeface="BIZ UDPGothic" pitchFamily="34" charset="-122"/>
+                <a:cs typeface="BIZ UDPGothic" pitchFamily="34" charset="-120"/>
               </a:rPr>
               <a:t>「無人だから誰も責任を取らない」を作らない</a:t>
             </a:r>
@@ -7711,7 +7711,7 @@
             </a:avLst>
           </a:prstGeom>
           <a:solidFill>
-            <a:srgbClr val="1A1A1A"/>
+            <a:srgbClr val="FFFFFF"/>
           </a:solidFill>
           <a:ln/>
           <a:effectLst>
@@ -7753,8 +7753,8 @@
                   <a:srgbClr val="000000"/>
                 </a:solidFill>
                 <a:latin typeface="Arial" pitchFamily="34" charset="0"/>
-                <a:ea typeface="Arial" pitchFamily="34" charset="-122"/>
-                <a:cs typeface="Arial" pitchFamily="34" charset="-120"/>
+                <a:ea typeface="BIZ UDPGothic" pitchFamily="34" charset="-122"/>
+                <a:cs typeface="BIZ UDPGothic" pitchFamily="34" charset="-120"/>
               </a:rPr>
               <a:t>🛡️</a:t>
             </a:r>
@@ -7789,11 +7789,11 @@
             <a:r>
               <a:rPr lang="en-US" sz="1650" b="1" dirty="0">
                 <a:solidFill>
-                  <a:srgbClr val="D62828"/>
-                </a:solidFill>
-                <a:latin typeface="Noto Sans JP" pitchFamily="34" charset="0"/>
-                <a:ea typeface="Noto Sans JP" pitchFamily="34" charset="-122"/>
-                <a:cs typeface="Noto Sans JP" pitchFamily="34" charset="-120"/>
+                  <a:srgbClr val="C8161D"/>
+                </a:solidFill>
+                <a:latin typeface="BIZ UDPGothic" pitchFamily="34" charset="0"/>
+                <a:ea typeface="BIZ UDPGothic" pitchFamily="34" charset="-122"/>
+                <a:cs typeface="BIZ UDPGothic" pitchFamily="34" charset="-120"/>
               </a:rPr>
               <a:t>規制緩和を野放図に進めるのではなく、責任の所在を明確に設計する</a:t>
             </a:r>
@@ -7831,11 +7831,11 @@
             <a:r>
               <a:rPr lang="en-US" sz="1450" dirty="0">
                 <a:solidFill>
-                  <a:srgbClr val="F5F5F0"/>
-                </a:solidFill>
-                <a:latin typeface="Noto Sans JP" pitchFamily="34" charset="0"/>
-                <a:ea typeface="Noto Sans JP" pitchFamily="34" charset="-122"/>
-                <a:cs typeface="Noto Sans JP" pitchFamily="34" charset="-120"/>
+                  <a:srgbClr val="16181D"/>
+                </a:solidFill>
+                <a:latin typeface="BIZ UDPGothic" pitchFamily="34" charset="0"/>
+                <a:ea typeface="BIZ UDPGothic" pitchFamily="34" charset="-122"/>
+                <a:cs typeface="BIZ UDPGothic" pitchFamily="34" charset="-120"/>
               </a:rPr>
               <a:t>事故の責任分担・被害者への仮払い・原因判定の主体・責任の拡張——4つの観点から設計する。</a:t>
             </a:r>
@@ -7870,13 +7870,13 @@
             <a:r>
               <a:rPr lang="en-US" sz="900" dirty="0">
                 <a:solidFill>
-                  <a:srgbClr val="F5F5F0">
+                  <a:srgbClr val="16181D">
                     <a:alpha val="45000"/>
                   </a:srgbClr>
                 </a:solidFill>
-                <a:latin typeface="Noto Sans JP" pitchFamily="34" charset="0"/>
-                <a:ea typeface="Noto Sans JP" pitchFamily="34" charset="-122"/>
-                <a:cs typeface="Noto Sans JP" pitchFamily="34" charset="-120"/>
+                <a:latin typeface="BIZ UDPGothic" pitchFamily="34" charset="0"/>
+                <a:ea typeface="BIZ UDPGothic" pitchFamily="34" charset="-122"/>
+                <a:cs typeface="BIZ UDPGothic" pitchFamily="34" charset="-120"/>
               </a:rPr>
               <a:t>REBOOT JAPAN ── 市民による政策提言プラットフォーム</a:t>
             </a:r>
@@ -7911,13 +7911,13 @@
             <a:r>
               <a:rPr lang="en-US" sz="900" dirty="0">
                 <a:solidFill>
-                  <a:srgbClr val="F5F5F0">
+                  <a:srgbClr val="16181D">
                     <a:alpha val="45000"/>
                   </a:srgbClr>
                 </a:solidFill>
-                <a:latin typeface="Noto Sans JP" pitchFamily="34" charset="0"/>
-                <a:ea typeface="Noto Sans JP" pitchFamily="34" charset="-122"/>
-                <a:cs typeface="Noto Sans JP" pitchFamily="34" charset="-120"/>
+                <a:latin typeface="BIZ UDPGothic" pitchFamily="34" charset="0"/>
+                <a:ea typeface="BIZ UDPGothic" pitchFamily="34" charset="-122"/>
+                <a:cs typeface="BIZ UDPGothic" pitchFamily="34" charset="-120"/>
               </a:rPr>
               <a:t>18</a:t>
             </a:r>
@@ -7939,7 +7939,7 @@
     <p:bg>
       <p:bgPr>
         <a:solidFill>
-          <a:srgbClr val="0A0A0A"/>
+          <a:srgbClr val="F5F6F8"/>
         </a:solidFill>
       </p:bgPr>
     </p:bg>
@@ -7984,11 +7984,11 @@
             <a:r>
               <a:rPr lang="en-US" sz="1200" b="1" spc="200" kern="0" dirty="0">
                 <a:solidFill>
-                  <a:srgbClr val="D62828"/>
+                  <a:srgbClr val="C8161D"/>
                 </a:solidFill>
                 <a:latin typeface="Arial" pitchFamily="34" charset="0"/>
-                <a:ea typeface="Arial" pitchFamily="34" charset="-122"/>
-                <a:cs typeface="Arial" pitchFamily="34" charset="-120"/>
+                <a:ea typeface="BIZ UDPGothic" pitchFamily="34" charset="-122"/>
+                <a:cs typeface="BIZ UDPGothic" pitchFamily="34" charset="-120"/>
               </a:rPr>
               <a:t>SAFETY — DETAIL</a:t>
             </a:r>
@@ -8023,11 +8023,11 @@
             <a:r>
               <a:rPr lang="en-US" sz="2500" b="1" dirty="0">
                 <a:solidFill>
-                  <a:srgbClr val="F5F5F0"/>
-                </a:solidFill>
-                <a:latin typeface="Noto Sans JP" pitchFamily="34" charset="0"/>
-                <a:ea typeface="Noto Sans JP" pitchFamily="34" charset="-122"/>
-                <a:cs typeface="Noto Sans JP" pitchFamily="34" charset="-120"/>
+                  <a:srgbClr val="16181D"/>
+                </a:solidFill>
+                <a:latin typeface="BIZ UDPGothic" pitchFamily="34" charset="0"/>
+                <a:ea typeface="BIZ UDPGothic" pitchFamily="34" charset="-122"/>
+                <a:cs typeface="BIZ UDPGothic" pitchFamily="34" charset="-120"/>
               </a:rPr>
               <a:t>事故が起きたら誰の責任？</a:t>
             </a:r>
@@ -8062,11 +8062,11 @@
             <a:r>
               <a:rPr lang="en-US" sz="1450" b="1" dirty="0">
                 <a:solidFill>
-                  <a:srgbClr val="F5F5F0"/>
-                </a:solidFill>
-                <a:latin typeface="Noto Sans JP" pitchFamily="34" charset="0"/>
-                <a:ea typeface="Noto Sans JP" pitchFamily="34" charset="-122"/>
-                <a:cs typeface="Noto Sans JP" pitchFamily="34" charset="-120"/>
+                  <a:srgbClr val="16181D"/>
+                </a:solidFill>
+                <a:latin typeface="BIZ UDPGothic" pitchFamily="34" charset="0"/>
+                <a:ea typeface="BIZ UDPGothic" pitchFamily="34" charset="-122"/>
+                <a:cs typeface="BIZ UDPGothic" pitchFamily="34" charset="-120"/>
               </a:rPr>
               <a:t>無人運行中の事故の一次的な責任は、事故原因に応じてシステム・車両メーカーと運行企業で分担する</a:t>
             </a:r>
@@ -8091,7 +8091,7 @@
             </a:avLst>
           </a:prstGeom>
           <a:solidFill>
-            <a:srgbClr val="1A1A1A"/>
+            <a:srgbClr val="FFFFFF"/>
           </a:solidFill>
           <a:ln/>
           <a:effectLst>
@@ -8133,8 +8133,8 @@
                   <a:srgbClr val="000000"/>
                 </a:solidFill>
                 <a:latin typeface="Arial" pitchFamily="34" charset="0"/>
-                <a:ea typeface="Arial" pitchFamily="34" charset="-122"/>
-                <a:cs typeface="Arial" pitchFamily="34" charset="-120"/>
+                <a:ea typeface="BIZ UDPGothic" pitchFamily="34" charset="-122"/>
+                <a:cs typeface="BIZ UDPGothic" pitchFamily="34" charset="-120"/>
               </a:rPr>
               <a:t>💻</a:t>
             </a:r>
@@ -8169,11 +8169,11 @@
             <a:r>
               <a:rPr lang="en-US" sz="1300" dirty="0">
                 <a:solidFill>
-                  <a:srgbClr val="F5F5F0"/>
-                </a:solidFill>
-                <a:latin typeface="Noto Sans JP" pitchFamily="34" charset="0"/>
-                <a:ea typeface="Noto Sans JP" pitchFamily="34" charset="-122"/>
-                <a:cs typeface="Noto Sans JP" pitchFamily="34" charset="-120"/>
+                  <a:srgbClr val="16181D"/>
+                </a:solidFill>
+                <a:latin typeface="BIZ UDPGothic" pitchFamily="34" charset="0"/>
+                <a:ea typeface="BIZ UDPGothic" pitchFamily="34" charset="-122"/>
+                <a:cs typeface="BIZ UDPGothic" pitchFamily="34" charset="-120"/>
               </a:rPr>
               <a:t>ソフトウェア・センサーの欠陥</a:t>
             </a:r>
@@ -8208,11 +8208,11 @@
             <a:r>
               <a:rPr lang="en-US" sz="1300" b="1" dirty="0">
                 <a:solidFill>
-                  <a:srgbClr val="D62828"/>
-                </a:solidFill>
-                <a:latin typeface="Noto Sans JP" pitchFamily="34" charset="0"/>
-                <a:ea typeface="Noto Sans JP" pitchFamily="34" charset="-122"/>
-                <a:cs typeface="Noto Sans JP" pitchFamily="34" charset="-120"/>
+                  <a:srgbClr val="C8161D"/>
+                </a:solidFill>
+                <a:latin typeface="BIZ UDPGothic" pitchFamily="34" charset="0"/>
+                <a:ea typeface="BIZ UDPGothic" pitchFamily="34" charset="-122"/>
+                <a:cs typeface="BIZ UDPGothic" pitchFamily="34" charset="-120"/>
               </a:rPr>
               <a:t>→ システム・車両メーカーの責任</a:t>
             </a:r>
@@ -8237,7 +8237,7 @@
             </a:avLst>
           </a:prstGeom>
           <a:solidFill>
-            <a:srgbClr val="1A1A1A"/>
+            <a:srgbClr val="FFFFFF"/>
           </a:solidFill>
           <a:ln/>
           <a:effectLst>
@@ -8279,8 +8279,8 @@
                   <a:srgbClr val="000000"/>
                 </a:solidFill>
                 <a:latin typeface="Arial" pitchFamily="34" charset="0"/>
-                <a:ea typeface="Arial" pitchFamily="34" charset="-122"/>
-                <a:cs typeface="Arial" pitchFamily="34" charset="-120"/>
+                <a:ea typeface="BIZ UDPGothic" pitchFamily="34" charset="-122"/>
+                <a:cs typeface="BIZ UDPGothic" pitchFamily="34" charset="-120"/>
               </a:rPr>
               <a:t>👥</a:t>
             </a:r>
@@ -8315,11 +8315,11 @@
             <a:r>
               <a:rPr lang="en-US" sz="1300" dirty="0">
                 <a:solidFill>
-                  <a:srgbClr val="F5F5F0"/>
-                </a:solidFill>
-                <a:latin typeface="Noto Sans JP" pitchFamily="34" charset="0"/>
-                <a:ea typeface="Noto Sans JP" pitchFamily="34" charset="-122"/>
-                <a:cs typeface="Noto Sans JP" pitchFamily="34" charset="-120"/>
+                  <a:srgbClr val="16181D"/>
+                </a:solidFill>
+                <a:latin typeface="BIZ UDPGothic" pitchFamily="34" charset="0"/>
+                <a:ea typeface="BIZ UDPGothic" pitchFamily="34" charset="-122"/>
+                <a:cs typeface="BIZ UDPGothic" pitchFamily="34" charset="-120"/>
               </a:rPr>
               <a:t>運行監視体制の不備・整備不良</a:t>
             </a:r>
@@ -8354,11 +8354,11 @@
             <a:r>
               <a:rPr lang="en-US" sz="1300" b="1" dirty="0">
                 <a:solidFill>
-                  <a:srgbClr val="D62828"/>
-                </a:solidFill>
-                <a:latin typeface="Noto Sans JP" pitchFamily="34" charset="0"/>
-                <a:ea typeface="Noto Sans JP" pitchFamily="34" charset="-122"/>
-                <a:cs typeface="Noto Sans JP" pitchFamily="34" charset="-120"/>
+                  <a:srgbClr val="C8161D"/>
+                </a:solidFill>
+                <a:latin typeface="BIZ UDPGothic" pitchFamily="34" charset="0"/>
+                <a:ea typeface="BIZ UDPGothic" pitchFamily="34" charset="-122"/>
+                <a:cs typeface="BIZ UDPGothic" pitchFamily="34" charset="-120"/>
               </a:rPr>
               <a:t>→ 運行企業の責任</a:t>
             </a:r>
@@ -8383,7 +8383,7 @@
             </a:avLst>
           </a:prstGeom>
           <a:solidFill>
-            <a:srgbClr val="1A1A1A"/>
+            <a:srgbClr val="FFFFFF"/>
           </a:solidFill>
           <a:ln/>
           <a:effectLst>
@@ -8425,8 +8425,8 @@
                   <a:srgbClr val="000000"/>
                 </a:solidFill>
                 <a:latin typeface="Arial" pitchFamily="34" charset="0"/>
-                <a:ea typeface="Arial" pitchFamily="34" charset="-122"/>
-                <a:cs typeface="Arial" pitchFamily="34" charset="-120"/>
+                <a:ea typeface="BIZ UDPGothic" pitchFamily="34" charset="-122"/>
+                <a:cs typeface="BIZ UDPGothic" pitchFamily="34" charset="-120"/>
               </a:rPr>
               <a:t>⚖️</a:t>
             </a:r>
@@ -8461,11 +8461,11 @@
             <a:r>
               <a:rPr lang="en-US" sz="1300" dirty="0">
                 <a:solidFill>
-                  <a:srgbClr val="F5F5F0"/>
-                </a:solidFill>
-                <a:latin typeface="Noto Sans JP" pitchFamily="34" charset="0"/>
-                <a:ea typeface="Noto Sans JP" pitchFamily="34" charset="-122"/>
-                <a:cs typeface="Noto Sans JP" pitchFamily="34" charset="-120"/>
+                  <a:srgbClr val="16181D"/>
+                </a:solidFill>
+                <a:latin typeface="BIZ UDPGothic" pitchFamily="34" charset="0"/>
+                <a:ea typeface="BIZ UDPGothic" pitchFamily="34" charset="-122"/>
+                <a:cs typeface="BIZ UDPGothic" pitchFamily="34" charset="-120"/>
               </a:rPr>
               <a:t>双方に原因がある場合</a:t>
             </a:r>
@@ -8500,11 +8500,11 @@
             <a:r>
               <a:rPr lang="en-US" sz="1300" b="1" dirty="0">
                 <a:solidFill>
-                  <a:srgbClr val="D62828"/>
-                </a:solidFill>
-                <a:latin typeface="Noto Sans JP" pitchFamily="34" charset="0"/>
-                <a:ea typeface="Noto Sans JP" pitchFamily="34" charset="-122"/>
-                <a:cs typeface="Noto Sans JP" pitchFamily="34" charset="-120"/>
+                  <a:srgbClr val="C8161D"/>
+                </a:solidFill>
+                <a:latin typeface="BIZ UDPGothic" pitchFamily="34" charset="0"/>
+                <a:ea typeface="BIZ UDPGothic" pitchFamily="34" charset="-122"/>
+                <a:cs typeface="BIZ UDPGothic" pitchFamily="34" charset="-120"/>
               </a:rPr>
               <a:t>→ 按分</a:t>
             </a:r>
@@ -8539,13 +8539,13 @@
             <a:r>
               <a:rPr lang="en-US" sz="900" dirty="0">
                 <a:solidFill>
-                  <a:srgbClr val="F5F5F0">
+                  <a:srgbClr val="16181D">
                     <a:alpha val="45000"/>
                   </a:srgbClr>
                 </a:solidFill>
-                <a:latin typeface="Noto Sans JP" pitchFamily="34" charset="0"/>
-                <a:ea typeface="Noto Sans JP" pitchFamily="34" charset="-122"/>
-                <a:cs typeface="Noto Sans JP" pitchFamily="34" charset="-120"/>
+                <a:latin typeface="BIZ UDPGothic" pitchFamily="34" charset="0"/>
+                <a:ea typeface="BIZ UDPGothic" pitchFamily="34" charset="-122"/>
+                <a:cs typeface="BIZ UDPGothic" pitchFamily="34" charset="-120"/>
               </a:rPr>
               <a:t>REBOOT JAPAN ── 市民による政策提言プラットフォーム</a:t>
             </a:r>
@@ -8580,13 +8580,13 @@
             <a:r>
               <a:rPr lang="en-US" sz="900" dirty="0">
                 <a:solidFill>
-                  <a:srgbClr val="F5F5F0">
+                  <a:srgbClr val="16181D">
                     <a:alpha val="45000"/>
                   </a:srgbClr>
                 </a:solidFill>
-                <a:latin typeface="Noto Sans JP" pitchFamily="34" charset="0"/>
-                <a:ea typeface="Noto Sans JP" pitchFamily="34" charset="-122"/>
-                <a:cs typeface="Noto Sans JP" pitchFamily="34" charset="-120"/>
+                <a:latin typeface="BIZ UDPGothic" pitchFamily="34" charset="0"/>
+                <a:ea typeface="BIZ UDPGothic" pitchFamily="34" charset="-122"/>
+                <a:cs typeface="BIZ UDPGothic" pitchFamily="34" charset="-120"/>
               </a:rPr>
               <a:t>19</a:t>
             </a:r>
@@ -8608,7 +8608,7 @@
     <p:bg>
       <p:bgPr>
         <a:solidFill>
-          <a:srgbClr val="0A0A0A"/>
+          <a:srgbClr val="F5F6F8"/>
         </a:solidFill>
       </p:bgPr>
     </p:bg>
@@ -8653,11 +8653,11 @@
             <a:r>
               <a:rPr lang="en-US" sz="1200" b="1" spc="200" kern="0" dirty="0">
                 <a:solidFill>
-                  <a:srgbClr val="D62828"/>
+                  <a:srgbClr val="C8161D"/>
                 </a:solidFill>
                 <a:latin typeface="Arial" pitchFamily="34" charset="0"/>
-                <a:ea typeface="Arial" pitchFamily="34" charset="-122"/>
-                <a:cs typeface="Arial" pitchFamily="34" charset="-120"/>
+                <a:ea typeface="BIZ UDPGothic" pitchFamily="34" charset="-122"/>
+                <a:cs typeface="BIZ UDPGothic" pitchFamily="34" charset="-120"/>
               </a:rPr>
               <a:t>PROBLEM</a:t>
             </a:r>
@@ -8692,11 +8692,11 @@
             <a:r>
               <a:rPr lang="en-US" sz="2600" b="1" dirty="0">
                 <a:solidFill>
-                  <a:srgbClr val="F5F5F0"/>
-                </a:solidFill>
-                <a:latin typeface="Noto Sans JP" pitchFamily="34" charset="0"/>
-                <a:ea typeface="Noto Sans JP" pitchFamily="34" charset="-122"/>
-                <a:cs typeface="Noto Sans JP" pitchFamily="34" charset="-120"/>
+                  <a:srgbClr val="16181D"/>
+                </a:solidFill>
+                <a:latin typeface="BIZ UDPGothic" pitchFamily="34" charset="0"/>
+                <a:ea typeface="BIZ UDPGothic" pitchFamily="34" charset="-122"/>
+                <a:cs typeface="BIZ UDPGothic" pitchFamily="34" charset="-120"/>
               </a:rPr>
               <a:t>なぜ今、この問題なのか？</a:t>
             </a:r>
@@ -8731,13 +8731,13 @@
             <a:r>
               <a:rPr lang="en-US" sz="1350" dirty="0">
                 <a:solidFill>
-                  <a:srgbClr val="F5F5F0">
+                  <a:srgbClr val="16181D">
                     <a:alpha val="90000"/>
                   </a:srgbClr>
                 </a:solidFill>
-                <a:latin typeface="Noto Sans JP" pitchFamily="34" charset="0"/>
-                <a:ea typeface="Noto Sans JP" pitchFamily="34" charset="-122"/>
-                <a:cs typeface="Noto Sans JP" pitchFamily="34" charset="-120"/>
+                <a:latin typeface="BIZ UDPGothic" pitchFamily="34" charset="0"/>
+                <a:ea typeface="BIZ UDPGothic" pitchFamily="34" charset="-122"/>
+                <a:cs typeface="BIZ UDPGothic" pitchFamily="34" charset="-120"/>
               </a:rPr>
               <a:t>地方の交通・物流は、既存の枠組みのままでは支えきれない段階に来ている。</a:t>
             </a:r>
@@ -8772,11 +8772,11 @@
             <a:r>
               <a:rPr lang="en-US" sz="2600" b="1" dirty="0">
                 <a:solidFill>
-                  <a:srgbClr val="D62828"/>
+                  <a:srgbClr val="C8161D"/>
                 </a:solidFill>
                 <a:latin typeface="Arial" pitchFamily="34" charset="0"/>
-                <a:ea typeface="Arial" pitchFamily="34" charset="-122"/>
-                <a:cs typeface="Arial" pitchFamily="34" charset="-120"/>
+                <a:ea typeface="BIZ UDPGothic" pitchFamily="34" charset="-122"/>
+                <a:cs typeface="BIZ UDPGothic" pitchFamily="34" charset="-120"/>
               </a:rPr>
               <a:t>01</a:t>
             </a:r>
@@ -8811,11 +8811,11 @@
             <a:r>
               <a:rPr lang="en-US" sz="1500" b="1" dirty="0">
                 <a:solidFill>
-                  <a:srgbClr val="F5F5F0"/>
-                </a:solidFill>
-                <a:latin typeface="Noto Sans JP" pitchFamily="34" charset="0"/>
-                <a:ea typeface="Noto Sans JP" pitchFamily="34" charset="-122"/>
-                <a:cs typeface="Noto Sans JP" pitchFamily="34" charset="-120"/>
+                  <a:srgbClr val="16181D"/>
+                </a:solidFill>
+                <a:latin typeface="BIZ UDPGothic" pitchFamily="34" charset="0"/>
+                <a:ea typeface="BIZ UDPGothic" pitchFamily="34" charset="-122"/>
+                <a:cs typeface="BIZ UDPGothic" pitchFamily="34" charset="-120"/>
               </a:rPr>
               <a:t>公共交通の崩壊</a:t>
             </a:r>
@@ -8853,13 +8853,13 @@
             <a:r>
               <a:rPr lang="en-US" sz="1250" dirty="0">
                 <a:solidFill>
-                  <a:srgbClr val="F5F5F0">
+                  <a:srgbClr val="16181D">
                     <a:alpha val="92000"/>
                   </a:srgbClr>
                 </a:solidFill>
-                <a:latin typeface="Noto Sans JP" pitchFamily="34" charset="0"/>
-                <a:ea typeface="Noto Sans JP" pitchFamily="34" charset="-122"/>
-                <a:cs typeface="Noto Sans JP" pitchFamily="34" charset="-120"/>
+                <a:latin typeface="BIZ UDPGothic" pitchFamily="34" charset="0"/>
+                <a:ea typeface="BIZ UDPGothic" pitchFamily="34" charset="-122"/>
+                <a:cs typeface="BIZ UDPGothic" pitchFamily="34" charset="-120"/>
               </a:rPr>
               <a:t>地方のバス路線・タクシー事業者は運転手不足と赤字体質から廃線・減便が相次いでいる。高齢者の移動手段が失われつつある</a:t>
             </a:r>
@@ -8894,11 +8894,11 @@
             <a:r>
               <a:rPr lang="en-US" sz="2600" b="1" dirty="0">
                 <a:solidFill>
-                  <a:srgbClr val="D62828"/>
+                  <a:srgbClr val="C8161D"/>
                 </a:solidFill>
                 <a:latin typeface="Arial" pitchFamily="34" charset="0"/>
-                <a:ea typeface="Arial" pitchFamily="34" charset="-122"/>
-                <a:cs typeface="Arial" pitchFamily="34" charset="-120"/>
+                <a:ea typeface="BIZ UDPGothic" pitchFamily="34" charset="-122"/>
+                <a:cs typeface="BIZ UDPGothic" pitchFamily="34" charset="-120"/>
               </a:rPr>
               <a:t>02</a:t>
             </a:r>
@@ -8933,11 +8933,11 @@
             <a:r>
               <a:rPr lang="en-US" sz="1500" b="1" dirty="0">
                 <a:solidFill>
-                  <a:srgbClr val="F5F5F0"/>
-                </a:solidFill>
-                <a:latin typeface="Noto Sans JP" pitchFamily="34" charset="0"/>
-                <a:ea typeface="Noto Sans JP" pitchFamily="34" charset="-122"/>
-                <a:cs typeface="Noto Sans JP" pitchFamily="34" charset="-120"/>
+                  <a:srgbClr val="16181D"/>
+                </a:solidFill>
+                <a:latin typeface="BIZ UDPGothic" pitchFamily="34" charset="0"/>
+                <a:ea typeface="BIZ UDPGothic" pitchFamily="34" charset="-122"/>
+                <a:cs typeface="BIZ UDPGothic" pitchFamily="34" charset="-120"/>
               </a:rPr>
               <a:t>物流の24時間化圧力</a:t>
             </a:r>
@@ -8975,13 +8975,13 @@
             <a:r>
               <a:rPr lang="en-US" sz="1250" dirty="0">
                 <a:solidFill>
-                  <a:srgbClr val="F5F5F0">
+                  <a:srgbClr val="16181D">
                     <a:alpha val="92000"/>
                   </a:srgbClr>
                 </a:solidFill>
-                <a:latin typeface="Noto Sans JP" pitchFamily="34" charset="0"/>
-                <a:ea typeface="Noto Sans JP" pitchFamily="34" charset="-122"/>
-                <a:cs typeface="Noto Sans JP" pitchFamily="34" charset="-120"/>
+                <a:latin typeface="BIZ UDPGothic" pitchFamily="34" charset="0"/>
+                <a:ea typeface="BIZ UDPGothic" pitchFamily="34" charset="-122"/>
+                <a:cs typeface="BIZ UDPGothic" pitchFamily="34" charset="-120"/>
               </a:rPr>
               <a:t>ドライバー不足と時間外労働規制により、夜間輸送・過疎地配送の担い手が構造的に不足している</a:t>
             </a:r>
@@ -9016,11 +9016,11 @@
             <a:r>
               <a:rPr lang="en-US" sz="2600" b="1" dirty="0">
                 <a:solidFill>
-                  <a:srgbClr val="D62828"/>
+                  <a:srgbClr val="C8161D"/>
                 </a:solidFill>
                 <a:latin typeface="Arial" pitchFamily="34" charset="0"/>
-                <a:ea typeface="Arial" pitchFamily="34" charset="-122"/>
-                <a:cs typeface="Arial" pitchFamily="34" charset="-120"/>
+                <a:ea typeface="BIZ UDPGothic" pitchFamily="34" charset="-122"/>
+                <a:cs typeface="BIZ UDPGothic" pitchFamily="34" charset="-120"/>
               </a:rPr>
               <a:t>03</a:t>
             </a:r>
@@ -9055,11 +9055,11 @@
             <a:r>
               <a:rPr lang="en-US" sz="1500" b="1" dirty="0">
                 <a:solidFill>
-                  <a:srgbClr val="F5F5F0"/>
-                </a:solidFill>
-                <a:latin typeface="Noto Sans JP" pitchFamily="34" charset="0"/>
-                <a:ea typeface="Noto Sans JP" pitchFamily="34" charset="-122"/>
-                <a:cs typeface="Noto Sans JP" pitchFamily="34" charset="-120"/>
+                  <a:srgbClr val="16181D"/>
+                </a:solidFill>
+                <a:latin typeface="BIZ UDPGothic" pitchFamily="34" charset="0"/>
+                <a:ea typeface="BIZ UDPGothic" pitchFamily="34" charset="-122"/>
+                <a:cs typeface="BIZ UDPGothic" pitchFamily="34" charset="-120"/>
               </a:rPr>
               <a:t>「裁量型」特区の限界</a:t>
             </a:r>
@@ -9097,13 +9097,13 @@
             <a:r>
               <a:rPr lang="en-US" sz="1250" dirty="0">
                 <a:solidFill>
-                  <a:srgbClr val="F5F5F0">
+                  <a:srgbClr val="16181D">
                     <a:alpha val="92000"/>
                   </a:srgbClr>
                 </a:solidFill>
-                <a:latin typeface="Noto Sans JP" pitchFamily="34" charset="0"/>
-                <a:ea typeface="Noto Sans JP" pitchFamily="34" charset="-122"/>
-                <a:cs typeface="Noto Sans JP" pitchFamily="34" charset="-120"/>
+                <a:latin typeface="BIZ UDPGothic" pitchFamily="34" charset="0"/>
+                <a:ea typeface="BIZ UDPGothic" pitchFamily="34" charset="-122"/>
+                <a:cs typeface="BIZ UDPGothic" pitchFamily="34" charset="-120"/>
               </a:rPr>
               <a:t>国が個別に審査する現行の特区制度は時間がかかり、深刻な地域ほど後回しになりやすい</a:t>
             </a:r>
@@ -9138,13 +9138,13 @@
             <a:r>
               <a:rPr lang="en-US" sz="900" dirty="0">
                 <a:solidFill>
-                  <a:srgbClr val="F5F5F0">
+                  <a:srgbClr val="16181D">
                     <a:alpha val="45000"/>
                   </a:srgbClr>
                 </a:solidFill>
-                <a:latin typeface="Noto Sans JP" pitchFamily="34" charset="0"/>
-                <a:ea typeface="Noto Sans JP" pitchFamily="34" charset="-122"/>
-                <a:cs typeface="Noto Sans JP" pitchFamily="34" charset="-120"/>
+                <a:latin typeface="BIZ UDPGothic" pitchFamily="34" charset="0"/>
+                <a:ea typeface="BIZ UDPGothic" pitchFamily="34" charset="-122"/>
+                <a:cs typeface="BIZ UDPGothic" pitchFamily="34" charset="-120"/>
               </a:rPr>
               <a:t>REBOOT JAPAN ── 市民による政策提言プラットフォーム</a:t>
             </a:r>
@@ -9179,13 +9179,13 @@
             <a:r>
               <a:rPr lang="en-US" sz="900" dirty="0">
                 <a:solidFill>
-                  <a:srgbClr val="F5F5F0">
+                  <a:srgbClr val="16181D">
                     <a:alpha val="45000"/>
                   </a:srgbClr>
                 </a:solidFill>
-                <a:latin typeface="Noto Sans JP" pitchFamily="34" charset="0"/>
-                <a:ea typeface="Noto Sans JP" pitchFamily="34" charset="-122"/>
-                <a:cs typeface="Noto Sans JP" pitchFamily="34" charset="-120"/>
+                <a:latin typeface="BIZ UDPGothic" pitchFamily="34" charset="0"/>
+                <a:ea typeface="BIZ UDPGothic" pitchFamily="34" charset="-122"/>
+                <a:cs typeface="BIZ UDPGothic" pitchFamily="34" charset="-120"/>
               </a:rPr>
               <a:t>2</a:t>
             </a:r>
@@ -9207,7 +9207,7 @@
     <p:bg>
       <p:bgPr>
         <a:solidFill>
-          <a:srgbClr val="0A0A0A"/>
+          <a:srgbClr val="F5F6F8"/>
         </a:solidFill>
       </p:bgPr>
     </p:bg>
@@ -9252,11 +9252,11 @@
             <a:r>
               <a:rPr lang="en-US" sz="1200" b="1" spc="200" kern="0" dirty="0">
                 <a:solidFill>
-                  <a:srgbClr val="D62828"/>
+                  <a:srgbClr val="C8161D"/>
                 </a:solidFill>
                 <a:latin typeface="Arial" pitchFamily="34" charset="0"/>
-                <a:ea typeface="Arial" pitchFamily="34" charset="-122"/>
-                <a:cs typeface="Arial" pitchFamily="34" charset="-120"/>
+                <a:ea typeface="BIZ UDPGothic" pitchFamily="34" charset="-122"/>
+                <a:cs typeface="BIZ UDPGothic" pitchFamily="34" charset="-120"/>
               </a:rPr>
               <a:t>SAFETY — DETAIL</a:t>
             </a:r>
@@ -9291,11 +9291,11 @@
             <a:r>
               <a:rPr lang="en-US" sz="2200" b="1" dirty="0">
                 <a:solidFill>
-                  <a:srgbClr val="F5F5F0"/>
-                </a:solidFill>
-                <a:latin typeface="Noto Sans JP" pitchFamily="34" charset="0"/>
-                <a:ea typeface="Noto Sans JP" pitchFamily="34" charset="-122"/>
-                <a:cs typeface="Noto Sans JP" pitchFamily="34" charset="-120"/>
+                  <a:srgbClr val="16181D"/>
+                </a:solidFill>
+                <a:latin typeface="BIZ UDPGothic" pitchFamily="34" charset="0"/>
+                <a:ea typeface="BIZ UDPGothic" pitchFamily="34" charset="-122"/>
+                <a:cs typeface="BIZ UDPGothic" pitchFamily="34" charset="-120"/>
               </a:rPr>
               <a:t>原因がわかるまでの「仮払い」の仕組み</a:t>
             </a:r>
@@ -9333,8 +9333,8 @@
                   <a:srgbClr val="000000"/>
                 </a:solidFill>
                 <a:latin typeface="Arial" pitchFamily="34" charset="0"/>
-                <a:ea typeface="Arial" pitchFamily="34" charset="-122"/>
-                <a:cs typeface="Arial" pitchFamily="34" charset="-120"/>
+                <a:ea typeface="BIZ UDPGothic" pitchFamily="34" charset="-122"/>
+                <a:cs typeface="BIZ UDPGothic" pitchFamily="34" charset="-120"/>
               </a:rPr>
               <a:t>⏳</a:t>
             </a:r>
@@ -9369,11 +9369,11 @@
             <a:r>
               <a:rPr lang="en-US" sz="1500" b="1" dirty="0">
                 <a:solidFill>
-                  <a:srgbClr val="F5F5F0"/>
-                </a:solidFill>
-                <a:latin typeface="Noto Sans JP" pitchFamily="34" charset="0"/>
-                <a:ea typeface="Noto Sans JP" pitchFamily="34" charset="-122"/>
-                <a:cs typeface="Noto Sans JP" pitchFamily="34" charset="-120"/>
+                  <a:srgbClr val="16181D"/>
+                </a:solidFill>
+                <a:latin typeface="BIZ UDPGothic" pitchFamily="34" charset="0"/>
+                <a:ea typeface="BIZ UDPGothic" pitchFamily="34" charset="-122"/>
+                <a:cs typeface="BIZ UDPGothic" pitchFamily="34" charset="-120"/>
               </a:rPr>
               <a:t>事故原因の切り分けには専門的な調査が必要で、時間がかかる</a:t>
             </a:r>
@@ -9398,11 +9398,11 @@
             </a:avLst>
           </a:prstGeom>
           <a:solidFill>
-            <a:srgbClr val="1A1A1A"/>
+            <a:srgbClr val="FFFFFF"/>
           </a:solidFill>
           <a:ln w="19050">
             <a:solidFill>
-              <a:srgbClr val="D62828"/>
+              <a:srgbClr val="C8161D"/>
             </a:solidFill>
             <a:prstDash val="solid"/>
           </a:ln>
@@ -9445,8 +9445,8 @@
                   <a:srgbClr val="000000"/>
                 </a:solidFill>
                 <a:latin typeface="Arial" pitchFamily="34" charset="0"/>
-                <a:ea typeface="Arial" pitchFamily="34" charset="-122"/>
-                <a:cs typeface="Arial" pitchFamily="34" charset="-120"/>
+                <a:ea typeface="BIZ UDPGothic" pitchFamily="34" charset="-122"/>
+                <a:cs typeface="BIZ UDPGothic" pitchFamily="34" charset="-120"/>
               </a:rPr>
               <a:t>💰</a:t>
             </a:r>
@@ -9481,11 +9481,11 @@
             <a:r>
               <a:rPr lang="en-US" sz="1500" b="1" dirty="0">
                 <a:solidFill>
-                  <a:srgbClr val="D62828"/>
-                </a:solidFill>
-                <a:latin typeface="Noto Sans JP" pitchFamily="34" charset="0"/>
-                <a:ea typeface="Noto Sans JP" pitchFamily="34" charset="-122"/>
-                <a:cs typeface="Noto Sans JP" pitchFamily="34" charset="-120"/>
+                  <a:srgbClr val="C8161D"/>
+                </a:solidFill>
+                <a:latin typeface="BIZ UDPGothic" pitchFamily="34" charset="0"/>
+                <a:ea typeface="BIZ UDPGothic" pitchFamily="34" charset="-122"/>
+                <a:cs typeface="BIZ UDPGothic" pitchFamily="34" charset="-120"/>
               </a:rPr>
               <a:t>原因確定前でも「無過失の仮払いモデル」で被害者に支払う</a:t>
             </a:r>
@@ -9523,11 +9523,11 @@
             <a:r>
               <a:rPr lang="en-US" sz="1250" dirty="0">
                 <a:solidFill>
-                  <a:srgbClr val="F5F5F0"/>
-                </a:solidFill>
-                <a:latin typeface="Noto Sans JP" pitchFamily="34" charset="0"/>
-                <a:ea typeface="Noto Sans JP" pitchFamily="34" charset="-122"/>
-                <a:cs typeface="Noto Sans JP" pitchFamily="34" charset="-120"/>
+                  <a:srgbClr val="16181D"/>
+                </a:solidFill>
+                <a:latin typeface="BIZ UDPGothic" pitchFamily="34" charset="0"/>
+                <a:ea typeface="BIZ UDPGothic" pitchFamily="34" charset="-122"/>
+                <a:cs typeface="BIZ UDPGothic" pitchFamily="34" charset="-120"/>
               </a:rPr>
               <a:t>日本の自賠責保険に近い発想。原因確定後、企業間・メーカー間で正式な求償を行う。被害者の補償が原因調査の長さに左右されない設計とする。</a:t>
             </a:r>
@@ -9562,13 +9562,13 @@
             <a:r>
               <a:rPr lang="en-US" sz="900" dirty="0">
                 <a:solidFill>
-                  <a:srgbClr val="F5F5F0">
+                  <a:srgbClr val="16181D">
                     <a:alpha val="45000"/>
                   </a:srgbClr>
                 </a:solidFill>
-                <a:latin typeface="Noto Sans JP" pitchFamily="34" charset="0"/>
-                <a:ea typeface="Noto Sans JP" pitchFamily="34" charset="-122"/>
-                <a:cs typeface="Noto Sans JP" pitchFamily="34" charset="-120"/>
+                <a:latin typeface="BIZ UDPGothic" pitchFamily="34" charset="0"/>
+                <a:ea typeface="BIZ UDPGothic" pitchFamily="34" charset="-122"/>
+                <a:cs typeface="BIZ UDPGothic" pitchFamily="34" charset="-120"/>
               </a:rPr>
               <a:t>REBOOT JAPAN ── 市民による政策提言プラットフォーム</a:t>
             </a:r>
@@ -9603,13 +9603,13 @@
             <a:r>
               <a:rPr lang="en-US" sz="900" dirty="0">
                 <a:solidFill>
-                  <a:srgbClr val="F5F5F0">
+                  <a:srgbClr val="16181D">
                     <a:alpha val="45000"/>
                   </a:srgbClr>
                 </a:solidFill>
-                <a:latin typeface="Noto Sans JP" pitchFamily="34" charset="0"/>
-                <a:ea typeface="Noto Sans JP" pitchFamily="34" charset="-122"/>
-                <a:cs typeface="Noto Sans JP" pitchFamily="34" charset="-120"/>
+                <a:latin typeface="BIZ UDPGothic" pitchFamily="34" charset="0"/>
+                <a:ea typeface="BIZ UDPGothic" pitchFamily="34" charset="-122"/>
+                <a:cs typeface="BIZ UDPGothic" pitchFamily="34" charset="-120"/>
               </a:rPr>
               <a:t>20</a:t>
             </a:r>
@@ -9631,7 +9631,7 @@
     <p:bg>
       <p:bgPr>
         <a:solidFill>
-          <a:srgbClr val="0A0A0A"/>
+          <a:srgbClr val="F5F6F8"/>
         </a:solidFill>
       </p:bgPr>
     </p:bg>
@@ -9676,11 +9676,11 @@
             <a:r>
               <a:rPr lang="en-US" sz="1200" b="1" spc="200" kern="0" dirty="0">
                 <a:solidFill>
-                  <a:srgbClr val="D62828"/>
+                  <a:srgbClr val="C8161D"/>
                 </a:solidFill>
                 <a:latin typeface="Arial" pitchFamily="34" charset="0"/>
-                <a:ea typeface="Arial" pitchFamily="34" charset="-122"/>
-                <a:cs typeface="Arial" pitchFamily="34" charset="-120"/>
+                <a:ea typeface="BIZ UDPGothic" pitchFamily="34" charset="-122"/>
+                <a:cs typeface="BIZ UDPGothic" pitchFamily="34" charset="-120"/>
               </a:rPr>
               <a:t>SAFETY — DETAIL</a:t>
             </a:r>
@@ -9715,11 +9715,11 @@
             <a:r>
               <a:rPr lang="en-US" sz="2200" b="1" dirty="0">
                 <a:solidFill>
-                  <a:srgbClr val="F5F5F0"/>
-                </a:solidFill>
-                <a:latin typeface="Noto Sans JP" pitchFamily="34" charset="0"/>
-                <a:ea typeface="Noto Sans JP" pitchFamily="34" charset="-122"/>
-                <a:cs typeface="Noto Sans JP" pitchFamily="34" charset="-120"/>
+                  <a:srgbClr val="16181D"/>
+                </a:solidFill>
+                <a:latin typeface="BIZ UDPGothic" pitchFamily="34" charset="0"/>
+                <a:ea typeface="BIZ UDPGothic" pitchFamily="34" charset="-122"/>
+                <a:cs typeface="BIZ UDPGothic" pitchFamily="34" charset="-120"/>
               </a:rPr>
               <a:t>判定は国の第三者専門委員会が行う</a:t>
             </a:r>
@@ -9757,8 +9757,8 @@
                   <a:srgbClr val="000000"/>
                 </a:solidFill>
                 <a:latin typeface="Arial" pitchFamily="34" charset="0"/>
-                <a:ea typeface="Arial" pitchFamily="34" charset="-122"/>
-                <a:cs typeface="Arial" pitchFamily="34" charset="-120"/>
+                <a:ea typeface="BIZ UDPGothic" pitchFamily="34" charset="-122"/>
+                <a:cs typeface="BIZ UDPGothic" pitchFamily="34" charset="-120"/>
               </a:rPr>
               <a:t>🏛️</a:t>
             </a:r>
@@ -9793,11 +9793,11 @@
             <a:r>
               <a:rPr lang="en-US" sz="1500" b="1" dirty="0">
                 <a:solidFill>
-                  <a:srgbClr val="F5F5F0"/>
-                </a:solidFill>
-                <a:latin typeface="Noto Sans JP" pitchFamily="34" charset="0"/>
-                <a:ea typeface="Noto Sans JP" pitchFamily="34" charset="-122"/>
-                <a:cs typeface="Noto Sans JP" pitchFamily="34" charset="-120"/>
+                  <a:srgbClr val="16181D"/>
+                </a:solidFill>
+                <a:latin typeface="BIZ UDPGothic" pitchFamily="34" charset="0"/>
+                <a:ea typeface="BIZ UDPGothic" pitchFamily="34" charset="-122"/>
+                <a:cs typeface="BIZ UDPGothic" pitchFamily="34" charset="-120"/>
               </a:rPr>
               <a:t>事故原因の判定は、都道府県の特区担当部局ではなく、国・第三者の専門委員会が行う</a:t>
             </a:r>
@@ -9822,7 +9822,7 @@
             </a:avLst>
           </a:prstGeom>
           <a:solidFill>
-            <a:srgbClr val="1A1A1A"/>
+            <a:srgbClr val="FFFFFF"/>
           </a:solidFill>
           <a:ln/>
           <a:effectLst>
@@ -9864,11 +9864,11 @@
             <a:r>
               <a:rPr lang="en-US" sz="1350" b="1" dirty="0">
                 <a:solidFill>
-                  <a:srgbClr val="D62828"/>
-                </a:solidFill>
-                <a:latin typeface="Noto Sans JP" pitchFamily="34" charset="0"/>
-                <a:ea typeface="Noto Sans JP" pitchFamily="34" charset="-122"/>
-                <a:cs typeface="Noto Sans JP" pitchFamily="34" charset="-120"/>
+                  <a:srgbClr val="C8161D"/>
+                </a:solidFill>
+                <a:latin typeface="BIZ UDPGothic" pitchFamily="34" charset="0"/>
+                <a:ea typeface="BIZ UDPGothic" pitchFamily="34" charset="-122"/>
+                <a:cs typeface="BIZ UDPGothic" pitchFamily="34" charset="-120"/>
               </a:rPr>
               <a:t>委員会には、以下の専門家を必ず組み込む</a:t>
             </a:r>
@@ -9885,11 +9885,11 @@
             <a:r>
               <a:rPr lang="en-US" sz="1350" dirty="0">
                 <a:solidFill>
-                  <a:srgbClr val="F5F5F0"/>
-                </a:solidFill>
-                <a:latin typeface="Noto Sans JP" pitchFamily="34" charset="0"/>
-                <a:ea typeface="Noto Sans JP" pitchFamily="34" charset="-122"/>
-                <a:cs typeface="Noto Sans JP" pitchFamily="34" charset="-120"/>
+                  <a:srgbClr val="16181D"/>
+                </a:solidFill>
+                <a:latin typeface="BIZ UDPGothic" pitchFamily="34" charset="0"/>
+                <a:ea typeface="BIZ UDPGothic" pitchFamily="34" charset="-122"/>
+                <a:cs typeface="BIZ UDPGothic" pitchFamily="34" charset="-120"/>
               </a:rPr>
               <a:t>システム（ソフトウェア）分野の専門家</a:t>
             </a:r>
@@ -9906,11 +9906,11 @@
             <a:r>
               <a:rPr lang="en-US" sz="1350" dirty="0">
                 <a:solidFill>
-                  <a:srgbClr val="F5F5F0"/>
-                </a:solidFill>
-                <a:latin typeface="Noto Sans JP" pitchFamily="34" charset="0"/>
-                <a:ea typeface="Noto Sans JP" pitchFamily="34" charset="-122"/>
-                <a:cs typeface="Noto Sans JP" pitchFamily="34" charset="-120"/>
+                  <a:srgbClr val="16181D"/>
+                </a:solidFill>
+                <a:latin typeface="BIZ UDPGothic" pitchFamily="34" charset="0"/>
+                <a:ea typeface="BIZ UDPGothic" pitchFamily="34" charset="-122"/>
+                <a:cs typeface="BIZ UDPGothic" pitchFamily="34" charset="-120"/>
               </a:rPr>
               <a:t>車両（機械工学）分野の専門家</a:t>
             </a:r>
@@ -9945,13 +9945,13 @@
             <a:r>
               <a:rPr lang="en-US" sz="900" dirty="0">
                 <a:solidFill>
-                  <a:srgbClr val="F5F5F0">
+                  <a:srgbClr val="16181D">
                     <a:alpha val="45000"/>
                   </a:srgbClr>
                 </a:solidFill>
-                <a:latin typeface="Noto Sans JP" pitchFamily="34" charset="0"/>
-                <a:ea typeface="Noto Sans JP" pitchFamily="34" charset="-122"/>
-                <a:cs typeface="Noto Sans JP" pitchFamily="34" charset="-120"/>
+                <a:latin typeface="BIZ UDPGothic" pitchFamily="34" charset="0"/>
+                <a:ea typeface="BIZ UDPGothic" pitchFamily="34" charset="-122"/>
+                <a:cs typeface="BIZ UDPGothic" pitchFamily="34" charset="-120"/>
               </a:rPr>
               <a:t>REBOOT JAPAN ── 市民による政策提言プラットフォーム</a:t>
             </a:r>
@@ -9986,13 +9986,13 @@
             <a:r>
               <a:rPr lang="en-US" sz="900" dirty="0">
                 <a:solidFill>
-                  <a:srgbClr val="F5F5F0">
+                  <a:srgbClr val="16181D">
                     <a:alpha val="45000"/>
                   </a:srgbClr>
                 </a:solidFill>
-                <a:latin typeface="Noto Sans JP" pitchFamily="34" charset="0"/>
-                <a:ea typeface="Noto Sans JP" pitchFamily="34" charset="-122"/>
-                <a:cs typeface="Noto Sans JP" pitchFamily="34" charset="-120"/>
+                <a:latin typeface="BIZ UDPGothic" pitchFamily="34" charset="0"/>
+                <a:ea typeface="BIZ UDPGothic" pitchFamily="34" charset="-122"/>
+                <a:cs typeface="BIZ UDPGothic" pitchFamily="34" charset="-120"/>
               </a:rPr>
               <a:t>21</a:t>
             </a:r>
@@ -10014,7 +10014,7 @@
     <p:bg>
       <p:bgPr>
         <a:solidFill>
-          <a:srgbClr val="0A0A0A"/>
+          <a:srgbClr val="F5F6F8"/>
         </a:solidFill>
       </p:bgPr>
     </p:bg>
@@ -10059,11 +10059,11 @@
             <a:r>
               <a:rPr lang="en-US" sz="1200" b="1" spc="200" kern="0" dirty="0">
                 <a:solidFill>
-                  <a:srgbClr val="D62828"/>
+                  <a:srgbClr val="C8161D"/>
                 </a:solidFill>
                 <a:latin typeface="Arial" pitchFamily="34" charset="0"/>
-                <a:ea typeface="Arial" pitchFamily="34" charset="-122"/>
-                <a:cs typeface="Arial" pitchFamily="34" charset="-120"/>
+                <a:ea typeface="BIZ UDPGothic" pitchFamily="34" charset="-122"/>
+                <a:cs typeface="BIZ UDPGothic" pitchFamily="34" charset="-120"/>
               </a:rPr>
               <a:t>SAFETY — DETAIL</a:t>
             </a:r>
@@ -10098,11 +10098,11 @@
             <a:r>
               <a:rPr lang="en-US" sz="2500" b="1" dirty="0">
                 <a:solidFill>
-                  <a:srgbClr val="F5F5F0"/>
-                </a:solidFill>
-                <a:latin typeface="Noto Sans JP" pitchFamily="34" charset="0"/>
-                <a:ea typeface="Noto Sans JP" pitchFamily="34" charset="-122"/>
-                <a:cs typeface="Noto Sans JP" pitchFamily="34" charset="-120"/>
+                  <a:srgbClr val="16181D"/>
+                </a:solidFill>
+                <a:latin typeface="BIZ UDPGothic" pitchFamily="34" charset="0"/>
+                <a:ea typeface="BIZ UDPGothic" pitchFamily="34" charset="-122"/>
+                <a:cs typeface="BIZ UDPGothic" pitchFamily="34" charset="-120"/>
               </a:rPr>
               <a:t>責任の範囲をさらに拡張する</a:t>
             </a:r>
@@ -10127,11 +10127,11 @@
             </a:avLst>
           </a:prstGeom>
           <a:solidFill>
-            <a:srgbClr val="1A1A1A"/>
+            <a:srgbClr val="FFFFFF"/>
           </a:solidFill>
           <a:ln w="12700">
             <a:solidFill>
-              <a:srgbClr val="2E2E2E"/>
+              <a:srgbClr val="DDE0E6"/>
             </a:solidFill>
             <a:prstDash val="solid"/>
           </a:ln>
@@ -10174,8 +10174,8 @@
                   <a:srgbClr val="000000"/>
                 </a:solidFill>
                 <a:latin typeface="Arial" pitchFamily="34" charset="0"/>
-                <a:ea typeface="Arial" pitchFamily="34" charset="-122"/>
-                <a:cs typeface="Arial" pitchFamily="34" charset="-120"/>
+                <a:ea typeface="BIZ UDPGothic" pitchFamily="34" charset="-122"/>
+                <a:cs typeface="BIZ UDPGothic" pitchFamily="34" charset="-120"/>
               </a:rPr>
               <a:t>🚗💥</a:t>
             </a:r>
@@ -10213,11 +10213,11 @@
             <a:r>
               <a:rPr lang="en-US" sz="1400" b="1" dirty="0">
                 <a:solidFill>
-                  <a:srgbClr val="F5F5F0"/>
-                </a:solidFill>
-                <a:latin typeface="Noto Sans JP" pitchFamily="34" charset="0"/>
-                <a:ea typeface="Noto Sans JP" pitchFamily="34" charset="-122"/>
-                <a:cs typeface="Noto Sans JP" pitchFamily="34" charset="-120"/>
+                  <a:srgbClr val="16181D"/>
+                </a:solidFill>
+                <a:latin typeface="BIZ UDPGothic" pitchFamily="34" charset="0"/>
+                <a:ea typeface="BIZ UDPGothic" pitchFamily="34" charset="-122"/>
+                <a:cs typeface="BIZ UDPGothic" pitchFamily="34" charset="-120"/>
               </a:rPr>
               <a:t>接触がなくても責任が生じる</a:t>
             </a:r>
@@ -10255,11 +10255,11 @@
             <a:r>
               <a:rPr lang="en-US" sz="1150" dirty="0">
                 <a:solidFill>
-                  <a:srgbClr val="F5F5F0"/>
-                </a:solidFill>
-                <a:latin typeface="Noto Sans JP" pitchFamily="34" charset="0"/>
-                <a:ea typeface="Noto Sans JP" pitchFamily="34" charset="-122"/>
-                <a:cs typeface="Noto Sans JP" pitchFamily="34" charset="-120"/>
+                  <a:srgbClr val="16181D"/>
+                </a:solidFill>
+                <a:latin typeface="BIZ UDPGothic" pitchFamily="34" charset="0"/>
+                <a:ea typeface="BIZ UDPGothic" pitchFamily="34" charset="-122"/>
+                <a:cs typeface="BIZ UDPGothic" pitchFamily="34" charset="-120"/>
               </a:rPr>
               <a:t>無茶な運転・あおり運転的な挙動で無人車両に危険を生じさせた人間側ドライバーにも責任を課す</a:t>
             </a:r>
@@ -10284,11 +10284,11 @@
             </a:avLst>
           </a:prstGeom>
           <a:solidFill>
-            <a:srgbClr val="1A1A1A"/>
+            <a:srgbClr val="FFFFFF"/>
           </a:solidFill>
           <a:ln w="12700">
             <a:solidFill>
-              <a:srgbClr val="2E2E2E"/>
+              <a:srgbClr val="DDE0E6"/>
             </a:solidFill>
             <a:prstDash val="solid"/>
           </a:ln>
@@ -10331,8 +10331,8 @@
                   <a:srgbClr val="000000"/>
                 </a:solidFill>
                 <a:latin typeface="Arial" pitchFamily="34" charset="0"/>
-                <a:ea typeface="Arial" pitchFamily="34" charset="-122"/>
-                <a:cs typeface="Arial" pitchFamily="34" charset="-120"/>
+                <a:ea typeface="BIZ UDPGothic" pitchFamily="34" charset="-122"/>
+                <a:cs typeface="BIZ UDPGothic" pitchFamily="34" charset="-120"/>
               </a:rPr>
               <a:t>🔧</a:t>
             </a:r>
@@ -10370,11 +10370,11 @@
             <a:r>
               <a:rPr lang="en-US" sz="1400" b="1" dirty="0">
                 <a:solidFill>
-                  <a:srgbClr val="F5F5F0"/>
-                </a:solidFill>
-                <a:latin typeface="Noto Sans JP" pitchFamily="34" charset="0"/>
-                <a:ea typeface="Noto Sans JP" pitchFamily="34" charset="-122"/>
-                <a:cs typeface="Noto Sans JP" pitchFamily="34" charset="-120"/>
+                  <a:srgbClr val="16181D"/>
+                </a:solidFill>
+                <a:latin typeface="BIZ UDPGothic" pitchFamily="34" charset="0"/>
+                <a:ea typeface="BIZ UDPGothic" pitchFamily="34" charset="-122"/>
+                <a:cs typeface="BIZ UDPGothic" pitchFamily="34" charset="-120"/>
               </a:rPr>
               <a:t>誤動作の原因まで遡及</a:t>
             </a:r>
@@ -10412,11 +10412,11 @@
             <a:r>
               <a:rPr lang="en-US" sz="1150" dirty="0">
                 <a:solidFill>
-                  <a:srgbClr val="F5F5F0"/>
-                </a:solidFill>
-                <a:latin typeface="Noto Sans JP" pitchFamily="34" charset="0"/>
-                <a:ea typeface="Noto Sans JP" pitchFamily="34" charset="-122"/>
-                <a:cs typeface="Noto Sans JP" pitchFamily="34" charset="-120"/>
+                  <a:srgbClr val="16181D"/>
+                </a:solidFill>
+                <a:latin typeface="BIZ UDPGothic" pitchFamily="34" charset="0"/>
+                <a:ea typeface="BIZ UDPGothic" pitchFamily="34" charset="-122"/>
+                <a:cs typeface="BIZ UDPGothic" pitchFamily="34" charset="-120"/>
               </a:rPr>
               <a:t>センサー誤動作が事故を招いた場合、整備不良・製造欠陥等、誤動作そのものの原因まで責任を問う</a:t>
             </a:r>
@@ -10451,11 +10451,11 @@
             <a:r>
               <a:rPr lang="en-US" sz="1300" b="1" dirty="0">
                 <a:solidFill>
-                  <a:srgbClr val="D62828"/>
-                </a:solidFill>
-                <a:latin typeface="Noto Sans JP" pitchFamily="34" charset="0"/>
-                <a:ea typeface="Noto Sans JP" pitchFamily="34" charset="-122"/>
-                <a:cs typeface="Noto Sans JP" pitchFamily="34" charset="-120"/>
+                  <a:srgbClr val="C8161D"/>
+                </a:solidFill>
+                <a:latin typeface="BIZ UDPGothic" pitchFamily="34" charset="0"/>
+                <a:ea typeface="BIZ UDPGothic" pitchFamily="34" charset="-122"/>
+                <a:cs typeface="BIZ UDPGothic" pitchFamily="34" charset="-120"/>
               </a:rPr>
               <a:t>「無人車両だから誰も罰せられない」という抜け道を作らない</a:t>
             </a:r>
@@ -10490,13 +10490,13 @@
             <a:r>
               <a:rPr lang="en-US" sz="900" dirty="0">
                 <a:solidFill>
-                  <a:srgbClr val="F5F5F0">
+                  <a:srgbClr val="16181D">
                     <a:alpha val="45000"/>
                   </a:srgbClr>
                 </a:solidFill>
-                <a:latin typeface="Noto Sans JP" pitchFamily="34" charset="0"/>
-                <a:ea typeface="Noto Sans JP" pitchFamily="34" charset="-122"/>
-                <a:cs typeface="Noto Sans JP" pitchFamily="34" charset="-120"/>
+                <a:latin typeface="BIZ UDPGothic" pitchFamily="34" charset="0"/>
+                <a:ea typeface="BIZ UDPGothic" pitchFamily="34" charset="-122"/>
+                <a:cs typeface="BIZ UDPGothic" pitchFamily="34" charset="-120"/>
               </a:rPr>
               <a:t>REBOOT JAPAN ── 市民による政策提言プラットフォーム</a:t>
             </a:r>
@@ -10531,13 +10531,13 @@
             <a:r>
               <a:rPr lang="en-US" sz="900" dirty="0">
                 <a:solidFill>
-                  <a:srgbClr val="F5F5F0">
+                  <a:srgbClr val="16181D">
                     <a:alpha val="45000"/>
                   </a:srgbClr>
                 </a:solidFill>
-                <a:latin typeface="Noto Sans JP" pitchFamily="34" charset="0"/>
-                <a:ea typeface="Noto Sans JP" pitchFamily="34" charset="-122"/>
-                <a:cs typeface="Noto Sans JP" pitchFamily="34" charset="-120"/>
+                <a:latin typeface="BIZ UDPGothic" pitchFamily="34" charset="0"/>
+                <a:ea typeface="BIZ UDPGothic" pitchFamily="34" charset="-122"/>
+                <a:cs typeface="BIZ UDPGothic" pitchFamily="34" charset="-120"/>
               </a:rPr>
               <a:t>22</a:t>
             </a:r>
@@ -10559,7 +10559,7 @@
     <p:bg>
       <p:bgPr>
         <a:solidFill>
-          <a:srgbClr val="0A0A0A"/>
+          <a:srgbClr val="F5F6F8"/>
         </a:solidFill>
       </p:bgPr>
     </p:bg>
@@ -10604,11 +10604,11 @@
             <a:r>
               <a:rPr lang="en-US" sz="1200" b="1" spc="200" kern="0" dirty="0">
                 <a:solidFill>
-                  <a:srgbClr val="D62828"/>
+                  <a:srgbClr val="C8161D"/>
                 </a:solidFill>
                 <a:latin typeface="Arial" pitchFamily="34" charset="0"/>
-                <a:ea typeface="Arial" pitchFamily="34" charset="-122"/>
-                <a:cs typeface="Arial" pitchFamily="34" charset="-120"/>
+                <a:ea typeface="BIZ UDPGothic" pitchFamily="34" charset="-122"/>
+                <a:cs typeface="BIZ UDPGothic" pitchFamily="34" charset="-120"/>
               </a:rPr>
               <a:t>FINANCE</a:t>
             </a:r>
@@ -10643,11 +10643,11 @@
             <a:r>
               <a:rPr lang="en-US" sz="2500" b="1" dirty="0">
                 <a:solidFill>
-                  <a:srgbClr val="F5F5F0"/>
-                </a:solidFill>
-                <a:latin typeface="Noto Sans JP" pitchFamily="34" charset="0"/>
-                <a:ea typeface="Noto Sans JP" pitchFamily="34" charset="-122"/>
-                <a:cs typeface="Noto Sans JP" pitchFamily="34" charset="-120"/>
+                  <a:srgbClr val="16181D"/>
+                </a:solidFill>
+                <a:latin typeface="BIZ UDPGothic" pitchFamily="34" charset="0"/>
+                <a:ea typeface="BIZ UDPGothic" pitchFamily="34" charset="-122"/>
+                <a:cs typeface="BIZ UDPGothic" pitchFamily="34" charset="-120"/>
               </a:rPr>
               <a:t>現状の関連予算規模</a:t>
             </a:r>
@@ -10672,11 +10672,11 @@
             </a:avLst>
           </a:prstGeom>
           <a:solidFill>
-            <a:srgbClr val="1A1A1A"/>
+            <a:srgbClr val="FFFFFF"/>
           </a:solidFill>
           <a:ln w="12700">
             <a:solidFill>
-              <a:srgbClr val="2E2E2E"/>
+              <a:srgbClr val="DDE0E6"/>
             </a:solidFill>
             <a:prstDash val="solid"/>
           </a:ln>
@@ -10716,11 +10716,11 @@
             <a:r>
               <a:rPr lang="en-US" sz="3000" b="1" dirty="0">
                 <a:solidFill>
-                  <a:srgbClr val="D62828"/>
+                  <a:srgbClr val="C8161D"/>
                 </a:solidFill>
                 <a:latin typeface="Arial" pitchFamily="34" charset="0"/>
-                <a:ea typeface="Arial" pitchFamily="34" charset="-122"/>
-                <a:cs typeface="Arial" pitchFamily="34" charset="-120"/>
+                <a:ea typeface="BIZ UDPGothic" pitchFamily="34" charset="-122"/>
+                <a:cs typeface="BIZ UDPGothic" pitchFamily="34" charset="-120"/>
               </a:rPr>
               <a:t>331億円</a:t>
             </a:r>
@@ -10758,11 +10758,11 @@
             <a:r>
               <a:rPr lang="en-US" sz="1250" b="1" dirty="0">
                 <a:solidFill>
-                  <a:srgbClr val="F5F5F0"/>
-                </a:solidFill>
-                <a:latin typeface="Noto Sans JP" pitchFamily="34" charset="0"/>
-                <a:ea typeface="Noto Sans JP" pitchFamily="34" charset="-122"/>
-                <a:cs typeface="Noto Sans JP" pitchFamily="34" charset="-120"/>
+                  <a:srgbClr val="16181D"/>
+                </a:solidFill>
+                <a:latin typeface="BIZ UDPGothic" pitchFamily="34" charset="0"/>
+                <a:ea typeface="BIZ UDPGothic" pitchFamily="34" charset="-122"/>
+                <a:cs typeface="BIZ UDPGothic" pitchFamily="34" charset="-120"/>
               </a:rPr>
               <a:t>地域交通リ・デザイン全体（令和7年度）</a:t>
             </a:r>
@@ -10800,13 +10800,13 @@
             <a:r>
               <a:rPr lang="en-US" sz="950" dirty="0">
                 <a:solidFill>
-                  <a:srgbClr val="F5F5F0">
+                  <a:srgbClr val="16181D">
                     <a:alpha val="70000"/>
                   </a:srgbClr>
                 </a:solidFill>
-                <a:latin typeface="Noto Sans JP" pitchFamily="34" charset="0"/>
-                <a:ea typeface="Noto Sans JP" pitchFamily="34" charset="-122"/>
-                <a:cs typeface="Noto Sans JP" pitchFamily="34" charset="-120"/>
+                <a:latin typeface="BIZ UDPGothic" pitchFamily="34" charset="0"/>
+                <a:ea typeface="BIZ UDPGothic" pitchFamily="34" charset="-122"/>
+                <a:cs typeface="BIZ UDPGothic" pitchFamily="34" charset="-120"/>
               </a:rPr>
               <a:t>国土交通省。自動運転社会実装推進事業もこの内数</a:t>
             </a:r>
@@ -10831,11 +10831,11 @@
             </a:avLst>
           </a:prstGeom>
           <a:solidFill>
-            <a:srgbClr val="1A1A1A"/>
+            <a:srgbClr val="FFFFFF"/>
           </a:solidFill>
           <a:ln w="12700">
             <a:solidFill>
-              <a:srgbClr val="2E2E2E"/>
+              <a:srgbClr val="DDE0E6"/>
             </a:solidFill>
             <a:prstDash val="solid"/>
           </a:ln>
@@ -10875,11 +10875,11 @@
             <a:r>
               <a:rPr lang="en-US" sz="3000" b="1" dirty="0">
                 <a:solidFill>
-                  <a:srgbClr val="D62828"/>
+                  <a:srgbClr val="C8161D"/>
                 </a:solidFill>
                 <a:latin typeface="Arial" pitchFamily="34" charset="0"/>
-                <a:ea typeface="Arial" pitchFamily="34" charset="-122"/>
-                <a:cs typeface="Arial" pitchFamily="34" charset="-120"/>
+                <a:ea typeface="BIZ UDPGothic" pitchFamily="34" charset="-122"/>
+                <a:cs typeface="BIZ UDPGothic" pitchFamily="34" charset="-120"/>
               </a:rPr>
               <a:t>3.27億円</a:t>
             </a:r>
@@ -10917,11 +10917,11 @@
             <a:r>
               <a:rPr lang="en-US" sz="1250" b="1" dirty="0">
                 <a:solidFill>
-                  <a:srgbClr val="F5F5F0"/>
-                </a:solidFill>
-                <a:latin typeface="Noto Sans JP" pitchFamily="34" charset="0"/>
-                <a:ea typeface="Noto Sans JP" pitchFamily="34" charset="-122"/>
-                <a:cs typeface="Noto Sans JP" pitchFamily="34" charset="-120"/>
+                  <a:srgbClr val="16181D"/>
+                </a:solidFill>
+                <a:latin typeface="BIZ UDPGothic" pitchFamily="34" charset="0"/>
+                <a:ea typeface="BIZ UDPGothic" pitchFamily="34" charset="-122"/>
+                <a:cs typeface="BIZ UDPGothic" pitchFamily="34" charset="-120"/>
               </a:rPr>
               <a:t>自動運転トラック実証（令和8年度概算要求）</a:t>
             </a:r>
@@ -10959,13 +10959,13 @@
             <a:r>
               <a:rPr lang="en-US" sz="950" dirty="0">
                 <a:solidFill>
-                  <a:srgbClr val="F5F5F0">
+                  <a:srgbClr val="16181D">
                     <a:alpha val="70000"/>
                   </a:srgbClr>
                 </a:solidFill>
-                <a:latin typeface="Noto Sans JP" pitchFamily="34" charset="0"/>
-                <a:ea typeface="Noto Sans JP" pitchFamily="34" charset="-122"/>
-                <a:cs typeface="Noto Sans JP" pitchFamily="34" charset="-120"/>
+                <a:latin typeface="BIZ UDPGothic" pitchFamily="34" charset="0"/>
+                <a:ea typeface="BIZ UDPGothic" pitchFamily="34" charset="-122"/>
+                <a:cs typeface="BIZ UDPGothic" pitchFamily="34" charset="-120"/>
               </a:rPr>
               <a:t>前年度比約40倍。国土交通省 物流・自動車局</a:t>
             </a:r>
@@ -10990,11 +10990,11 @@
             </a:avLst>
           </a:prstGeom>
           <a:solidFill>
-            <a:srgbClr val="1A1A1A"/>
+            <a:srgbClr val="FFFFFF"/>
           </a:solidFill>
           <a:ln w="12700">
             <a:solidFill>
-              <a:srgbClr val="2E2E2E"/>
+              <a:srgbClr val="DDE0E6"/>
             </a:solidFill>
             <a:prstDash val="solid"/>
           </a:ln>
@@ -11034,11 +11034,11 @@
             <a:r>
               <a:rPr lang="en-US" sz="3000" b="1" dirty="0">
                 <a:solidFill>
-                  <a:srgbClr val="D62828"/>
+                  <a:srgbClr val="C8161D"/>
                 </a:solidFill>
                 <a:latin typeface="Arial" pitchFamily="34" charset="0"/>
-                <a:ea typeface="Arial" pitchFamily="34" charset="-122"/>
-                <a:cs typeface="Arial" pitchFamily="34" charset="-120"/>
+                <a:ea typeface="BIZ UDPGothic" pitchFamily="34" charset="-122"/>
+                <a:cs typeface="BIZ UDPGothic" pitchFamily="34" charset="-120"/>
               </a:rPr>
               <a:t>88%</a:t>
             </a:r>
@@ -11076,11 +11076,11 @@
             <a:r>
               <a:rPr lang="en-US" sz="1250" b="1" dirty="0">
                 <a:solidFill>
-                  <a:srgbClr val="F5F5F0"/>
-                </a:solidFill>
-                <a:latin typeface="Noto Sans JP" pitchFamily="34" charset="0"/>
-                <a:ea typeface="Noto Sans JP" pitchFamily="34" charset="-122"/>
-                <a:cs typeface="Noto Sans JP" pitchFamily="34" charset="-120"/>
+                  <a:srgbClr val="16181D"/>
+                </a:solidFill>
+                <a:latin typeface="BIZ UDPGothic" pitchFamily="34" charset="0"/>
+                <a:ea typeface="BIZ UDPGothic" pitchFamily="34" charset="-122"/>
+                <a:cs typeface="BIZ UDPGothic" pitchFamily="34" charset="-120"/>
               </a:rPr>
               <a:t>自動運転バス社会実装の国費補助率</a:t>
             </a:r>
@@ -11118,13 +11118,13 @@
             <a:r>
               <a:rPr lang="en-US" sz="950" dirty="0">
                 <a:solidFill>
-                  <a:srgbClr val="F5F5F0">
+                  <a:srgbClr val="16181D">
                     <a:alpha val="70000"/>
                   </a:srgbClr>
                 </a:solidFill>
-                <a:latin typeface="Noto Sans JP" pitchFamily="34" charset="0"/>
-                <a:ea typeface="Noto Sans JP" pitchFamily="34" charset="-122"/>
-                <a:cs typeface="Noto Sans JP" pitchFamily="34" charset="-120"/>
+                <a:latin typeface="BIZ UDPGothic" pitchFamily="34" charset="0"/>
+                <a:ea typeface="BIZ UDPGothic" pitchFamily="34" charset="-122"/>
+                <a:cs typeface="BIZ UDPGothic" pitchFamily="34" charset="-120"/>
               </a:rPr>
               <a:t>補助率4/5。財務省予算執行調査</a:t>
             </a:r>
@@ -11162,13 +11162,13 @@
             <a:r>
               <a:rPr lang="en-US" sz="1200" dirty="0">
                 <a:solidFill>
-                  <a:srgbClr val="F5F5F0">
+                  <a:srgbClr val="16181D">
                     <a:alpha val="85000"/>
                   </a:srgbClr>
                 </a:solidFill>
-                <a:latin typeface="Noto Sans JP" pitchFamily="34" charset="0"/>
-                <a:ea typeface="Noto Sans JP" pitchFamily="34" charset="-122"/>
-                <a:cs typeface="Noto Sans JP" pitchFamily="34" charset="-120"/>
+                <a:latin typeface="BIZ UDPGothic" pitchFamily="34" charset="0"/>
+                <a:ea typeface="BIZ UDPGothic" pitchFamily="34" charset="-122"/>
+                <a:cs typeface="BIZ UDPGothic" pitchFamily="34" charset="-120"/>
               </a:rPr>
               <a:t>現状、自動運転バスの社会実装はすでに事業財源の88%が国費補助という、ほぼ「補助金依存」の構造。本提言は補助金の“出どころ”を延命目的から業態転換投資目的へ付け替える設計である。</a:t>
             </a:r>
@@ -11203,13 +11203,13 @@
             <a:r>
               <a:rPr lang="en-US" sz="900" dirty="0">
                 <a:solidFill>
-                  <a:srgbClr val="F5F5F0">
+                  <a:srgbClr val="16181D">
                     <a:alpha val="45000"/>
                   </a:srgbClr>
                 </a:solidFill>
-                <a:latin typeface="Noto Sans JP" pitchFamily="34" charset="0"/>
-                <a:ea typeface="Noto Sans JP" pitchFamily="34" charset="-122"/>
-                <a:cs typeface="Noto Sans JP" pitchFamily="34" charset="-120"/>
+                <a:latin typeface="BIZ UDPGothic" pitchFamily="34" charset="0"/>
+                <a:ea typeface="BIZ UDPGothic" pitchFamily="34" charset="-122"/>
+                <a:cs typeface="BIZ UDPGothic" pitchFamily="34" charset="-120"/>
               </a:rPr>
               <a:t>REBOOT JAPAN ── 市民による政策提言プラットフォーム</a:t>
             </a:r>
@@ -11244,13 +11244,13 @@
             <a:r>
               <a:rPr lang="en-US" sz="900" dirty="0">
                 <a:solidFill>
-                  <a:srgbClr val="F5F5F0">
+                  <a:srgbClr val="16181D">
                     <a:alpha val="45000"/>
                   </a:srgbClr>
                 </a:solidFill>
-                <a:latin typeface="Noto Sans JP" pitchFamily="34" charset="0"/>
-                <a:ea typeface="Noto Sans JP" pitchFamily="34" charset="-122"/>
-                <a:cs typeface="Noto Sans JP" pitchFamily="34" charset="-120"/>
+                <a:latin typeface="BIZ UDPGothic" pitchFamily="34" charset="0"/>
+                <a:ea typeface="BIZ UDPGothic" pitchFamily="34" charset="-122"/>
+                <a:cs typeface="BIZ UDPGothic" pitchFamily="34" charset="-120"/>
               </a:rPr>
               <a:t>23</a:t>
             </a:r>
@@ -11272,7 +11272,7 @@
     <p:bg>
       <p:bgPr>
         <a:solidFill>
-          <a:srgbClr val="0A0A0A"/>
+          <a:srgbClr val="F5F6F8"/>
         </a:solidFill>
       </p:bgPr>
     </p:bg>
@@ -11317,11 +11317,11 @@
             <a:r>
               <a:rPr lang="en-US" sz="1200" b="1" spc="200" kern="0" dirty="0">
                 <a:solidFill>
-                  <a:srgbClr val="D62828"/>
+                  <a:srgbClr val="C8161D"/>
                 </a:solidFill>
                 <a:latin typeface="Arial" pitchFamily="34" charset="0"/>
-                <a:ea typeface="Arial" pitchFamily="34" charset="-122"/>
-                <a:cs typeface="Arial" pitchFamily="34" charset="-120"/>
+                <a:ea typeface="BIZ UDPGothic" pitchFamily="34" charset="-122"/>
+                <a:cs typeface="BIZ UDPGothic" pitchFamily="34" charset="-120"/>
               </a:rPr>
               <a:t>FINANCE — DETAIL</a:t>
             </a:r>
@@ -11356,11 +11356,11 @@
             <a:r>
               <a:rPr lang="en-US" sz="2100" b="1" dirty="0">
                 <a:solidFill>
-                  <a:srgbClr val="F5F5F0"/>
-                </a:solidFill>
-                <a:latin typeface="Noto Sans JP" pitchFamily="34" charset="0"/>
-                <a:ea typeface="Noto Sans JP" pitchFamily="34" charset="-122"/>
-                <a:cs typeface="Noto Sans JP" pitchFamily="34" charset="-120"/>
+                  <a:srgbClr val="16181D"/>
+                </a:solidFill>
+                <a:latin typeface="BIZ UDPGothic" pitchFamily="34" charset="0"/>
+                <a:ea typeface="BIZ UDPGothic" pitchFamily="34" charset="-122"/>
+                <a:cs typeface="BIZ UDPGothic" pitchFamily="34" charset="-120"/>
               </a:rPr>
               <a:t>初年度：小規模スタートの積み上げ試算</a:t>
             </a:r>
@@ -11395,11 +11395,11 @@
             <a:r>
               <a:rPr lang="en-US" sz="1350" b="1" dirty="0">
                 <a:solidFill>
-                  <a:srgbClr val="D62828"/>
-                </a:solidFill>
-                <a:latin typeface="Noto Sans JP" pitchFamily="34" charset="0"/>
-                <a:ea typeface="Noto Sans JP" pitchFamily="34" charset="-122"/>
-                <a:cs typeface="Noto Sans JP" pitchFamily="34" charset="-120"/>
+                  <a:srgbClr val="C8161D"/>
+                </a:solidFill>
+                <a:latin typeface="BIZ UDPGothic" pitchFamily="34" charset="0"/>
+                <a:ea typeface="BIZ UDPGothic" pitchFamily="34" charset="-122"/>
+                <a:cs typeface="BIZ UDPGothic" pitchFamily="34" charset="-120"/>
               </a:rPr>
               <a:t>前提：5都道府県 × 各10台前後（計50台）</a:t>
             </a:r>
@@ -11446,25 +11446,25 @@
                       <a:r>
                         <a:rPr lang="en-US" sz="1250" b="1" dirty="0">
                           <a:solidFill>
-                            <a:srgbClr val="F5F5F0"/>
+                            <a:srgbClr val="16181D"/>
                           </a:solidFill>
-                          <a:latin typeface="Noto Sans JP" pitchFamily="34" charset="0"/>
-                          <a:ea typeface="Noto Sans JP" pitchFamily="34" charset="-122"/>
-                          <a:cs typeface="Noto Sans JP" pitchFamily="34" charset="-120"/>
+                          <a:latin typeface="BIZ UDPGothic" pitchFamily="34" charset="0"/>
+                          <a:ea typeface="BIZ UDPGothic" pitchFamily="34" charset="-122"/>
+                          <a:cs typeface="BIZ UDPGothic" pitchFamily="34" charset="-120"/>
                         </a:rPr>
                         <a:t>項目</a:t>
                       </a:r>
                       <a:endParaRPr lang="en-US" sz="1250" dirty="0">
-                        <a:latin typeface="Noto Sans JP" charset="0"/>
-                        <a:ea typeface="Noto Sans JP" charset="0"/>
-                        <a:cs typeface="Noto Sans JP" charset="0"/>
+                        <a:latin typeface="BIZ UDPGothic" charset="0"/>
+                        <a:ea typeface="BIZ UDPGothic" charset="0"/>
+                        <a:cs typeface="BIZ UDPGothic" charset="0"/>
                       </a:endParaRPr>
                     </a:p>
                   </a:txBody>
                   <a:tcPr marL="91440" marR="91440" marT="45720" marB="45720" anchor="ctr">
                     <a:lnL w="12700" cap="flat" cmpd="sng" algn="ctr">
                       <a:solidFill>
-                        <a:srgbClr val="2E2E2E"/>
+                        <a:srgbClr val="DDE0E6"/>
                       </a:solidFill>
                       <a:prstDash val="solid"/>
                       <a:round/>
@@ -11473,7 +11473,7 @@
                     </a:lnL>
                     <a:lnR w="12700" cap="flat" cmpd="sng" algn="ctr">
                       <a:solidFill>
-                        <a:srgbClr val="2E2E2E"/>
+                        <a:srgbClr val="DDE0E6"/>
                       </a:solidFill>
                       <a:prstDash val="solid"/>
                       <a:round/>
@@ -11482,7 +11482,7 @@
                     </a:lnR>
                     <a:lnT w="12700" cap="flat" cmpd="sng" algn="ctr">
                       <a:solidFill>
-                        <a:srgbClr val="2E2E2E"/>
+                        <a:srgbClr val="DDE0E6"/>
                       </a:solidFill>
                       <a:prstDash val="solid"/>
                       <a:round/>
@@ -11491,7 +11491,7 @@
                     </a:lnT>
                     <a:lnB w="12700" cap="flat" cmpd="sng" algn="ctr">
                       <a:solidFill>
-                        <a:srgbClr val="2E2E2E"/>
+                        <a:srgbClr val="DDE0E6"/>
                       </a:solidFill>
                       <a:prstDash val="solid"/>
                       <a:round/>
@@ -11499,7 +11499,7 @@
                       <a:tailEnd type="none" w="med" len="med"/>
                     </a:lnB>
                     <a:solidFill>
-                      <a:srgbClr val="2E2E2E"/>
+                      <a:srgbClr val="DDE0E6"/>
                     </a:solidFill>
                   </a:tcPr>
                 </a:tc>
@@ -11514,25 +11514,25 @@
                       <a:r>
                         <a:rPr lang="en-US" sz="1250" b="1" dirty="0">
                           <a:solidFill>
-                            <a:srgbClr val="F5F5F0"/>
+                            <a:srgbClr val="16181D"/>
                           </a:solidFill>
-                          <a:latin typeface="Noto Sans JP" pitchFamily="34" charset="0"/>
-                          <a:ea typeface="Noto Sans JP" pitchFamily="34" charset="-122"/>
-                          <a:cs typeface="Noto Sans JP" pitchFamily="34" charset="-120"/>
+                          <a:latin typeface="BIZ UDPGothic" pitchFamily="34" charset="0"/>
+                          <a:ea typeface="BIZ UDPGothic" pitchFamily="34" charset="-122"/>
+                          <a:cs typeface="BIZ UDPGothic" pitchFamily="34" charset="-120"/>
                         </a:rPr>
                         <a:t>単価</a:t>
                       </a:r>
                       <a:endParaRPr lang="en-US" sz="1250" dirty="0">
-                        <a:latin typeface="Noto Sans JP" charset="0"/>
-                        <a:ea typeface="Noto Sans JP" charset="0"/>
-                        <a:cs typeface="Noto Sans JP" charset="0"/>
+                        <a:latin typeface="BIZ UDPGothic" charset="0"/>
+                        <a:ea typeface="BIZ UDPGothic" charset="0"/>
+                        <a:cs typeface="BIZ UDPGothic" charset="0"/>
                       </a:endParaRPr>
                     </a:p>
                   </a:txBody>
                   <a:tcPr marL="91440" marR="91440" marT="45720" marB="45720" anchor="ctr">
                     <a:lnL w="12700" cap="flat" cmpd="sng" algn="ctr">
                       <a:solidFill>
-                        <a:srgbClr val="2E2E2E"/>
+                        <a:srgbClr val="DDE0E6"/>
                       </a:solidFill>
                       <a:prstDash val="solid"/>
                       <a:round/>
@@ -11541,7 +11541,7 @@
                     </a:lnL>
                     <a:lnR w="12700" cap="flat" cmpd="sng" algn="ctr">
                       <a:solidFill>
-                        <a:srgbClr val="2E2E2E"/>
+                        <a:srgbClr val="DDE0E6"/>
                       </a:solidFill>
                       <a:prstDash val="solid"/>
                       <a:round/>
@@ -11550,7 +11550,7 @@
                     </a:lnR>
                     <a:lnT w="12700" cap="flat" cmpd="sng" algn="ctr">
                       <a:solidFill>
-                        <a:srgbClr val="2E2E2E"/>
+                        <a:srgbClr val="DDE0E6"/>
                       </a:solidFill>
                       <a:prstDash val="solid"/>
                       <a:round/>
@@ -11559,7 +11559,7 @@
                     </a:lnT>
                     <a:lnB w="12700" cap="flat" cmpd="sng" algn="ctr">
                       <a:solidFill>
-                        <a:srgbClr val="2E2E2E"/>
+                        <a:srgbClr val="DDE0E6"/>
                       </a:solidFill>
                       <a:prstDash val="solid"/>
                       <a:round/>
@@ -11567,7 +11567,7 @@
                       <a:tailEnd type="none" w="med" len="med"/>
                     </a:lnB>
                     <a:solidFill>
-                      <a:srgbClr val="2E2E2E"/>
+                      <a:srgbClr val="DDE0E6"/>
                     </a:solidFill>
                   </a:tcPr>
                 </a:tc>
@@ -11582,25 +11582,25 @@
                       <a:r>
                         <a:rPr lang="en-US" sz="1250" b="1" dirty="0">
                           <a:solidFill>
-                            <a:srgbClr val="F5F5F0"/>
+                            <a:srgbClr val="16181D"/>
                           </a:solidFill>
-                          <a:latin typeface="Noto Sans JP" pitchFamily="34" charset="0"/>
-                          <a:ea typeface="Noto Sans JP" pitchFamily="34" charset="-122"/>
-                          <a:cs typeface="Noto Sans JP" pitchFamily="34" charset="-120"/>
+                          <a:latin typeface="BIZ UDPGothic" pitchFamily="34" charset="0"/>
+                          <a:ea typeface="BIZ UDPGothic" pitchFamily="34" charset="-122"/>
+                          <a:cs typeface="BIZ UDPGothic" pitchFamily="34" charset="-120"/>
                         </a:rPr>
                         <a:t>金額</a:t>
                       </a:r>
                       <a:endParaRPr lang="en-US" sz="1250" dirty="0">
-                        <a:latin typeface="Noto Sans JP" charset="0"/>
-                        <a:ea typeface="Noto Sans JP" charset="0"/>
-                        <a:cs typeface="Noto Sans JP" charset="0"/>
+                        <a:latin typeface="BIZ UDPGothic" charset="0"/>
+                        <a:ea typeface="BIZ UDPGothic" charset="0"/>
+                        <a:cs typeface="BIZ UDPGothic" charset="0"/>
                       </a:endParaRPr>
                     </a:p>
                   </a:txBody>
                   <a:tcPr marL="91440" marR="91440" marT="45720" marB="45720" anchor="ctr">
                     <a:lnL w="12700" cap="flat" cmpd="sng" algn="ctr">
                       <a:solidFill>
-                        <a:srgbClr val="2E2E2E"/>
+                        <a:srgbClr val="DDE0E6"/>
                       </a:solidFill>
                       <a:prstDash val="solid"/>
                       <a:round/>
@@ -11609,7 +11609,7 @@
                     </a:lnL>
                     <a:lnR w="12700" cap="flat" cmpd="sng" algn="ctr">
                       <a:solidFill>
-                        <a:srgbClr val="2E2E2E"/>
+                        <a:srgbClr val="DDE0E6"/>
                       </a:solidFill>
                       <a:prstDash val="solid"/>
                       <a:round/>
@@ -11618,7 +11618,7 @@
                     </a:lnR>
                     <a:lnT w="12700" cap="flat" cmpd="sng" algn="ctr">
                       <a:solidFill>
-                        <a:srgbClr val="2E2E2E"/>
+                        <a:srgbClr val="DDE0E6"/>
                       </a:solidFill>
                       <a:prstDash val="solid"/>
                       <a:round/>
@@ -11627,7 +11627,7 @@
                     </a:lnT>
                     <a:lnB w="12700" cap="flat" cmpd="sng" algn="ctr">
                       <a:solidFill>
-                        <a:srgbClr val="2E2E2E"/>
+                        <a:srgbClr val="DDE0E6"/>
                       </a:solidFill>
                       <a:prstDash val="solid"/>
                       <a:round/>
@@ -11635,7 +11635,7 @@
                       <a:tailEnd type="none" w="med" len="med"/>
                     </a:lnB>
                     <a:solidFill>
-                      <a:srgbClr val="2E2E2E"/>
+                      <a:srgbClr val="DDE0E6"/>
                     </a:solidFill>
                   </a:tcPr>
                 </a:tc>
@@ -11652,25 +11652,25 @@
                       <a:r>
                         <a:rPr lang="en-US" sz="1250" dirty="0">
                           <a:solidFill>
-                            <a:srgbClr val="F5F5F0"/>
+                            <a:srgbClr val="16181D"/>
                           </a:solidFill>
-                          <a:latin typeface="Noto Sans JP" pitchFamily="34" charset="0"/>
-                          <a:ea typeface="Noto Sans JP" pitchFamily="34" charset="-122"/>
-                          <a:cs typeface="Noto Sans JP" pitchFamily="34" charset="-120"/>
+                          <a:latin typeface="BIZ UDPGothic" pitchFamily="34" charset="0"/>
+                          <a:ea typeface="BIZ UDPGothic" pitchFamily="34" charset="-122"/>
+                          <a:cs typeface="BIZ UDPGothic" pitchFamily="34" charset="-120"/>
                         </a:rPr>
                         <a:t>車両購入・改造費</a:t>
                       </a:r>
                       <a:endParaRPr lang="en-US" sz="1250" dirty="0">
-                        <a:latin typeface="Noto Sans JP" charset="0"/>
-                        <a:ea typeface="Noto Sans JP" charset="0"/>
-                        <a:cs typeface="Noto Sans JP" charset="0"/>
+                        <a:latin typeface="BIZ UDPGothic" charset="0"/>
+                        <a:ea typeface="BIZ UDPGothic" charset="0"/>
+                        <a:cs typeface="BIZ UDPGothic" charset="0"/>
                       </a:endParaRPr>
                     </a:p>
                   </a:txBody>
                   <a:tcPr marL="91440" marR="91440" marT="45720" marB="45720" anchor="ctr">
                     <a:lnL w="12700" cap="flat" cmpd="sng" algn="ctr">
                       <a:solidFill>
-                        <a:srgbClr val="2E2E2E"/>
+                        <a:srgbClr val="DDE0E6"/>
                       </a:solidFill>
                       <a:prstDash val="solid"/>
                       <a:round/>
@@ -11679,7 +11679,7 @@
                     </a:lnL>
                     <a:lnR w="12700" cap="flat" cmpd="sng" algn="ctr">
                       <a:solidFill>
-                        <a:srgbClr val="2E2E2E"/>
+                        <a:srgbClr val="DDE0E6"/>
                       </a:solidFill>
                       <a:prstDash val="solid"/>
                       <a:round/>
@@ -11688,7 +11688,7 @@
                     </a:lnR>
                     <a:lnT w="12700" cap="flat" cmpd="sng" algn="ctr">
                       <a:solidFill>
-                        <a:srgbClr val="2E2E2E"/>
+                        <a:srgbClr val="DDE0E6"/>
                       </a:solidFill>
                       <a:prstDash val="solid"/>
                       <a:round/>
@@ -11697,7 +11697,7 @@
                     </a:lnT>
                     <a:lnB w="12700" cap="flat" cmpd="sng" algn="ctr">
                       <a:solidFill>
-                        <a:srgbClr val="2E2E2E"/>
+                        <a:srgbClr val="DDE0E6"/>
                       </a:solidFill>
                       <a:prstDash val="solid"/>
                       <a:round/>
@@ -11705,7 +11705,7 @@
                       <a:tailEnd type="none" w="med" len="med"/>
                     </a:lnB>
                     <a:solidFill>
-                      <a:srgbClr val="1A1A1A"/>
+                      <a:srgbClr val="FFFFFF"/>
                     </a:solidFill>
                   </a:tcPr>
                 </a:tc>
@@ -11720,25 +11720,25 @@
                       <a:r>
                         <a:rPr lang="en-US" sz="1250" dirty="0">
                           <a:solidFill>
-                            <a:srgbClr val="F5F5F0"/>
+                            <a:srgbClr val="16181D"/>
                           </a:solidFill>
-                          <a:latin typeface="Noto Sans JP" pitchFamily="34" charset="0"/>
-                          <a:ea typeface="Noto Sans JP" pitchFamily="34" charset="-122"/>
-                          <a:cs typeface="Noto Sans JP" pitchFamily="34" charset="-120"/>
+                          <a:latin typeface="BIZ UDPGothic" pitchFamily="34" charset="0"/>
+                          <a:ea typeface="BIZ UDPGothic" pitchFamily="34" charset="-122"/>
+                          <a:cs typeface="BIZ UDPGothic" pitchFamily="34" charset="-120"/>
                         </a:rPr>
                         <a:t>5,500万〜1.1億円/台</a:t>
                       </a:r>
                       <a:endParaRPr lang="en-US" sz="1250" dirty="0">
-                        <a:latin typeface="Noto Sans JP" charset="0"/>
-                        <a:ea typeface="Noto Sans JP" charset="0"/>
-                        <a:cs typeface="Noto Sans JP" charset="0"/>
+                        <a:latin typeface="BIZ UDPGothic" charset="0"/>
+                        <a:ea typeface="BIZ UDPGothic" charset="0"/>
+                        <a:cs typeface="BIZ UDPGothic" charset="0"/>
                       </a:endParaRPr>
                     </a:p>
                   </a:txBody>
                   <a:tcPr marL="91440" marR="91440" marT="45720" marB="45720" anchor="ctr">
                     <a:lnL w="12700" cap="flat" cmpd="sng" algn="ctr">
                       <a:solidFill>
-                        <a:srgbClr val="2E2E2E"/>
+                        <a:srgbClr val="DDE0E6"/>
                       </a:solidFill>
                       <a:prstDash val="solid"/>
                       <a:round/>
@@ -11747,7 +11747,7 @@
                     </a:lnL>
                     <a:lnR w="12700" cap="flat" cmpd="sng" algn="ctr">
                       <a:solidFill>
-                        <a:srgbClr val="2E2E2E"/>
+                        <a:srgbClr val="DDE0E6"/>
                       </a:solidFill>
                       <a:prstDash val="solid"/>
                       <a:round/>
@@ -11756,7 +11756,7 @@
                     </a:lnR>
                     <a:lnT w="12700" cap="flat" cmpd="sng" algn="ctr">
                       <a:solidFill>
-                        <a:srgbClr val="2E2E2E"/>
+                        <a:srgbClr val="DDE0E6"/>
                       </a:solidFill>
                       <a:prstDash val="solid"/>
                       <a:round/>
@@ -11765,7 +11765,7 @@
                     </a:lnT>
                     <a:lnB w="12700" cap="flat" cmpd="sng" algn="ctr">
                       <a:solidFill>
-                        <a:srgbClr val="2E2E2E"/>
+                        <a:srgbClr val="DDE0E6"/>
                       </a:solidFill>
                       <a:prstDash val="solid"/>
                       <a:round/>
@@ -11773,7 +11773,7 @@
                       <a:tailEnd type="none" w="med" len="med"/>
                     </a:lnB>
                     <a:solidFill>
-                      <a:srgbClr val="1A1A1A"/>
+                      <a:srgbClr val="FFFFFF"/>
                     </a:solidFill>
                   </a:tcPr>
                 </a:tc>
@@ -11788,25 +11788,25 @@
                       <a:r>
                         <a:rPr lang="en-US" sz="1250" dirty="0">
                           <a:solidFill>
-                            <a:srgbClr val="F5F5F0"/>
+                            <a:srgbClr val="16181D"/>
                           </a:solidFill>
-                          <a:latin typeface="Noto Sans JP" pitchFamily="34" charset="0"/>
-                          <a:ea typeface="Noto Sans JP" pitchFamily="34" charset="-122"/>
-                          <a:cs typeface="Noto Sans JP" pitchFamily="34" charset="-120"/>
+                          <a:latin typeface="BIZ UDPGothic" pitchFamily="34" charset="0"/>
+                          <a:ea typeface="BIZ UDPGothic" pitchFamily="34" charset="-122"/>
+                          <a:cs typeface="BIZ UDPGothic" pitchFamily="34" charset="-120"/>
                         </a:rPr>
                         <a:t>27.5億〜55億円</a:t>
                       </a:r>
                       <a:endParaRPr lang="en-US" sz="1250" dirty="0">
-                        <a:latin typeface="Noto Sans JP" charset="0"/>
-                        <a:ea typeface="Noto Sans JP" charset="0"/>
-                        <a:cs typeface="Noto Sans JP" charset="0"/>
+                        <a:latin typeface="BIZ UDPGothic" charset="0"/>
+                        <a:ea typeface="BIZ UDPGothic" charset="0"/>
+                        <a:cs typeface="BIZ UDPGothic" charset="0"/>
                       </a:endParaRPr>
                     </a:p>
                   </a:txBody>
                   <a:tcPr marL="91440" marR="91440" marT="45720" marB="45720" anchor="ctr">
                     <a:lnL w="12700" cap="flat" cmpd="sng" algn="ctr">
                       <a:solidFill>
-                        <a:srgbClr val="2E2E2E"/>
+                        <a:srgbClr val="DDE0E6"/>
                       </a:solidFill>
                       <a:prstDash val="solid"/>
                       <a:round/>
@@ -11815,7 +11815,7 @@
                     </a:lnL>
                     <a:lnR w="12700" cap="flat" cmpd="sng" algn="ctr">
                       <a:solidFill>
-                        <a:srgbClr val="2E2E2E"/>
+                        <a:srgbClr val="DDE0E6"/>
                       </a:solidFill>
                       <a:prstDash val="solid"/>
                       <a:round/>
@@ -11824,7 +11824,7 @@
                     </a:lnR>
                     <a:lnT w="12700" cap="flat" cmpd="sng" algn="ctr">
                       <a:solidFill>
-                        <a:srgbClr val="2E2E2E"/>
+                        <a:srgbClr val="DDE0E6"/>
                       </a:solidFill>
                       <a:prstDash val="solid"/>
                       <a:round/>
@@ -11833,7 +11833,7 @@
                     </a:lnT>
                     <a:lnB w="12700" cap="flat" cmpd="sng" algn="ctr">
                       <a:solidFill>
-                        <a:srgbClr val="2E2E2E"/>
+                        <a:srgbClr val="DDE0E6"/>
                       </a:solidFill>
                       <a:prstDash val="solid"/>
                       <a:round/>
@@ -11841,7 +11841,7 @@
                       <a:tailEnd type="none" w="med" len="med"/>
                     </a:lnB>
                     <a:solidFill>
-                      <a:srgbClr val="1A1A1A"/>
+                      <a:srgbClr val="FFFFFF"/>
                     </a:solidFill>
                   </a:tcPr>
                 </a:tc>
@@ -11858,25 +11858,25 @@
                       <a:r>
                         <a:rPr lang="en-US" sz="1250" dirty="0">
                           <a:solidFill>
-                            <a:srgbClr val="F5F5F0"/>
+                            <a:srgbClr val="16181D"/>
                           </a:solidFill>
-                          <a:latin typeface="Noto Sans JP" pitchFamily="34" charset="0"/>
-                          <a:ea typeface="Noto Sans JP" pitchFamily="34" charset="-122"/>
-                          <a:cs typeface="Noto Sans JP" pitchFamily="34" charset="-120"/>
+                          <a:latin typeface="BIZ UDPGothic" pitchFamily="34" charset="0"/>
+                          <a:ea typeface="BIZ UDPGothic" pitchFamily="34" charset="-122"/>
+                          <a:cs typeface="BIZ UDPGothic" pitchFamily="34" charset="-120"/>
                         </a:rPr>
                         <a:t>3Dマップ・走行ルート整備</a:t>
                       </a:r>
                       <a:endParaRPr lang="en-US" sz="1250" dirty="0">
-                        <a:latin typeface="Noto Sans JP" charset="0"/>
-                        <a:ea typeface="Noto Sans JP" charset="0"/>
-                        <a:cs typeface="Noto Sans JP" charset="0"/>
+                        <a:latin typeface="BIZ UDPGothic" charset="0"/>
+                        <a:ea typeface="BIZ UDPGothic" charset="0"/>
+                        <a:cs typeface="BIZ UDPGothic" charset="0"/>
                       </a:endParaRPr>
                     </a:p>
                   </a:txBody>
                   <a:tcPr marL="91440" marR="91440" marT="45720" marB="45720" anchor="ctr">
                     <a:lnL w="12700" cap="flat" cmpd="sng" algn="ctr">
                       <a:solidFill>
-                        <a:srgbClr val="2E2E2E"/>
+                        <a:srgbClr val="DDE0E6"/>
                       </a:solidFill>
                       <a:prstDash val="solid"/>
                       <a:round/>
@@ -11885,7 +11885,7 @@
                     </a:lnL>
                     <a:lnR w="12700" cap="flat" cmpd="sng" algn="ctr">
                       <a:solidFill>
-                        <a:srgbClr val="2E2E2E"/>
+                        <a:srgbClr val="DDE0E6"/>
                       </a:solidFill>
                       <a:prstDash val="solid"/>
                       <a:round/>
@@ -11894,7 +11894,7 @@
                     </a:lnR>
                     <a:lnT w="12700" cap="flat" cmpd="sng" algn="ctr">
                       <a:solidFill>
-                        <a:srgbClr val="2E2E2E"/>
+                        <a:srgbClr val="DDE0E6"/>
                       </a:solidFill>
                       <a:prstDash val="solid"/>
                       <a:round/>
@@ -11903,7 +11903,7 @@
                     </a:lnT>
                     <a:lnB w="12700" cap="flat" cmpd="sng" algn="ctr">
                       <a:solidFill>
-                        <a:srgbClr val="2E2E2E"/>
+                        <a:srgbClr val="DDE0E6"/>
                       </a:solidFill>
                       <a:prstDash val="solid"/>
                       <a:round/>
@@ -11911,7 +11911,7 @@
                       <a:tailEnd type="none" w="med" len="med"/>
                     </a:lnB>
                     <a:solidFill>
-                      <a:srgbClr val="1A1A1A"/>
+                      <a:srgbClr val="FFFFFF"/>
                     </a:solidFill>
                   </a:tcPr>
                 </a:tc>
@@ -11926,25 +11926,25 @@
                       <a:r>
                         <a:rPr lang="en-US" sz="1250" dirty="0">
                           <a:solidFill>
-                            <a:srgbClr val="F5F5F0"/>
+                            <a:srgbClr val="16181D"/>
                           </a:solidFill>
-                          <a:latin typeface="Noto Sans JP" pitchFamily="34" charset="0"/>
-                          <a:ea typeface="Noto Sans JP" pitchFamily="34" charset="-122"/>
-                          <a:cs typeface="Noto Sans JP" pitchFamily="34" charset="-120"/>
+                          <a:latin typeface="BIZ UDPGothic" pitchFamily="34" charset="0"/>
+                          <a:ea typeface="BIZ UDPGothic" pitchFamily="34" charset="-122"/>
+                          <a:cs typeface="BIZ UDPGothic" pitchFamily="34" charset="-120"/>
                         </a:rPr>
                         <a:t>1,000万〜2,000万円/路線</a:t>
                       </a:r>
                       <a:endParaRPr lang="en-US" sz="1250" dirty="0">
-                        <a:latin typeface="Noto Sans JP" charset="0"/>
-                        <a:ea typeface="Noto Sans JP" charset="0"/>
-                        <a:cs typeface="Noto Sans JP" charset="0"/>
+                        <a:latin typeface="BIZ UDPGothic" charset="0"/>
+                        <a:ea typeface="BIZ UDPGothic" charset="0"/>
+                        <a:cs typeface="BIZ UDPGothic" charset="0"/>
                       </a:endParaRPr>
                     </a:p>
                   </a:txBody>
                   <a:tcPr marL="91440" marR="91440" marT="45720" marB="45720" anchor="ctr">
                     <a:lnL w="12700" cap="flat" cmpd="sng" algn="ctr">
                       <a:solidFill>
-                        <a:srgbClr val="2E2E2E"/>
+                        <a:srgbClr val="DDE0E6"/>
                       </a:solidFill>
                       <a:prstDash val="solid"/>
                       <a:round/>
@@ -11953,7 +11953,7 @@
                     </a:lnL>
                     <a:lnR w="12700" cap="flat" cmpd="sng" algn="ctr">
                       <a:solidFill>
-                        <a:srgbClr val="2E2E2E"/>
+                        <a:srgbClr val="DDE0E6"/>
                       </a:solidFill>
                       <a:prstDash val="solid"/>
                       <a:round/>
@@ -11962,7 +11962,7 @@
                     </a:lnR>
                     <a:lnT w="12700" cap="flat" cmpd="sng" algn="ctr">
                       <a:solidFill>
-                        <a:srgbClr val="2E2E2E"/>
+                        <a:srgbClr val="DDE0E6"/>
                       </a:solidFill>
                       <a:prstDash val="solid"/>
                       <a:round/>
@@ -11971,7 +11971,7 @@
                     </a:lnT>
                     <a:lnB w="12700" cap="flat" cmpd="sng" algn="ctr">
                       <a:solidFill>
-                        <a:srgbClr val="2E2E2E"/>
+                        <a:srgbClr val="DDE0E6"/>
                       </a:solidFill>
                       <a:prstDash val="solid"/>
                       <a:round/>
@@ -11979,7 +11979,7 @@
                       <a:tailEnd type="none" w="med" len="med"/>
                     </a:lnB>
                     <a:solidFill>
-                      <a:srgbClr val="1A1A1A"/>
+                      <a:srgbClr val="FFFFFF"/>
                     </a:solidFill>
                   </a:tcPr>
                 </a:tc>
@@ -11994,25 +11994,25 @@
                       <a:r>
                         <a:rPr lang="en-US" sz="1250" dirty="0">
                           <a:solidFill>
-                            <a:srgbClr val="F5F5F0"/>
+                            <a:srgbClr val="16181D"/>
                           </a:solidFill>
-                          <a:latin typeface="Noto Sans JP" pitchFamily="34" charset="0"/>
-                          <a:ea typeface="Noto Sans JP" pitchFamily="34" charset="-122"/>
-                          <a:cs typeface="Noto Sans JP" pitchFamily="34" charset="-120"/>
+                          <a:latin typeface="BIZ UDPGothic" pitchFamily="34" charset="0"/>
+                          <a:ea typeface="BIZ UDPGothic" pitchFamily="34" charset="-122"/>
+                          <a:cs typeface="BIZ UDPGothic" pitchFamily="34" charset="-120"/>
                         </a:rPr>
                         <a:t>1億〜2億円</a:t>
                       </a:r>
                       <a:endParaRPr lang="en-US" sz="1250" dirty="0">
-                        <a:latin typeface="Noto Sans JP" charset="0"/>
-                        <a:ea typeface="Noto Sans JP" charset="0"/>
-                        <a:cs typeface="Noto Sans JP" charset="0"/>
+                        <a:latin typeface="BIZ UDPGothic" charset="0"/>
+                        <a:ea typeface="BIZ UDPGothic" charset="0"/>
+                        <a:cs typeface="BIZ UDPGothic" charset="0"/>
                       </a:endParaRPr>
                     </a:p>
                   </a:txBody>
                   <a:tcPr marL="91440" marR="91440" marT="45720" marB="45720" anchor="ctr">
                     <a:lnL w="12700" cap="flat" cmpd="sng" algn="ctr">
                       <a:solidFill>
-                        <a:srgbClr val="2E2E2E"/>
+                        <a:srgbClr val="DDE0E6"/>
                       </a:solidFill>
                       <a:prstDash val="solid"/>
                       <a:round/>
@@ -12021,7 +12021,7 @@
                     </a:lnL>
                     <a:lnR w="12700" cap="flat" cmpd="sng" algn="ctr">
                       <a:solidFill>
-                        <a:srgbClr val="2E2E2E"/>
+                        <a:srgbClr val="DDE0E6"/>
                       </a:solidFill>
                       <a:prstDash val="solid"/>
                       <a:round/>
@@ -12030,7 +12030,7 @@
                     </a:lnR>
                     <a:lnT w="12700" cap="flat" cmpd="sng" algn="ctr">
                       <a:solidFill>
-                        <a:srgbClr val="2E2E2E"/>
+                        <a:srgbClr val="DDE0E6"/>
                       </a:solidFill>
                       <a:prstDash val="solid"/>
                       <a:round/>
@@ -12039,7 +12039,7 @@
                     </a:lnT>
                     <a:lnB w="12700" cap="flat" cmpd="sng" algn="ctr">
                       <a:solidFill>
-                        <a:srgbClr val="2E2E2E"/>
+                        <a:srgbClr val="DDE0E6"/>
                       </a:solidFill>
                       <a:prstDash val="solid"/>
                       <a:round/>
@@ -12047,7 +12047,7 @@
                       <a:tailEnd type="none" w="med" len="med"/>
                     </a:lnB>
                     <a:solidFill>
-                      <a:srgbClr val="1A1A1A"/>
+                      <a:srgbClr val="FFFFFF"/>
                     </a:solidFill>
                   </a:tcPr>
                 </a:tc>
@@ -12064,25 +12064,25 @@
                       <a:r>
                         <a:rPr lang="en-US" sz="1250" b="1" dirty="0">
                           <a:solidFill>
-                            <a:srgbClr val="D62828"/>
+                            <a:srgbClr val="C8161D"/>
                           </a:solidFill>
-                          <a:latin typeface="Noto Sans JP" pitchFamily="34" charset="0"/>
-                          <a:ea typeface="Noto Sans JP" pitchFamily="34" charset="-122"/>
-                          <a:cs typeface="Noto Sans JP" pitchFamily="34" charset="-120"/>
+                          <a:latin typeface="BIZ UDPGothic" pitchFamily="34" charset="0"/>
+                          <a:ea typeface="BIZ UDPGothic" pitchFamily="34" charset="-122"/>
+                          <a:cs typeface="BIZ UDPGothic" pitchFamily="34" charset="-120"/>
                         </a:rPr>
                         <a:t>初年度合計</a:t>
                       </a:r>
                       <a:endParaRPr lang="en-US" sz="1250" dirty="0">
-                        <a:latin typeface="Noto Sans JP" charset="0"/>
-                        <a:ea typeface="Noto Sans JP" charset="0"/>
-                        <a:cs typeface="Noto Sans JP" charset="0"/>
+                        <a:latin typeface="BIZ UDPGothic" charset="0"/>
+                        <a:ea typeface="BIZ UDPGothic" charset="0"/>
+                        <a:cs typeface="BIZ UDPGothic" charset="0"/>
                       </a:endParaRPr>
                     </a:p>
                   </a:txBody>
                   <a:tcPr marL="91440" marR="91440" marT="45720" marB="45720" anchor="ctr">
                     <a:lnL w="12700" cap="flat" cmpd="sng" algn="ctr">
                       <a:solidFill>
-                        <a:srgbClr val="2E2E2E"/>
+                        <a:srgbClr val="DDE0E6"/>
                       </a:solidFill>
                       <a:prstDash val="solid"/>
                       <a:round/>
@@ -12091,7 +12091,7 @@
                     </a:lnL>
                     <a:lnR w="12700" cap="flat" cmpd="sng" algn="ctr">
                       <a:solidFill>
-                        <a:srgbClr val="2E2E2E"/>
+                        <a:srgbClr val="DDE0E6"/>
                       </a:solidFill>
                       <a:prstDash val="solid"/>
                       <a:round/>
@@ -12100,7 +12100,7 @@
                     </a:lnR>
                     <a:lnT w="12700" cap="flat" cmpd="sng" algn="ctr">
                       <a:solidFill>
-                        <a:srgbClr val="2E2E2E"/>
+                        <a:srgbClr val="DDE0E6"/>
                       </a:solidFill>
                       <a:prstDash val="solid"/>
                       <a:round/>
@@ -12109,7 +12109,7 @@
                     </a:lnT>
                     <a:lnB w="12700" cap="flat" cmpd="sng" algn="ctr">
                       <a:solidFill>
-                        <a:srgbClr val="2E2E2E"/>
+                        <a:srgbClr val="DDE0E6"/>
                       </a:solidFill>
                       <a:prstDash val="solid"/>
                       <a:round/>
@@ -12117,7 +12117,7 @@
                       <a:tailEnd type="none" w="med" len="med"/>
                     </a:lnB>
                     <a:solidFill>
-                      <a:srgbClr val="1A1A1A"/>
+                      <a:srgbClr val="FFFFFF"/>
                     </a:solidFill>
                   </a:tcPr>
                 </a:tc>
@@ -12130,16 +12130,16 @@
                         <a:buNone/>
                       </a:pPr>
                       <a:endParaRPr lang="en-US" sz="1250" dirty="0">
-                        <a:latin typeface="Noto Sans JP" charset="0"/>
-                        <a:ea typeface="Noto Sans JP" charset="0"/>
-                        <a:cs typeface="Noto Sans JP" charset="0"/>
+                        <a:latin typeface="BIZ UDPGothic" charset="0"/>
+                        <a:ea typeface="BIZ UDPGothic" charset="0"/>
+                        <a:cs typeface="BIZ UDPGothic" charset="0"/>
                       </a:endParaRPr>
                     </a:p>
                   </a:txBody>
                   <a:tcPr marL="91440" marR="91440" marT="45720" marB="45720" anchor="ctr">
                     <a:lnL w="12700" cap="flat" cmpd="sng" algn="ctr">
                       <a:solidFill>
-                        <a:srgbClr val="2E2E2E"/>
+                        <a:srgbClr val="DDE0E6"/>
                       </a:solidFill>
                       <a:prstDash val="solid"/>
                       <a:round/>
@@ -12148,7 +12148,7 @@
                     </a:lnL>
                     <a:lnR w="12700" cap="flat" cmpd="sng" algn="ctr">
                       <a:solidFill>
-                        <a:srgbClr val="2E2E2E"/>
+                        <a:srgbClr val="DDE0E6"/>
                       </a:solidFill>
                       <a:prstDash val="solid"/>
                       <a:round/>
@@ -12157,7 +12157,7 @@
                     </a:lnR>
                     <a:lnT w="12700" cap="flat" cmpd="sng" algn="ctr">
                       <a:solidFill>
-                        <a:srgbClr val="2E2E2E"/>
+                        <a:srgbClr val="DDE0E6"/>
                       </a:solidFill>
                       <a:prstDash val="solid"/>
                       <a:round/>
@@ -12166,7 +12166,7 @@
                     </a:lnT>
                     <a:lnB w="12700" cap="flat" cmpd="sng" algn="ctr">
                       <a:solidFill>
-                        <a:srgbClr val="2E2E2E"/>
+                        <a:srgbClr val="DDE0E6"/>
                       </a:solidFill>
                       <a:prstDash val="solid"/>
                       <a:round/>
@@ -12174,7 +12174,7 @@
                       <a:tailEnd type="none" w="med" len="med"/>
                     </a:lnB>
                     <a:solidFill>
-                      <a:srgbClr val="1A1A1A"/>
+                      <a:srgbClr val="FFFFFF"/>
                     </a:solidFill>
                   </a:tcPr>
                 </a:tc>
@@ -12189,25 +12189,25 @@
                       <a:r>
                         <a:rPr lang="en-US" sz="1250" b="1" dirty="0">
                           <a:solidFill>
-                            <a:srgbClr val="D62828"/>
+                            <a:srgbClr val="C8161D"/>
                           </a:solidFill>
-                          <a:latin typeface="Noto Sans JP" pitchFamily="34" charset="0"/>
-                          <a:ea typeface="Noto Sans JP" pitchFamily="34" charset="-122"/>
-                          <a:cs typeface="Noto Sans JP" pitchFamily="34" charset="-120"/>
+                          <a:latin typeface="BIZ UDPGothic" pitchFamily="34" charset="0"/>
+                          <a:ea typeface="BIZ UDPGothic" pitchFamily="34" charset="-122"/>
+                          <a:cs typeface="BIZ UDPGothic" pitchFamily="34" charset="-120"/>
                         </a:rPr>
                         <a:t>約28.5億〜57億円</a:t>
                       </a:r>
                       <a:endParaRPr lang="en-US" sz="1250" dirty="0">
-                        <a:latin typeface="Noto Sans JP" charset="0"/>
-                        <a:ea typeface="Noto Sans JP" charset="0"/>
-                        <a:cs typeface="Noto Sans JP" charset="0"/>
+                        <a:latin typeface="BIZ UDPGothic" charset="0"/>
+                        <a:ea typeface="BIZ UDPGothic" charset="0"/>
+                        <a:cs typeface="BIZ UDPGothic" charset="0"/>
                       </a:endParaRPr>
                     </a:p>
                   </a:txBody>
                   <a:tcPr marL="91440" marR="91440" marT="45720" marB="45720" anchor="ctr">
                     <a:lnL w="12700" cap="flat" cmpd="sng" algn="ctr">
                       <a:solidFill>
-                        <a:srgbClr val="2E2E2E"/>
+                        <a:srgbClr val="DDE0E6"/>
                       </a:solidFill>
                       <a:prstDash val="solid"/>
                       <a:round/>
@@ -12216,7 +12216,7 @@
                     </a:lnL>
                     <a:lnR w="12700" cap="flat" cmpd="sng" algn="ctr">
                       <a:solidFill>
-                        <a:srgbClr val="2E2E2E"/>
+                        <a:srgbClr val="DDE0E6"/>
                       </a:solidFill>
                       <a:prstDash val="solid"/>
                       <a:round/>
@@ -12225,7 +12225,7 @@
                     </a:lnR>
                     <a:lnT w="12700" cap="flat" cmpd="sng" algn="ctr">
                       <a:solidFill>
-                        <a:srgbClr val="2E2E2E"/>
+                        <a:srgbClr val="DDE0E6"/>
                       </a:solidFill>
                       <a:prstDash val="solid"/>
                       <a:round/>
@@ -12234,7 +12234,7 @@
                     </a:lnT>
                     <a:lnB w="12700" cap="flat" cmpd="sng" algn="ctr">
                       <a:solidFill>
-                        <a:srgbClr val="2E2E2E"/>
+                        <a:srgbClr val="DDE0E6"/>
                       </a:solidFill>
                       <a:prstDash val="solid"/>
                       <a:round/>
@@ -12242,7 +12242,7 @@
                       <a:tailEnd type="none" w="med" len="med"/>
                     </a:lnB>
                     <a:solidFill>
-                      <a:srgbClr val="1A1A1A"/>
+                      <a:srgbClr val="FFFFFF"/>
                     </a:solidFill>
                   </a:tcPr>
                 </a:tc>
@@ -12278,13 +12278,13 @@
             <a:r>
               <a:rPr lang="en-US" sz="900" dirty="0">
                 <a:solidFill>
-                  <a:srgbClr val="F5F5F0">
+                  <a:srgbClr val="16181D">
                     <a:alpha val="45000"/>
                   </a:srgbClr>
                 </a:solidFill>
-                <a:latin typeface="Noto Sans JP" pitchFamily="34" charset="0"/>
-                <a:ea typeface="Noto Sans JP" pitchFamily="34" charset="-122"/>
-                <a:cs typeface="Noto Sans JP" pitchFamily="34" charset="-120"/>
+                <a:latin typeface="BIZ UDPGothic" pitchFamily="34" charset="0"/>
+                <a:ea typeface="BIZ UDPGothic" pitchFamily="34" charset="-122"/>
+                <a:cs typeface="BIZ UDPGothic" pitchFamily="34" charset="-120"/>
               </a:rPr>
               <a:t>REBOOT JAPAN ── 市民による政策提言プラットフォーム</a:t>
             </a:r>
@@ -12319,13 +12319,13 @@
             <a:r>
               <a:rPr lang="en-US" sz="900" dirty="0">
                 <a:solidFill>
-                  <a:srgbClr val="F5F5F0">
+                  <a:srgbClr val="16181D">
                     <a:alpha val="45000"/>
                   </a:srgbClr>
                 </a:solidFill>
-                <a:latin typeface="Noto Sans JP" pitchFamily="34" charset="0"/>
-                <a:ea typeface="Noto Sans JP" pitchFamily="34" charset="-122"/>
-                <a:cs typeface="Noto Sans JP" pitchFamily="34" charset="-120"/>
+                <a:latin typeface="BIZ UDPGothic" pitchFamily="34" charset="0"/>
+                <a:ea typeface="BIZ UDPGothic" pitchFamily="34" charset="-122"/>
+                <a:cs typeface="BIZ UDPGothic" pitchFamily="34" charset="-120"/>
               </a:rPr>
               <a:t>24</a:t>
             </a:r>
@@ -12347,7 +12347,7 @@
     <p:bg>
       <p:bgPr>
         <a:solidFill>
-          <a:srgbClr val="0A0A0A"/>
+          <a:srgbClr val="F5F6F8"/>
         </a:solidFill>
       </p:bgPr>
     </p:bg>
@@ -12392,11 +12392,11 @@
             <a:r>
               <a:rPr lang="en-US" sz="1200" b="1" spc="200" kern="0" dirty="0">
                 <a:solidFill>
-                  <a:srgbClr val="D62828"/>
+                  <a:srgbClr val="C8161D"/>
                 </a:solidFill>
                 <a:latin typeface="Arial" pitchFamily="34" charset="0"/>
-                <a:ea typeface="Arial" pitchFamily="34" charset="-122"/>
-                <a:cs typeface="Arial" pitchFamily="34" charset="-120"/>
+                <a:ea typeface="BIZ UDPGothic" pitchFamily="34" charset="-122"/>
+                <a:cs typeface="BIZ UDPGothic" pitchFamily="34" charset="-120"/>
               </a:rPr>
               <a:t>FINANCE — BALANCE</a:t>
             </a:r>
@@ -12431,11 +12431,11 @@
             <a:r>
               <a:rPr lang="en-US" sz="2100" b="1" dirty="0">
                 <a:solidFill>
-                  <a:srgbClr val="F5F5F0"/>
-                </a:solidFill>
-                <a:latin typeface="Noto Sans JP" pitchFamily="34" charset="0"/>
-                <a:ea typeface="Noto Sans JP" pitchFamily="34" charset="-122"/>
-                <a:cs typeface="Noto Sans JP" pitchFamily="34" charset="-120"/>
+                  <a:srgbClr val="16181D"/>
+                </a:solidFill>
+                <a:latin typeface="BIZ UDPGothic" pitchFamily="34" charset="0"/>
+                <a:ea typeface="BIZ UDPGothic" pitchFamily="34" charset="-122"/>
+                <a:cs typeface="BIZ UDPGothic" pitchFamily="34" charset="-120"/>
               </a:rPr>
               <a:t>既存予算との整合性チェック（逆算）</a:t>
             </a:r>
@@ -12460,7 +12460,7 @@
             </a:avLst>
           </a:prstGeom>
           <a:solidFill>
-            <a:srgbClr val="1A1A1A"/>
+            <a:srgbClr val="FFFFFF"/>
           </a:solidFill>
           <a:ln/>
           <a:effectLst>
@@ -12502,11 +12502,11 @@
             <a:r>
               <a:rPr lang="en-US" sz="1550" b="1" dirty="0">
                 <a:solidFill>
-                  <a:srgbClr val="F5F5F0"/>
-                </a:solidFill>
-                <a:latin typeface="Noto Sans JP" pitchFamily="34" charset="0"/>
-                <a:ea typeface="Noto Sans JP" pitchFamily="34" charset="-122"/>
-                <a:cs typeface="Noto Sans JP" pitchFamily="34" charset="-120"/>
+                  <a:srgbClr val="16181D"/>
+                </a:solidFill>
+                <a:latin typeface="BIZ UDPGothic" pitchFamily="34" charset="0"/>
+                <a:ea typeface="BIZ UDPGothic" pitchFamily="34" charset="-122"/>
+                <a:cs typeface="BIZ UDPGothic" pitchFamily="34" charset="-120"/>
               </a:rPr>
               <a:t>初年度想定コスト　約28.5億〜57億円</a:t>
             </a:r>
@@ -12522,11 +12522,11 @@
             <a:r>
               <a:rPr lang="en-US" sz="1450" b="1" dirty="0">
                 <a:solidFill>
-                  <a:srgbClr val="D62828"/>
-                </a:solidFill>
-                <a:latin typeface="Noto Sans JP" pitchFamily="34" charset="0"/>
-                <a:ea typeface="Noto Sans JP" pitchFamily="34" charset="-122"/>
-                <a:cs typeface="Noto Sans JP" pitchFamily="34" charset="-120"/>
+                  <a:srgbClr val="C8161D"/>
+                </a:solidFill>
+                <a:latin typeface="BIZ UDPGothic" pitchFamily="34" charset="0"/>
+                <a:ea typeface="BIZ UDPGothic" pitchFamily="34" charset="-122"/>
+                <a:cs typeface="BIZ UDPGothic" pitchFamily="34" charset="-120"/>
               </a:rPr>
               <a:t>地域交通リ・デザイン全体予算（331億円）の1割弱に収まる規模</a:t>
             </a:r>
@@ -12564,11 +12564,11 @@
             <a:r>
               <a:rPr lang="en-US" sz="1250" dirty="0">
                 <a:solidFill>
-                  <a:srgbClr val="F5F5F0"/>
-                </a:solidFill>
-                <a:latin typeface="Noto Sans JP" pitchFamily="34" charset="0"/>
-                <a:ea typeface="Noto Sans JP" pitchFamily="34" charset="-122"/>
-                <a:cs typeface="Noto Sans JP" pitchFamily="34" charset="-120"/>
+                  <a:srgbClr val="16181D"/>
+                </a:solidFill>
+                <a:latin typeface="BIZ UDPGothic" pitchFamily="34" charset="0"/>
+                <a:ea typeface="BIZ UDPGothic" pitchFamily="34" charset="-122"/>
+                <a:cs typeface="BIZ UDPGothic" pitchFamily="34" charset="-120"/>
               </a:rPr>
               <a:t>既存のタクシー・バス業界向け延命補助金を全廃し、この財源に振り替える設計であれば、国全体の予算規模を大きく膨らませることなく実現可能な範囲と考えられる。</a:t>
             </a:r>
@@ -12606,13 +12606,13 @@
             <a:r>
               <a:rPr lang="en-US" sz="1050" dirty="0">
                 <a:solidFill>
-                  <a:srgbClr val="F5F5F0">
+                  <a:srgbClr val="16181D">
                     <a:alpha val="75000"/>
                   </a:srgbClr>
                 </a:solidFill>
-                <a:latin typeface="Noto Sans JP" pitchFamily="34" charset="0"/>
-                <a:ea typeface="Noto Sans JP" pitchFamily="34" charset="-122"/>
-                <a:cs typeface="Noto Sans JP" pitchFamily="34" charset="-120"/>
+                <a:latin typeface="BIZ UDPGothic" pitchFamily="34" charset="0"/>
+                <a:ea typeface="BIZ UDPGothic" pitchFamily="34" charset="-122"/>
+                <a:cs typeface="BIZ UDPGothic" pitchFamily="34" charset="-120"/>
               </a:rPr>
               <a:t>※ 都道府県別の延命補助金の内訳データは特定できておらず、今後の検証が必要。車両単価は技術成熟とともに下落が見込まれ、本試算は保守的な数字である。</a:t>
             </a:r>
@@ -12647,13 +12647,13 @@
             <a:r>
               <a:rPr lang="en-US" sz="900" dirty="0">
                 <a:solidFill>
-                  <a:srgbClr val="F5F5F0">
+                  <a:srgbClr val="16181D">
                     <a:alpha val="45000"/>
                   </a:srgbClr>
                 </a:solidFill>
-                <a:latin typeface="Noto Sans JP" pitchFamily="34" charset="0"/>
-                <a:ea typeface="Noto Sans JP" pitchFamily="34" charset="-122"/>
-                <a:cs typeface="Noto Sans JP" pitchFamily="34" charset="-120"/>
+                <a:latin typeface="BIZ UDPGothic" pitchFamily="34" charset="0"/>
+                <a:ea typeface="BIZ UDPGothic" pitchFamily="34" charset="-122"/>
+                <a:cs typeface="BIZ UDPGothic" pitchFamily="34" charset="-120"/>
               </a:rPr>
               <a:t>REBOOT JAPAN ── 市民による政策提言プラットフォーム</a:t>
             </a:r>
@@ -12688,13 +12688,13 @@
             <a:r>
               <a:rPr lang="en-US" sz="900" dirty="0">
                 <a:solidFill>
-                  <a:srgbClr val="F5F5F0">
+                  <a:srgbClr val="16181D">
                     <a:alpha val="45000"/>
                   </a:srgbClr>
                 </a:solidFill>
-                <a:latin typeface="Noto Sans JP" pitchFamily="34" charset="0"/>
-                <a:ea typeface="Noto Sans JP" pitchFamily="34" charset="-122"/>
-                <a:cs typeface="Noto Sans JP" pitchFamily="34" charset="-120"/>
+                <a:latin typeface="BIZ UDPGothic" pitchFamily="34" charset="0"/>
+                <a:ea typeface="BIZ UDPGothic" pitchFamily="34" charset="-122"/>
+                <a:cs typeface="BIZ UDPGothic" pitchFamily="34" charset="-120"/>
               </a:rPr>
               <a:t>25</a:t>
             </a:r>
@@ -12716,7 +12716,7 @@
     <p:bg>
       <p:bgPr>
         <a:solidFill>
-          <a:srgbClr val="0A0A0A"/>
+          <a:srgbClr val="F5F6F8"/>
         </a:solidFill>
       </p:bgPr>
     </p:bg>
@@ -12761,11 +12761,11 @@
             <a:r>
               <a:rPr lang="en-US" sz="1200" b="1" spc="200" kern="0" dirty="0">
                 <a:solidFill>
-                  <a:srgbClr val="D62828"/>
+                  <a:srgbClr val="C8161D"/>
                 </a:solidFill>
                 <a:latin typeface="Arial" pitchFamily="34" charset="0"/>
-                <a:ea typeface="Arial" pitchFamily="34" charset="-122"/>
-                <a:cs typeface="Arial" pitchFamily="34" charset="-120"/>
+                <a:ea typeface="BIZ UDPGothic" pitchFamily="34" charset="-122"/>
+                <a:cs typeface="BIZ UDPGothic" pitchFamily="34" charset="-120"/>
               </a:rPr>
               <a:t>OUTCOME</a:t>
             </a:r>
@@ -12800,11 +12800,11 @@
             <a:r>
               <a:rPr lang="en-US" sz="2400" b="1" dirty="0">
                 <a:solidFill>
-                  <a:srgbClr val="F5F5F0"/>
-                </a:solidFill>
-                <a:latin typeface="Noto Sans JP" pitchFamily="34" charset="0"/>
-                <a:ea typeface="Noto Sans JP" pitchFamily="34" charset="-122"/>
-                <a:cs typeface="Noto Sans JP" pitchFamily="34" charset="-120"/>
+                  <a:srgbClr val="16181D"/>
+                </a:solidFill>
+                <a:latin typeface="BIZ UDPGothic" pitchFamily="34" charset="0"/>
+                <a:ea typeface="BIZ UDPGothic" pitchFamily="34" charset="-122"/>
+                <a:cs typeface="BIZ UDPGothic" pitchFamily="34" charset="-120"/>
               </a:rPr>
               <a:t>この提言で何が変わるか：3つの効果</a:t>
             </a:r>
@@ -12839,11 +12839,11 @@
             <a:r>
               <a:rPr lang="en-US" sz="1500" b="1" dirty="0">
                 <a:solidFill>
-                  <a:srgbClr val="D62828"/>
+                  <a:srgbClr val="C8161D"/>
                 </a:solidFill>
                 <a:latin typeface="Arial" pitchFamily="34" charset="0"/>
-                <a:ea typeface="Arial" pitchFamily="34" charset="-122"/>
-                <a:cs typeface="Arial" pitchFamily="34" charset="-120"/>
+                <a:ea typeface="BIZ UDPGothic" pitchFamily="34" charset="-122"/>
+                <a:cs typeface="BIZ UDPGothic" pitchFamily="34" charset="-120"/>
               </a:rPr>
               <a:t>①</a:t>
             </a:r>
@@ -12881,11 +12881,11 @@
             <a:r>
               <a:rPr lang="en-US" sz="1400" dirty="0">
                 <a:solidFill>
-                  <a:srgbClr val="F5F5F0"/>
-                </a:solidFill>
-                <a:latin typeface="Noto Sans JP" pitchFamily="34" charset="0"/>
-                <a:ea typeface="Noto Sans JP" pitchFamily="34" charset="-122"/>
-                <a:cs typeface="Noto Sans JP" pitchFamily="34" charset="-120"/>
+                  <a:srgbClr val="16181D"/>
+                </a:solidFill>
+                <a:latin typeface="BIZ UDPGothic" pitchFamily="34" charset="0"/>
+                <a:ea typeface="BIZ UDPGothic" pitchFamily="34" charset="-122"/>
+                <a:cs typeface="BIZ UDPGothic" pitchFamily="34" charset="-120"/>
               </a:rPr>
               <a:t>地方の足を止めない　── 廃線・減便が続く地域で、無人化により公共交通を維持する</a:t>
             </a:r>
@@ -12920,11 +12920,11 @@
             <a:r>
               <a:rPr lang="en-US" sz="1500" b="1" dirty="0">
                 <a:solidFill>
-                  <a:srgbClr val="D62828"/>
+                  <a:srgbClr val="C8161D"/>
                 </a:solidFill>
                 <a:latin typeface="Arial" pitchFamily="34" charset="0"/>
-                <a:ea typeface="Arial" pitchFamily="34" charset="-122"/>
-                <a:cs typeface="Arial" pitchFamily="34" charset="-120"/>
+                <a:ea typeface="BIZ UDPGothic" pitchFamily="34" charset="-122"/>
+                <a:cs typeface="BIZ UDPGothic" pitchFamily="34" charset="-120"/>
               </a:rPr>
               <a:t>②</a:t>
             </a:r>
@@ -12962,11 +12962,11 @@
             <a:r>
               <a:rPr lang="en-US" sz="1400" dirty="0">
                 <a:solidFill>
-                  <a:srgbClr val="F5F5F0"/>
-                </a:solidFill>
-                <a:latin typeface="Noto Sans JP" pitchFamily="34" charset="0"/>
-                <a:ea typeface="Noto Sans JP" pitchFamily="34" charset="-122"/>
-                <a:cs typeface="Noto Sans JP" pitchFamily="34" charset="-120"/>
+                  <a:srgbClr val="16181D"/>
+                </a:solidFill>
+                <a:latin typeface="BIZ UDPGothic" pitchFamily="34" charset="0"/>
+                <a:ea typeface="BIZ UDPGothic" pitchFamily="34" charset="-122"/>
+                <a:cs typeface="BIZ UDPGothic" pitchFamily="34" charset="-120"/>
               </a:rPr>
               <a:t>物流の担い手不足を解消する　── 夜間・過疎地の輸送を無人化で支え、24時間対応を可能にする</a:t>
             </a:r>
@@ -13001,11 +13001,11 @@
             <a:r>
               <a:rPr lang="en-US" sz="1500" b="1" dirty="0">
                 <a:solidFill>
-                  <a:srgbClr val="D62828"/>
+                  <a:srgbClr val="C8161D"/>
                 </a:solidFill>
                 <a:latin typeface="Arial" pitchFamily="34" charset="0"/>
-                <a:ea typeface="Arial" pitchFamily="34" charset="-122"/>
-                <a:cs typeface="Arial" pitchFamily="34" charset="-120"/>
+                <a:ea typeface="BIZ UDPGothic" pitchFamily="34" charset="-122"/>
+                <a:cs typeface="BIZ UDPGothic" pitchFamily="34" charset="-120"/>
               </a:rPr>
               <a:t>③</a:t>
             </a:r>
@@ -13043,11 +13043,11 @@
             <a:r>
               <a:rPr lang="en-US" sz="1400" dirty="0">
                 <a:solidFill>
-                  <a:srgbClr val="F5F5F0"/>
-                </a:solidFill>
-                <a:latin typeface="Noto Sans JP" pitchFamily="34" charset="0"/>
-                <a:ea typeface="Noto Sans JP" pitchFamily="34" charset="-122"/>
-                <a:cs typeface="Noto Sans JP" pitchFamily="34" charset="-120"/>
+                  <a:srgbClr val="16181D"/>
+                </a:solidFill>
+                <a:latin typeface="BIZ UDPGothic" pitchFamily="34" charset="0"/>
+                <a:ea typeface="BIZ UDPGothic" pitchFamily="34" charset="-122"/>
+                <a:cs typeface="BIZ UDPGothic" pitchFamily="34" charset="-120"/>
               </a:rPr>
               <a:t>官民が同じ船に乗る　── 延命でなく業態転換への投資へ。責任の所在を明確にしたまま規制を緩和する</a:t>
             </a:r>
@@ -13082,13 +13082,13 @@
             <a:r>
               <a:rPr lang="en-US" sz="900" dirty="0">
                 <a:solidFill>
-                  <a:srgbClr val="F5F5F0">
+                  <a:srgbClr val="16181D">
                     <a:alpha val="45000"/>
                   </a:srgbClr>
                 </a:solidFill>
-                <a:latin typeface="Noto Sans JP" pitchFamily="34" charset="0"/>
-                <a:ea typeface="Noto Sans JP" pitchFamily="34" charset="-122"/>
-                <a:cs typeface="Noto Sans JP" pitchFamily="34" charset="-120"/>
+                <a:latin typeface="BIZ UDPGothic" pitchFamily="34" charset="0"/>
+                <a:ea typeface="BIZ UDPGothic" pitchFamily="34" charset="-122"/>
+                <a:cs typeface="BIZ UDPGothic" pitchFamily="34" charset="-120"/>
               </a:rPr>
               <a:t>REBOOT JAPAN ── 市民による政策提言プラットフォーム</a:t>
             </a:r>
@@ -13123,13 +13123,13 @@
             <a:r>
               <a:rPr lang="en-US" sz="900" dirty="0">
                 <a:solidFill>
-                  <a:srgbClr val="F5F5F0">
+                  <a:srgbClr val="16181D">
                     <a:alpha val="45000"/>
                   </a:srgbClr>
                 </a:solidFill>
-                <a:latin typeface="Noto Sans JP" pitchFamily="34" charset="0"/>
-                <a:ea typeface="Noto Sans JP" pitchFamily="34" charset="-122"/>
-                <a:cs typeface="Noto Sans JP" pitchFamily="34" charset="-120"/>
+                <a:latin typeface="BIZ UDPGothic" pitchFamily="34" charset="0"/>
+                <a:ea typeface="BIZ UDPGothic" pitchFamily="34" charset="-122"/>
+                <a:cs typeface="BIZ UDPGothic" pitchFamily="34" charset="-120"/>
               </a:rPr>
               <a:t>26</a:t>
             </a:r>
@@ -13151,7 +13151,7 @@
     <p:bg>
       <p:bgPr>
         <a:solidFill>
-          <a:srgbClr val="0A0A0A"/>
+          <a:srgbClr val="F5F6F8"/>
         </a:solidFill>
       </p:bgPr>
     </p:bg>
@@ -13196,11 +13196,11 @@
             <a:r>
               <a:rPr lang="en-US" sz="1200" b="1" spc="200" kern="0" dirty="0">
                 <a:solidFill>
-                  <a:srgbClr val="D62828"/>
+                  <a:srgbClr val="C8161D"/>
                 </a:solidFill>
                 <a:latin typeface="Arial" pitchFamily="34" charset="0"/>
-                <a:ea typeface="Arial" pitchFamily="34" charset="-122"/>
-                <a:cs typeface="Arial" pitchFamily="34" charset="-120"/>
+                <a:ea typeface="BIZ UDPGothic" pitchFamily="34" charset="-122"/>
+                <a:cs typeface="BIZ UDPGothic" pitchFamily="34" charset="-120"/>
               </a:rPr>
               <a:t>REMAINING ISSUES</a:t>
             </a:r>
@@ -13235,11 +13235,11 @@
             <a:r>
               <a:rPr lang="en-US" sz="2400" b="1" dirty="0">
                 <a:solidFill>
-                  <a:srgbClr val="F5F5F0"/>
-                </a:solidFill>
-                <a:latin typeface="Noto Sans JP" pitchFamily="34" charset="0"/>
-                <a:ea typeface="Noto Sans JP" pitchFamily="34" charset="-122"/>
-                <a:cs typeface="Noto Sans JP" pitchFamily="34" charset="-120"/>
+                  <a:srgbClr val="16181D"/>
+                </a:solidFill>
+                <a:latin typeface="BIZ UDPGothic" pitchFamily="34" charset="0"/>
+                <a:ea typeface="BIZ UDPGothic" pitchFamily="34" charset="-122"/>
+                <a:cs typeface="BIZ UDPGothic" pitchFamily="34" charset="-120"/>
               </a:rPr>
               <a:t>これから詰めるべき課題</a:t>
             </a:r>
@@ -13278,11 +13278,11 @@
             <a:r>
               <a:rPr lang="en-US" sz="1350" dirty="0">
                 <a:solidFill>
-                  <a:srgbClr val="F5F5F0"/>
-                </a:solidFill>
-                <a:latin typeface="Noto Sans JP" pitchFamily="34" charset="0"/>
-                <a:ea typeface="Noto Sans JP" pitchFamily="34" charset="-122"/>
-                <a:cs typeface="Noto Sans JP" pitchFamily="34" charset="-120"/>
+                  <a:srgbClr val="16181D"/>
+                </a:solidFill>
+                <a:latin typeface="BIZ UDPGothic" pitchFamily="34" charset="0"/>
+                <a:ea typeface="BIZ UDPGothic" pitchFamily="34" charset="-122"/>
+                <a:cs typeface="BIZ UDPGothic" pitchFamily="34" charset="-120"/>
               </a:rPr>
               <a:t>既存のタクシー・バス業界向け延命補助金（都道府県別内訳）の正確な金額把握</a:t>
             </a:r>
@@ -13299,11 +13299,11 @@
             <a:r>
               <a:rPr lang="en-US" sz="1350" dirty="0">
                 <a:solidFill>
-                  <a:srgbClr val="F5F5F0"/>
-                </a:solidFill>
-                <a:latin typeface="Noto Sans JP" pitchFamily="34" charset="0"/>
-                <a:ea typeface="Noto Sans JP" pitchFamily="34" charset="-122"/>
-                <a:cs typeface="Noto Sans JP" pitchFamily="34" charset="-120"/>
+                  <a:srgbClr val="16181D"/>
+                </a:solidFill>
+                <a:latin typeface="BIZ UDPGothic" pitchFamily="34" charset="0"/>
+                <a:ea typeface="BIZ UDPGothic" pitchFamily="34" charset="-122"/>
+                <a:cs typeface="BIZ UDPGothic" pitchFamily="34" charset="-120"/>
               </a:rPr>
               <a:t>車両価格の下落シナリオを織り込んだ複数年試算（3年後・7年後）</a:t>
             </a:r>
@@ -13320,11 +13320,11 @@
             <a:r>
               <a:rPr lang="en-US" sz="1350" dirty="0">
                 <a:solidFill>
-                  <a:srgbClr val="F5F5F0"/>
-                </a:solidFill>
-                <a:latin typeface="Noto Sans JP" pitchFamily="34" charset="0"/>
-                <a:ea typeface="Noto Sans JP" pitchFamily="34" charset="-122"/>
-                <a:cs typeface="Noto Sans JP" pitchFamily="34" charset="-120"/>
+                  <a:srgbClr val="16181D"/>
+                </a:solidFill>
+                <a:latin typeface="BIZ UDPGothic" pitchFamily="34" charset="0"/>
+                <a:ea typeface="BIZ UDPGothic" pitchFamily="34" charset="-122"/>
+                <a:cs typeface="BIZ UDPGothic" pitchFamily="34" charset="-120"/>
               </a:rPr>
               <a:t>「達成率」の具体的な測定指標（無人化移行率・事故率・収支改善率等）の重み付け設計</a:t>
             </a:r>
@@ -13341,11 +13341,11 @@
             <a:r>
               <a:rPr lang="en-US" sz="1350" dirty="0">
                 <a:solidFill>
-                  <a:srgbClr val="F5F5F0"/>
-                </a:solidFill>
-                <a:latin typeface="Noto Sans JP" pitchFamily="34" charset="0"/>
-                <a:ea typeface="Noto Sans JP" pitchFamily="34" charset="-122"/>
-                <a:cs typeface="Noto Sans JP" pitchFamily="34" charset="-120"/>
+                  <a:srgbClr val="16181D"/>
+                </a:solidFill>
+                <a:latin typeface="BIZ UDPGothic" pitchFamily="34" charset="0"/>
+                <a:ea typeface="BIZ UDPGothic" pitchFamily="34" charset="-122"/>
+                <a:cs typeface="BIZ UDPGothic" pitchFamily="34" charset="-120"/>
               </a:rPr>
               <a:t>不正流用・重大事故の具体的な認定基準（重大事故の閾値、調査期間の上限）</a:t>
             </a:r>
@@ -13362,11 +13362,11 @@
             <a:r>
               <a:rPr lang="en-US" sz="1350" dirty="0">
                 <a:solidFill>
-                  <a:srgbClr val="F5F5F0"/>
-                </a:solidFill>
-                <a:latin typeface="Noto Sans JP" pitchFamily="34" charset="0"/>
-                <a:ea typeface="Noto Sans JP" pitchFamily="34" charset="-122"/>
-                <a:cs typeface="Noto Sans JP" pitchFamily="34" charset="-120"/>
+                  <a:srgbClr val="16181D"/>
+                </a:solidFill>
+                <a:latin typeface="BIZ UDPGothic" pitchFamily="34" charset="0"/>
+                <a:ea typeface="BIZ UDPGothic" pitchFamily="34" charset="-122"/>
+                <a:cs typeface="BIZ UDPGothic" pitchFamily="34" charset="-120"/>
               </a:rPr>
               <a:t>国・第三者の専門委員会の設置根拠法・委員構成の具体設計</a:t>
             </a:r>
@@ -13383,11 +13383,11 @@
             <a:r>
               <a:rPr lang="en-US" sz="1350" dirty="0">
                 <a:solidFill>
-                  <a:srgbClr val="F5F5F0"/>
-                </a:solidFill>
-                <a:latin typeface="Noto Sans JP" pitchFamily="34" charset="0"/>
-                <a:ea typeface="Noto Sans JP" pitchFamily="34" charset="-122"/>
-                <a:cs typeface="Noto Sans JP" pitchFamily="34" charset="-120"/>
+                  <a:srgbClr val="16181D"/>
+                </a:solidFill>
+                <a:latin typeface="BIZ UDPGothic" pitchFamily="34" charset="0"/>
+                <a:ea typeface="BIZ UDPGothic" pitchFamily="34" charset="-122"/>
+                <a:cs typeface="BIZ UDPGothic" pitchFamily="34" charset="-120"/>
               </a:rPr>
               <a:t>無過失仮払いモデルの原資（保険料方式か公費方式か）の設計</a:t>
             </a:r>
@@ -13404,11 +13404,11 @@
             <a:r>
               <a:rPr lang="en-US" sz="1350" dirty="0">
                 <a:solidFill>
-                  <a:srgbClr val="F5F5F0"/>
-                </a:solidFill>
-                <a:latin typeface="Noto Sans JP" pitchFamily="34" charset="0"/>
-                <a:ea typeface="Noto Sans JP" pitchFamily="34" charset="-122"/>
-                <a:cs typeface="Noto Sans JP" pitchFamily="34" charset="-120"/>
+                  <a:srgbClr val="16181D"/>
+                </a:solidFill>
+                <a:latin typeface="BIZ UDPGothic" pitchFamily="34" charset="0"/>
+                <a:ea typeface="BIZ UDPGothic" pitchFamily="34" charset="-122"/>
+                <a:cs typeface="BIZ UDPGothic" pitchFamily="34" charset="-120"/>
               </a:rPr>
               <a:t>あおり運転的挙動・センサー誤動作の原因遡及に関する立証責任の分配</a:t>
             </a:r>
@@ -13425,11 +13425,11 @@
             <a:r>
               <a:rPr lang="en-US" sz="1350" dirty="0">
                 <a:solidFill>
-                  <a:srgbClr val="F5F5F0"/>
-                </a:solidFill>
-                <a:latin typeface="Noto Sans JP" pitchFamily="34" charset="0"/>
-                <a:ea typeface="Noto Sans JP" pitchFamily="34" charset="-122"/>
-                <a:cs typeface="Noto Sans JP" pitchFamily="34" charset="-120"/>
+                  <a:srgbClr val="16181D"/>
+                </a:solidFill>
+                <a:latin typeface="BIZ UDPGothic" pitchFamily="34" charset="0"/>
+                <a:ea typeface="BIZ UDPGothic" pitchFamily="34" charset="-122"/>
+                <a:cs typeface="BIZ UDPGothic" pitchFamily="34" charset="-120"/>
               </a:rPr>
               <a:t>スマート農業における第三者（歩行者・一般車両）との事故リスクの個別検証</a:t>
             </a:r>
@@ -13464,13 +13464,13 @@
             <a:r>
               <a:rPr lang="en-US" sz="900" dirty="0">
                 <a:solidFill>
-                  <a:srgbClr val="F5F5F0">
+                  <a:srgbClr val="16181D">
                     <a:alpha val="45000"/>
                   </a:srgbClr>
                 </a:solidFill>
-                <a:latin typeface="Noto Sans JP" pitchFamily="34" charset="0"/>
-                <a:ea typeface="Noto Sans JP" pitchFamily="34" charset="-122"/>
-                <a:cs typeface="Noto Sans JP" pitchFamily="34" charset="-120"/>
+                <a:latin typeface="BIZ UDPGothic" pitchFamily="34" charset="0"/>
+                <a:ea typeface="BIZ UDPGothic" pitchFamily="34" charset="-122"/>
+                <a:cs typeface="BIZ UDPGothic" pitchFamily="34" charset="-120"/>
               </a:rPr>
               <a:t>REBOOT JAPAN ── 市民による政策提言プラットフォーム</a:t>
             </a:r>
@@ -13505,13 +13505,13 @@
             <a:r>
               <a:rPr lang="en-US" sz="900" dirty="0">
                 <a:solidFill>
-                  <a:srgbClr val="F5F5F0">
+                  <a:srgbClr val="16181D">
                     <a:alpha val="45000"/>
                   </a:srgbClr>
                 </a:solidFill>
-                <a:latin typeface="Noto Sans JP" pitchFamily="34" charset="0"/>
-                <a:ea typeface="Noto Sans JP" pitchFamily="34" charset="-122"/>
-                <a:cs typeface="Noto Sans JP" pitchFamily="34" charset="-120"/>
+                <a:latin typeface="BIZ UDPGothic" pitchFamily="34" charset="0"/>
+                <a:ea typeface="BIZ UDPGothic" pitchFamily="34" charset="-122"/>
+                <a:cs typeface="BIZ UDPGothic" pitchFamily="34" charset="-120"/>
               </a:rPr>
               <a:t>27</a:t>
             </a:r>
@@ -13533,7 +13533,7 @@
     <p:bg>
       <p:bgPr>
         <a:solidFill>
-          <a:srgbClr val="0A0A0A"/>
+          <a:srgbClr val="F5F6F8"/>
         </a:solidFill>
       </p:bgPr>
     </p:bg>
@@ -13578,11 +13578,11 @@
             <a:r>
               <a:rPr lang="en-US" sz="1200" b="1" spc="200" kern="0" dirty="0">
                 <a:solidFill>
-                  <a:srgbClr val="D62828"/>
+                  <a:srgbClr val="C8161D"/>
                 </a:solidFill>
                 <a:latin typeface="Arial" pitchFamily="34" charset="0"/>
-                <a:ea typeface="Arial" pitchFamily="34" charset="-122"/>
-                <a:cs typeface="Arial" pitchFamily="34" charset="-120"/>
+                <a:ea typeface="BIZ UDPGothic" pitchFamily="34" charset="-122"/>
+                <a:cs typeface="BIZ UDPGothic" pitchFamily="34" charset="-120"/>
               </a:rPr>
               <a:t>REBOOT JAPAN ── 提言011　まとめ</a:t>
             </a:r>
@@ -13620,11 +13620,11 @@
             <a:r>
               <a:rPr lang="en-US" sz="3000" b="1" dirty="0">
                 <a:solidFill>
-                  <a:srgbClr val="F5F5F0"/>
-                </a:solidFill>
-                <a:latin typeface="Noto Sans JP" pitchFamily="34" charset="0"/>
-                <a:ea typeface="Noto Sans JP" pitchFamily="34" charset="-122"/>
-                <a:cs typeface="Noto Sans JP" pitchFamily="34" charset="-120"/>
+                  <a:srgbClr val="16181D"/>
+                </a:solidFill>
+                <a:latin typeface="BIZ UDPGothic" pitchFamily="34" charset="0"/>
+                <a:ea typeface="BIZ UDPGothic" pitchFamily="34" charset="-122"/>
+                <a:cs typeface="BIZ UDPGothic" pitchFamily="34" charset="-120"/>
               </a:rPr>
               <a:t>延命ではなく、</a:t>
             </a:r>
@@ -13640,11 +13640,11 @@
             <a:r>
               <a:rPr lang="en-US" sz="3000" b="1" dirty="0">
                 <a:solidFill>
-                  <a:srgbClr val="F5F5F0"/>
-                </a:solidFill>
-                <a:latin typeface="Noto Sans JP" pitchFamily="34" charset="0"/>
-                <a:ea typeface="Noto Sans JP" pitchFamily="34" charset="-122"/>
-                <a:cs typeface="Noto Sans JP" pitchFamily="34" charset="-120"/>
+                  <a:srgbClr val="16181D"/>
+                </a:solidFill>
+                <a:latin typeface="BIZ UDPGothic" pitchFamily="34" charset="0"/>
+                <a:ea typeface="BIZ UDPGothic" pitchFamily="34" charset="-122"/>
+                <a:cs typeface="BIZ UDPGothic" pitchFamily="34" charset="-120"/>
               </a:rPr>
               <a:t>挑戦する企業へ。</a:t>
             </a:r>
@@ -13660,11 +13660,11 @@
             <a:r>
               <a:rPr lang="en-US" sz="3000" b="1" dirty="0">
                 <a:solidFill>
-                  <a:srgbClr val="F5F5F0"/>
-                </a:solidFill>
-                <a:latin typeface="Noto Sans JP" pitchFamily="34" charset="0"/>
-                <a:ea typeface="Noto Sans JP" pitchFamily="34" charset="-122"/>
-                <a:cs typeface="Noto Sans JP" pitchFamily="34" charset="-120"/>
+                  <a:srgbClr val="16181D"/>
+                </a:solidFill>
+                <a:latin typeface="BIZ UDPGothic" pitchFamily="34" charset="0"/>
+                <a:ea typeface="BIZ UDPGothic" pitchFamily="34" charset="-122"/>
+                <a:cs typeface="BIZ UDPGothic" pitchFamily="34" charset="-120"/>
               </a:rPr>
               <a:t>責任の所在を明確に。</a:t>
             </a:r>
@@ -13699,11 +13699,11 @@
             <a:r>
               <a:rPr lang="en-US" sz="1400" b="1" dirty="0">
                 <a:solidFill>
-                  <a:srgbClr val="D62828"/>
+                  <a:srgbClr val="C8161D"/>
                 </a:solidFill>
                 <a:latin typeface="Arial" pitchFamily="34" charset="0"/>
-                <a:ea typeface="Arial" pitchFamily="34" charset="-122"/>
-                <a:cs typeface="Arial" pitchFamily="34" charset="-120"/>
+                <a:ea typeface="BIZ UDPGothic" pitchFamily="34" charset="-122"/>
+                <a:cs typeface="BIZ UDPGothic" pitchFamily="34" charset="-120"/>
               </a:rPr>
               <a:t>①</a:t>
             </a:r>
@@ -13741,11 +13741,11 @@
             <a:r>
               <a:rPr lang="en-US" sz="1300" dirty="0">
                 <a:solidFill>
-                  <a:srgbClr val="F5F5F0"/>
-                </a:solidFill>
-                <a:latin typeface="Noto Sans JP" pitchFamily="34" charset="0"/>
-                <a:ea typeface="Noto Sans JP" pitchFamily="34" charset="-122"/>
-                <a:cs typeface="Noto Sans JP" pitchFamily="34" charset="-120"/>
+                  <a:srgbClr val="16181D"/>
+                </a:solidFill>
+                <a:latin typeface="BIZ UDPGothic" pitchFamily="34" charset="0"/>
+                <a:ea typeface="BIZ UDPGothic" pitchFamily="34" charset="-122"/>
+                <a:cs typeface="BIZ UDPGothic" pitchFamily="34" charset="-120"/>
               </a:rPr>
               <a:t>既存業界への延命補助金は特区認定と同時に即時全廃する</a:t>
             </a:r>
@@ -13780,11 +13780,11 @@
             <a:r>
               <a:rPr lang="en-US" sz="1400" b="1" dirty="0">
                 <a:solidFill>
-                  <a:srgbClr val="D62828"/>
+                  <a:srgbClr val="C8161D"/>
                 </a:solidFill>
                 <a:latin typeface="Arial" pitchFamily="34" charset="0"/>
-                <a:ea typeface="Arial" pitchFamily="34" charset="-122"/>
-                <a:cs typeface="Arial" pitchFamily="34" charset="-120"/>
+                <a:ea typeface="BIZ UDPGothic" pitchFamily="34" charset="-122"/>
+                <a:cs typeface="BIZ UDPGothic" pitchFamily="34" charset="-120"/>
               </a:rPr>
               <a:t>②</a:t>
             </a:r>
@@ -13822,11 +13822,11 @@
             <a:r>
               <a:rPr lang="en-US" sz="1300" dirty="0">
                 <a:solidFill>
-                  <a:srgbClr val="F5F5F0"/>
-                </a:solidFill>
-                <a:latin typeface="Noto Sans JP" pitchFamily="34" charset="0"/>
-                <a:ea typeface="Noto Sans JP" pitchFamily="34" charset="-122"/>
-                <a:cs typeface="Noto Sans JP" pitchFamily="34" charset="-120"/>
+                  <a:srgbClr val="16181D"/>
+                </a:solidFill>
+                <a:latin typeface="BIZ UDPGothic" pitchFamily="34" charset="0"/>
+                <a:ea typeface="BIZ UDPGothic" pitchFamily="34" charset="-122"/>
+                <a:cs typeface="BIZ UDPGothic" pitchFamily="34" charset="-120"/>
               </a:rPr>
               <a:t>予算は業態転換に挑む個別企業への直接投資に100%振り替える</a:t>
             </a:r>
@@ -13861,11 +13861,11 @@
             <a:r>
               <a:rPr lang="en-US" sz="1400" b="1" dirty="0">
                 <a:solidFill>
-                  <a:srgbClr val="D62828"/>
+                  <a:srgbClr val="C8161D"/>
                 </a:solidFill>
                 <a:latin typeface="Arial" pitchFamily="34" charset="0"/>
-                <a:ea typeface="Arial" pitchFamily="34" charset="-122"/>
-                <a:cs typeface="Arial" pitchFamily="34" charset="-120"/>
+                <a:ea typeface="BIZ UDPGothic" pitchFamily="34" charset="-122"/>
+                <a:cs typeface="BIZ UDPGothic" pitchFamily="34" charset="-120"/>
               </a:rPr>
               <a:t>③</a:t>
             </a:r>
@@ -13903,11 +13903,11 @@
             <a:r>
               <a:rPr lang="en-US" sz="1300" dirty="0">
                 <a:solidFill>
-                  <a:srgbClr val="F5F5F0"/>
-                </a:solidFill>
-                <a:latin typeface="Noto Sans JP" pitchFamily="34" charset="0"/>
-                <a:ea typeface="Noto Sans JP" pitchFamily="34" charset="-122"/>
-                <a:cs typeface="Noto Sans JP" pitchFamily="34" charset="-120"/>
+                  <a:srgbClr val="16181D"/>
+                </a:solidFill>
+                <a:latin typeface="BIZ UDPGothic" pitchFamily="34" charset="0"/>
+                <a:ea typeface="BIZ UDPGothic" pitchFamily="34" charset="-122"/>
+                <a:cs typeface="BIZ UDPGothic" pitchFamily="34" charset="-120"/>
               </a:rPr>
               <a:t>剥奪・継続の判定は企業単位。不正・重大事故は別軸で即時剥奪する</a:t>
             </a:r>
@@ -13942,11 +13942,11 @@
             <a:r>
               <a:rPr lang="en-US" sz="1400" b="1" dirty="0">
                 <a:solidFill>
-                  <a:srgbClr val="D62828"/>
+                  <a:srgbClr val="C8161D"/>
                 </a:solidFill>
                 <a:latin typeface="Arial" pitchFamily="34" charset="0"/>
-                <a:ea typeface="Arial" pitchFamily="34" charset="-122"/>
-                <a:cs typeface="Arial" pitchFamily="34" charset="-120"/>
+                <a:ea typeface="BIZ UDPGothic" pitchFamily="34" charset="-122"/>
+                <a:cs typeface="BIZ UDPGothic" pitchFamily="34" charset="-120"/>
               </a:rPr>
               <a:t>④</a:t>
             </a:r>
@@ -13984,11 +13984,11 @@
             <a:r>
               <a:rPr lang="en-US" sz="1300" dirty="0">
                 <a:solidFill>
-                  <a:srgbClr val="F5F5F0"/>
-                </a:solidFill>
-                <a:latin typeface="Noto Sans JP" pitchFamily="34" charset="0"/>
-                <a:ea typeface="Noto Sans JP" pitchFamily="34" charset="-122"/>
-                <a:cs typeface="Noto Sans JP" pitchFamily="34" charset="-120"/>
+                  <a:srgbClr val="16181D"/>
+                </a:solidFill>
+                <a:latin typeface="BIZ UDPGothic" pitchFamily="34" charset="0"/>
+                <a:ea typeface="BIZ UDPGothic" pitchFamily="34" charset="-122"/>
+                <a:cs typeface="BIZ UDPGothic" pitchFamily="34" charset="-120"/>
               </a:rPr>
               <a:t>深夜専用レーン・シームレス走行・マルチマニングの3つを規制緩和する</a:t>
             </a:r>
@@ -14023,11 +14023,11 @@
             <a:r>
               <a:rPr lang="en-US" sz="1400" b="1" dirty="0">
                 <a:solidFill>
-                  <a:srgbClr val="D62828"/>
+                  <a:srgbClr val="C8161D"/>
                 </a:solidFill>
                 <a:latin typeface="Arial" pitchFamily="34" charset="0"/>
-                <a:ea typeface="Arial" pitchFamily="34" charset="-122"/>
-                <a:cs typeface="Arial" pitchFamily="34" charset="-120"/>
+                <a:ea typeface="BIZ UDPGothic" pitchFamily="34" charset="-122"/>
+                <a:cs typeface="BIZ UDPGothic" pitchFamily="34" charset="-120"/>
               </a:rPr>
               <a:t>⑤</a:t>
             </a:r>
@@ -14065,11 +14065,11 @@
             <a:r>
               <a:rPr lang="en-US" sz="1300" dirty="0">
                 <a:solidFill>
-                  <a:srgbClr val="F5F5F0"/>
-                </a:solidFill>
-                <a:latin typeface="Noto Sans JP" pitchFamily="34" charset="0"/>
-                <a:ea typeface="Noto Sans JP" pitchFamily="34" charset="-122"/>
-                <a:cs typeface="Noto Sans JP" pitchFamily="34" charset="-120"/>
+                  <a:srgbClr val="16181D"/>
+                </a:solidFill>
+                <a:latin typeface="BIZ UDPGothic" pitchFamily="34" charset="0"/>
+                <a:ea typeface="BIZ UDPGothic" pitchFamily="34" charset="-122"/>
+                <a:cs typeface="BIZ UDPGothic" pitchFamily="34" charset="-120"/>
               </a:rPr>
               <a:t>事故の責任は原因に応じてメーカーと運行企業が分担。無過失の仮払いで被害者を守る</a:t>
             </a:r>
@@ -14104,13 +14104,13 @@
             <a:r>
               <a:rPr lang="en-US" sz="900" dirty="0">
                 <a:solidFill>
-                  <a:srgbClr val="F5F5F0">
+                  <a:srgbClr val="16181D">
                     <a:alpha val="45000"/>
                   </a:srgbClr>
                 </a:solidFill>
-                <a:latin typeface="Noto Sans JP" pitchFamily="34" charset="0"/>
-                <a:ea typeface="Noto Sans JP" pitchFamily="34" charset="-122"/>
-                <a:cs typeface="Noto Sans JP" pitchFamily="34" charset="-120"/>
+                <a:latin typeface="BIZ UDPGothic" pitchFamily="34" charset="0"/>
+                <a:ea typeface="BIZ UDPGothic" pitchFamily="34" charset="-122"/>
+                <a:cs typeface="BIZ UDPGothic" pitchFamily="34" charset="-120"/>
               </a:rPr>
               <a:t>REBOOT JAPAN ── 市民による政策提言プラットフォーム</a:t>
             </a:r>
@@ -14145,13 +14145,13 @@
             <a:r>
               <a:rPr lang="en-US" sz="900" dirty="0">
                 <a:solidFill>
-                  <a:srgbClr val="F5F5F0">
+                  <a:srgbClr val="16181D">
                     <a:alpha val="45000"/>
                   </a:srgbClr>
                 </a:solidFill>
-                <a:latin typeface="Noto Sans JP" pitchFamily="34" charset="0"/>
-                <a:ea typeface="Noto Sans JP" pitchFamily="34" charset="-122"/>
-                <a:cs typeface="Noto Sans JP" pitchFamily="34" charset="-120"/>
+                <a:latin typeface="BIZ UDPGothic" pitchFamily="34" charset="0"/>
+                <a:ea typeface="BIZ UDPGothic" pitchFamily="34" charset="-122"/>
+                <a:cs typeface="BIZ UDPGothic" pitchFamily="34" charset="-120"/>
               </a:rPr>
               <a:t>28</a:t>
             </a:r>
@@ -14173,7 +14173,7 @@
     <p:bg>
       <p:bgPr>
         <a:solidFill>
-          <a:srgbClr val="0A0A0A"/>
+          <a:srgbClr val="F5F6F8"/>
         </a:solidFill>
       </p:bgPr>
     </p:bg>
@@ -14218,11 +14218,11 @@
             <a:r>
               <a:rPr lang="en-US" sz="1200" b="1" spc="200" kern="0" dirty="0">
                 <a:solidFill>
-                  <a:srgbClr val="D62828"/>
+                  <a:srgbClr val="C8161D"/>
                 </a:solidFill>
                 <a:latin typeface="Arial" pitchFamily="34" charset="0"/>
-                <a:ea typeface="Arial" pitchFamily="34" charset="-122"/>
-                <a:cs typeface="Arial" pitchFamily="34" charset="-120"/>
+                <a:ea typeface="BIZ UDPGothic" pitchFamily="34" charset="-122"/>
+                <a:cs typeface="BIZ UDPGothic" pitchFamily="34" charset="-120"/>
               </a:rPr>
               <a:t>OVERVIEW</a:t>
             </a:r>
@@ -14257,11 +14257,11 @@
             <a:r>
               <a:rPr lang="en-US" sz="2600" b="1" dirty="0">
                 <a:solidFill>
-                  <a:srgbClr val="F5F5F0"/>
-                </a:solidFill>
-                <a:latin typeface="Noto Sans JP" pitchFamily="34" charset="0"/>
-                <a:ea typeface="Noto Sans JP" pitchFamily="34" charset="-122"/>
-                <a:cs typeface="Noto Sans JP" pitchFamily="34" charset="-120"/>
+                  <a:srgbClr val="16181D"/>
+                </a:solidFill>
+                <a:latin typeface="BIZ UDPGothic" pitchFamily="34" charset="0"/>
+                <a:ea typeface="BIZ UDPGothic" pitchFamily="34" charset="-122"/>
+                <a:cs typeface="BIZ UDPGothic" pitchFamily="34" charset="-120"/>
               </a:rPr>
               <a:t>この提言の全体像：4つの柱</a:t>
             </a:r>
@@ -14286,11 +14286,11 @@
             </a:avLst>
           </a:prstGeom>
           <a:solidFill>
-            <a:srgbClr val="1A1A1A"/>
+            <a:srgbClr val="FFFFFF"/>
           </a:solidFill>
           <a:ln w="12700">
             <a:solidFill>
-              <a:srgbClr val="2E2E2E"/>
+              <a:srgbClr val="DDE0E6"/>
             </a:solidFill>
             <a:prstDash val="solid"/>
           </a:ln>
@@ -14333,8 +14333,8 @@
                   <a:srgbClr val="000000"/>
                 </a:solidFill>
                 <a:latin typeface="Arial" pitchFamily="34" charset="0"/>
-                <a:ea typeface="Arial" pitchFamily="34" charset="-122"/>
-                <a:cs typeface="Arial" pitchFamily="34" charset="-120"/>
+                <a:ea typeface="BIZ UDPGothic" pitchFamily="34" charset="-122"/>
+                <a:cs typeface="BIZ UDPGothic" pitchFamily="34" charset="-120"/>
               </a:rPr>
               <a:t>⚖️</a:t>
             </a:r>
@@ -14372,11 +14372,11 @@
             <a:r>
               <a:rPr lang="en-US" sz="1250" b="1" dirty="0">
                 <a:solidFill>
-                  <a:srgbClr val="F5F5F0"/>
-                </a:solidFill>
-                <a:latin typeface="Noto Sans JP" pitchFamily="34" charset="0"/>
-                <a:ea typeface="Noto Sans JP" pitchFamily="34" charset="-122"/>
-                <a:cs typeface="Noto Sans JP" pitchFamily="34" charset="-120"/>
+                  <a:srgbClr val="16181D"/>
+                </a:solidFill>
+                <a:latin typeface="BIZ UDPGothic" pitchFamily="34" charset="0"/>
+                <a:ea typeface="BIZ UDPGothic" pitchFamily="34" charset="-122"/>
+                <a:cs typeface="BIZ UDPGothic" pitchFamily="34" charset="-120"/>
               </a:rPr>
               <a:t>① オープンエントリー制</a:t>
             </a:r>
@@ -14414,11 +14414,11 @@
             <a:r>
               <a:rPr lang="en-US" sz="1050" dirty="0">
                 <a:solidFill>
-                  <a:srgbClr val="F5F5F0"/>
-                </a:solidFill>
-                <a:latin typeface="Noto Sans JP" pitchFamily="34" charset="0"/>
-                <a:ea typeface="Noto Sans JP" pitchFamily="34" charset="-122"/>
-                <a:cs typeface="Noto Sans JP" pitchFamily="34" charset="-120"/>
+                  <a:srgbClr val="16181D"/>
+                </a:solidFill>
+                <a:latin typeface="BIZ UDPGothic" pitchFamily="34" charset="0"/>
+                <a:ea typeface="BIZ UDPGothic" pitchFamily="34" charset="-122"/>
+                <a:cs typeface="BIZ UDPGothic" pitchFamily="34" charset="-120"/>
               </a:rPr>
               <a:t>客観的基準で即日認定される特区選定</a:t>
             </a:r>
@@ -14443,11 +14443,11 @@
             </a:avLst>
           </a:prstGeom>
           <a:solidFill>
-            <a:srgbClr val="1A1A1A"/>
+            <a:srgbClr val="FFFFFF"/>
           </a:solidFill>
           <a:ln w="12700">
             <a:solidFill>
-              <a:srgbClr val="2E2E2E"/>
+              <a:srgbClr val="DDE0E6"/>
             </a:solidFill>
             <a:prstDash val="solid"/>
           </a:ln>
@@ -14490,8 +14490,8 @@
                   <a:srgbClr val="000000"/>
                 </a:solidFill>
                 <a:latin typeface="Arial" pitchFamily="34" charset="0"/>
-                <a:ea typeface="Arial" pitchFamily="34" charset="-122"/>
-                <a:cs typeface="Arial" pitchFamily="34" charset="-120"/>
+                <a:ea typeface="BIZ UDPGothic" pitchFamily="34" charset="-122"/>
+                <a:cs typeface="BIZ UDPGothic" pitchFamily="34" charset="-120"/>
               </a:rPr>
               <a:t>💰</a:t>
             </a:r>
@@ -14529,11 +14529,11 @@
             <a:r>
               <a:rPr lang="en-US" sz="1250" b="1" dirty="0">
                 <a:solidFill>
-                  <a:srgbClr val="F5F5F0"/>
-                </a:solidFill>
-                <a:latin typeface="Noto Sans JP" pitchFamily="34" charset="0"/>
-                <a:ea typeface="Noto Sans JP" pitchFamily="34" charset="-122"/>
-                <a:cs typeface="Noto Sans JP" pitchFamily="34" charset="-120"/>
+                  <a:srgbClr val="16181D"/>
+                </a:solidFill>
+                <a:latin typeface="BIZ UDPGothic" pitchFamily="34" charset="0"/>
+                <a:ea typeface="BIZ UDPGothic" pitchFamily="34" charset="-122"/>
+                <a:cs typeface="BIZ UDPGothic" pitchFamily="34" charset="-120"/>
               </a:rPr>
               <a:t>② 補助金から直接投資へ</a:t>
             </a:r>
@@ -14571,11 +14571,11 @@
             <a:r>
               <a:rPr lang="en-US" sz="1050" dirty="0">
                 <a:solidFill>
-                  <a:srgbClr val="F5F5F0"/>
-                </a:solidFill>
-                <a:latin typeface="Noto Sans JP" pitchFamily="34" charset="0"/>
-                <a:ea typeface="Noto Sans JP" pitchFamily="34" charset="-122"/>
-                <a:cs typeface="Noto Sans JP" pitchFamily="34" charset="-120"/>
+                  <a:srgbClr val="16181D"/>
+                </a:solidFill>
+                <a:latin typeface="BIZ UDPGothic" pitchFamily="34" charset="0"/>
+                <a:ea typeface="BIZ UDPGothic" pitchFamily="34" charset="-122"/>
+                <a:cs typeface="BIZ UDPGothic" pitchFamily="34" charset="-120"/>
               </a:rPr>
               <a:t>業界延命ではなく企業の業態転換を支援</a:t>
             </a:r>
@@ -14600,11 +14600,11 @@
             </a:avLst>
           </a:prstGeom>
           <a:solidFill>
-            <a:srgbClr val="1A1A1A"/>
+            <a:srgbClr val="FFFFFF"/>
           </a:solidFill>
           <a:ln w="12700">
             <a:solidFill>
-              <a:srgbClr val="2E2E2E"/>
+              <a:srgbClr val="DDE0E6"/>
             </a:solidFill>
             <a:prstDash val="solid"/>
           </a:ln>
@@ -14647,8 +14647,8 @@
                   <a:srgbClr val="000000"/>
                 </a:solidFill>
                 <a:latin typeface="Arial" pitchFamily="34" charset="0"/>
-                <a:ea typeface="Arial" pitchFamily="34" charset="-122"/>
-                <a:cs typeface="Arial" pitchFamily="34" charset="-120"/>
+                <a:ea typeface="BIZ UDPGothic" pitchFamily="34" charset="-122"/>
+                <a:cs typeface="BIZ UDPGothic" pitchFamily="34" charset="-120"/>
               </a:rPr>
               <a:t>📋</a:t>
             </a:r>
@@ -14686,11 +14686,11 @@
             <a:r>
               <a:rPr lang="en-US" sz="1250" b="1" dirty="0">
                 <a:solidFill>
-                  <a:srgbClr val="F5F5F0"/>
-                </a:solidFill>
-                <a:latin typeface="Noto Sans JP" pitchFamily="34" charset="0"/>
-                <a:ea typeface="Noto Sans JP" pitchFamily="34" charset="-122"/>
-                <a:cs typeface="Noto Sans JP" pitchFamily="34" charset="-120"/>
+                  <a:srgbClr val="16181D"/>
+                </a:solidFill>
+                <a:latin typeface="BIZ UDPGothic" pitchFamily="34" charset="0"/>
+                <a:ea typeface="BIZ UDPGothic" pitchFamily="34" charset="-122"/>
+                <a:cs typeface="BIZ UDPGothic" pitchFamily="34" charset="-120"/>
               </a:rPr>
               <a:t>③ 企業単位のガバナンス</a:t>
             </a:r>
@@ -14728,11 +14728,11 @@
             <a:r>
               <a:rPr lang="en-US" sz="1050" dirty="0">
                 <a:solidFill>
-                  <a:srgbClr val="F5F5F0"/>
-                </a:solidFill>
-                <a:latin typeface="Noto Sans JP" pitchFamily="34" charset="0"/>
-                <a:ea typeface="Noto Sans JP" pitchFamily="34" charset="-122"/>
-                <a:cs typeface="Noto Sans JP" pitchFamily="34" charset="-120"/>
+                  <a:srgbClr val="16181D"/>
+                </a:solidFill>
+                <a:latin typeface="BIZ UDPGothic" pitchFamily="34" charset="0"/>
+                <a:ea typeface="BIZ UDPGothic" pitchFamily="34" charset="-122"/>
+                <a:cs typeface="BIZ UDPGothic" pitchFamily="34" charset="-120"/>
               </a:rPr>
               <a:t>達成率連動の減額カーブと不正即時剥奪</a:t>
             </a:r>
@@ -14757,11 +14757,11 @@
             </a:avLst>
           </a:prstGeom>
           <a:solidFill>
-            <a:srgbClr val="1A1A1A"/>
+            <a:srgbClr val="FFFFFF"/>
           </a:solidFill>
           <a:ln w="12700">
             <a:solidFill>
-              <a:srgbClr val="2E2E2E"/>
+              <a:srgbClr val="DDE0E6"/>
             </a:solidFill>
             <a:prstDash val="solid"/>
           </a:ln>
@@ -14804,8 +14804,8 @@
                   <a:srgbClr val="000000"/>
                 </a:solidFill>
                 <a:latin typeface="Arial" pitchFamily="34" charset="0"/>
-                <a:ea typeface="Arial" pitchFamily="34" charset="-122"/>
-                <a:cs typeface="Arial" pitchFamily="34" charset="-120"/>
+                <a:ea typeface="BIZ UDPGothic" pitchFamily="34" charset="-122"/>
+                <a:cs typeface="BIZ UDPGothic" pitchFamily="34" charset="-120"/>
               </a:rPr>
               <a:t>🛣️</a:t>
             </a:r>
@@ -14843,11 +14843,11 @@
             <a:r>
               <a:rPr lang="en-US" sz="1250" b="1" dirty="0">
                 <a:solidFill>
-                  <a:srgbClr val="F5F5F0"/>
-                </a:solidFill>
-                <a:latin typeface="Noto Sans JP" pitchFamily="34" charset="0"/>
-                <a:ea typeface="Noto Sans JP" pitchFamily="34" charset="-122"/>
-                <a:cs typeface="Noto Sans JP" pitchFamily="34" charset="-120"/>
+                  <a:srgbClr val="16181D"/>
+                </a:solidFill>
+                <a:latin typeface="BIZ UDPGothic" pitchFamily="34" charset="0"/>
+                <a:ea typeface="BIZ UDPGothic" pitchFamily="34" charset="-122"/>
+                <a:cs typeface="BIZ UDPGothic" pitchFamily="34" charset="-120"/>
               </a:rPr>
               <a:t>④ 3つの規制緩和</a:t>
             </a:r>
@@ -14885,11 +14885,11 @@
             <a:r>
               <a:rPr lang="en-US" sz="1050" dirty="0">
                 <a:solidFill>
-                  <a:srgbClr val="F5F5F0"/>
-                </a:solidFill>
-                <a:latin typeface="Noto Sans JP" pitchFamily="34" charset="0"/>
-                <a:ea typeface="Noto Sans JP" pitchFamily="34" charset="-122"/>
-                <a:cs typeface="Noto Sans JP" pitchFamily="34" charset="-120"/>
+                  <a:srgbClr val="16181D"/>
+                </a:solidFill>
+                <a:latin typeface="BIZ UDPGothic" pitchFamily="34" charset="0"/>
+                <a:ea typeface="BIZ UDPGothic" pitchFamily="34" charset="-122"/>
+                <a:cs typeface="BIZ UDPGothic" pitchFamily="34" charset="-120"/>
               </a:rPr>
               <a:t>専用レーン・シームレス走行・マルチマニング</a:t>
             </a:r>
@@ -14924,13 +14924,13 @@
             <a:r>
               <a:rPr lang="en-US" sz="900" dirty="0">
                 <a:solidFill>
-                  <a:srgbClr val="F5F5F0">
+                  <a:srgbClr val="16181D">
                     <a:alpha val="45000"/>
                   </a:srgbClr>
                 </a:solidFill>
-                <a:latin typeface="Noto Sans JP" pitchFamily="34" charset="0"/>
-                <a:ea typeface="Noto Sans JP" pitchFamily="34" charset="-122"/>
-                <a:cs typeface="Noto Sans JP" pitchFamily="34" charset="-120"/>
+                <a:latin typeface="BIZ UDPGothic" pitchFamily="34" charset="0"/>
+                <a:ea typeface="BIZ UDPGothic" pitchFamily="34" charset="-122"/>
+                <a:cs typeface="BIZ UDPGothic" pitchFamily="34" charset="-120"/>
               </a:rPr>
               <a:t>REBOOT JAPAN ── 市民による政策提言プラットフォーム</a:t>
             </a:r>
@@ -14965,13 +14965,13 @@
             <a:r>
               <a:rPr lang="en-US" sz="900" dirty="0">
                 <a:solidFill>
-                  <a:srgbClr val="F5F5F0">
+                  <a:srgbClr val="16181D">
                     <a:alpha val="45000"/>
                   </a:srgbClr>
                 </a:solidFill>
-                <a:latin typeface="Noto Sans JP" pitchFamily="34" charset="0"/>
-                <a:ea typeface="Noto Sans JP" pitchFamily="34" charset="-122"/>
-                <a:cs typeface="Noto Sans JP" pitchFamily="34" charset="-120"/>
+                <a:latin typeface="BIZ UDPGothic" pitchFamily="34" charset="0"/>
+                <a:ea typeface="BIZ UDPGothic" pitchFamily="34" charset="-122"/>
+                <a:cs typeface="BIZ UDPGothic" pitchFamily="34" charset="-120"/>
               </a:rPr>
               <a:t>3</a:t>
             </a:r>
@@ -14993,7 +14993,7 @@
     <p:bg>
       <p:bgPr>
         <a:solidFill>
-          <a:srgbClr val="0A0A0A"/>
+          <a:srgbClr val="F5F6F8"/>
         </a:solidFill>
       </p:bgPr>
     </p:bg>
@@ -15038,11 +15038,11 @@
             <a:r>
               <a:rPr lang="en-US" sz="1200" b="1" spc="200" kern="0" dirty="0">
                 <a:solidFill>
-                  <a:srgbClr val="D62828"/>
+                  <a:srgbClr val="C8161D"/>
                 </a:solidFill>
                 <a:latin typeface="Arial" pitchFamily="34" charset="0"/>
-                <a:ea typeface="Arial" pitchFamily="34" charset="-122"/>
-                <a:cs typeface="Arial" pitchFamily="34" charset="-120"/>
+                <a:ea typeface="BIZ UDPGothic" pitchFamily="34" charset="-122"/>
+                <a:cs typeface="BIZ UDPGothic" pitchFamily="34" charset="-120"/>
               </a:rPr>
               <a:t>RULE 01</a:t>
             </a:r>
@@ -15077,11 +15077,11 @@
             <a:r>
               <a:rPr lang="en-US" sz="2400" b="1" dirty="0">
                 <a:solidFill>
-                  <a:srgbClr val="F5F5F0"/>
-                </a:solidFill>
-                <a:latin typeface="Noto Sans JP" pitchFamily="34" charset="0"/>
-                <a:ea typeface="Noto Sans JP" pitchFamily="34" charset="-122"/>
-                <a:cs typeface="Noto Sans JP" pitchFamily="34" charset="-120"/>
+                  <a:srgbClr val="16181D"/>
+                </a:solidFill>
+                <a:latin typeface="BIZ UDPGothic" pitchFamily="34" charset="0"/>
+                <a:ea typeface="BIZ UDPGothic" pitchFamily="34" charset="-122"/>
+                <a:cs typeface="BIZ UDPGothic" pitchFamily="34" charset="-120"/>
               </a:rPr>
               <a:t>「退路を断つ」条例が特区の申請条件</a:t>
             </a:r>
@@ -15119,8 +15119,8 @@
                   <a:srgbClr val="000000"/>
                 </a:solidFill>
                 <a:latin typeface="Arial" pitchFamily="34" charset="0"/>
-                <a:ea typeface="Arial" pitchFamily="34" charset="-122"/>
-                <a:cs typeface="Arial" pitchFamily="34" charset="-120"/>
+                <a:ea typeface="BIZ UDPGothic" pitchFamily="34" charset="-122"/>
+                <a:cs typeface="BIZ UDPGothic" pitchFamily="34" charset="-120"/>
               </a:rPr>
               <a:t>📜</a:t>
             </a:r>
@@ -15155,11 +15155,11 @@
             <a:r>
               <a:rPr lang="en-US" sz="1600" b="1" dirty="0">
                 <a:solidFill>
-                  <a:srgbClr val="F5F5F0"/>
-                </a:solidFill>
-                <a:latin typeface="Noto Sans JP" pitchFamily="34" charset="0"/>
-                <a:ea typeface="Noto Sans JP" pitchFamily="34" charset="-122"/>
-                <a:cs typeface="Noto Sans JP" pitchFamily="34" charset="-120"/>
+                  <a:srgbClr val="16181D"/>
+                </a:solidFill>
+                <a:latin typeface="BIZ UDPGothic" pitchFamily="34" charset="0"/>
+                <a:ea typeface="BIZ UDPGothic" pitchFamily="34" charset="-122"/>
+                <a:cs typeface="BIZ UDPGothic" pitchFamily="34" charset="-120"/>
               </a:rPr>
               <a:t>特区の申請には、都道府県議会での「既得権益全廃・業態転換条例」の同時可決を必須とする</a:t>
             </a:r>
@@ -15184,7 +15184,7 @@
             </a:avLst>
           </a:prstGeom>
           <a:solidFill>
-            <a:srgbClr val="1A1A1A"/>
+            <a:srgbClr val="FFFFFF"/>
           </a:solidFill>
           <a:ln/>
           <a:effectLst>
@@ -15226,11 +15226,11 @@
             <a:r>
               <a:rPr lang="en-US" sz="1300" b="1" dirty="0">
                 <a:solidFill>
-                  <a:srgbClr val="D62828"/>
-                </a:solidFill>
-                <a:latin typeface="Noto Sans JP" pitchFamily="34" charset="0"/>
-                <a:ea typeface="Noto Sans JP" pitchFamily="34" charset="-122"/>
-                <a:cs typeface="Noto Sans JP" pitchFamily="34" charset="-120"/>
+                  <a:srgbClr val="C8161D"/>
+                </a:solidFill>
+                <a:latin typeface="BIZ UDPGothic" pitchFamily="34" charset="0"/>
+                <a:ea typeface="BIZ UDPGothic" pitchFamily="34" charset="-122"/>
+                <a:cs typeface="BIZ UDPGothic" pitchFamily="34" charset="-120"/>
               </a:rPr>
               <a:t>条例には何を書くか</a:t>
             </a:r>
@@ -15246,11 +15246,11 @@
             <a:r>
               <a:rPr lang="en-US" sz="1400" dirty="0">
                 <a:solidFill>
-                  <a:srgbClr val="F5F5F0"/>
-                </a:solidFill>
-                <a:latin typeface="Noto Sans JP" pitchFamily="34" charset="0"/>
-                <a:ea typeface="Noto Sans JP" pitchFamily="34" charset="-122"/>
-                <a:cs typeface="Noto Sans JP" pitchFamily="34" charset="-120"/>
+                  <a:srgbClr val="16181D"/>
+                </a:solidFill>
+                <a:latin typeface="BIZ UDPGothic" pitchFamily="34" charset="0"/>
+                <a:ea typeface="BIZ UDPGothic" pitchFamily="34" charset="-122"/>
+                <a:cs typeface="BIZ UDPGothic" pitchFamily="34" charset="-120"/>
               </a:rPr>
               <a:t>特区認定と同時に、既存のタクシー・バス協会への延命補助金（燃料費補助・事務局経費等）を</a:t>
             </a:r>
@@ -15266,11 +15266,11 @@
             <a:r>
               <a:rPr lang="en-US" sz="1400" b="1" dirty="0">
                 <a:solidFill>
-                  <a:srgbClr val="D62828"/>
-                </a:solidFill>
-                <a:latin typeface="Noto Sans JP" pitchFamily="34" charset="0"/>
-                <a:ea typeface="Noto Sans JP" pitchFamily="34" charset="-122"/>
-                <a:cs typeface="Noto Sans JP" pitchFamily="34" charset="-120"/>
+                  <a:srgbClr val="C8161D"/>
+                </a:solidFill>
+                <a:latin typeface="BIZ UDPGothic" pitchFamily="34" charset="0"/>
+                <a:ea typeface="BIZ UDPGothic" pitchFamily="34" charset="-122"/>
+                <a:cs typeface="BIZ UDPGothic" pitchFamily="34" charset="-120"/>
               </a:rPr>
               <a:t>即時に全廃し、無人運行への転換原資に100%充てることを明記する</a:t>
             </a:r>
@@ -15305,13 +15305,13 @@
             <a:r>
               <a:rPr lang="en-US" sz="900" dirty="0">
                 <a:solidFill>
-                  <a:srgbClr val="F5F5F0">
+                  <a:srgbClr val="16181D">
                     <a:alpha val="45000"/>
                   </a:srgbClr>
                 </a:solidFill>
-                <a:latin typeface="Noto Sans JP" pitchFamily="34" charset="0"/>
-                <a:ea typeface="Noto Sans JP" pitchFamily="34" charset="-122"/>
-                <a:cs typeface="Noto Sans JP" pitchFamily="34" charset="-120"/>
+                <a:latin typeface="BIZ UDPGothic" pitchFamily="34" charset="0"/>
+                <a:ea typeface="BIZ UDPGothic" pitchFamily="34" charset="-122"/>
+                <a:cs typeface="BIZ UDPGothic" pitchFamily="34" charset="-120"/>
               </a:rPr>
               <a:t>REBOOT JAPAN ── 市民による政策提言プラットフォーム</a:t>
             </a:r>
@@ -15346,13 +15346,13 @@
             <a:r>
               <a:rPr lang="en-US" sz="900" dirty="0">
                 <a:solidFill>
-                  <a:srgbClr val="F5F5F0">
+                  <a:srgbClr val="16181D">
                     <a:alpha val="45000"/>
                   </a:srgbClr>
                 </a:solidFill>
-                <a:latin typeface="Noto Sans JP" pitchFamily="34" charset="0"/>
-                <a:ea typeface="Noto Sans JP" pitchFamily="34" charset="-122"/>
-                <a:cs typeface="Noto Sans JP" pitchFamily="34" charset="-120"/>
+                <a:latin typeface="BIZ UDPGothic" pitchFamily="34" charset="0"/>
+                <a:ea typeface="BIZ UDPGothic" pitchFamily="34" charset="-122"/>
+                <a:cs typeface="BIZ UDPGothic" pitchFamily="34" charset="-120"/>
               </a:rPr>
               <a:t>4</a:t>
             </a:r>
@@ -15374,7 +15374,7 @@
     <p:bg>
       <p:bgPr>
         <a:solidFill>
-          <a:srgbClr val="0A0A0A"/>
+          <a:srgbClr val="F5F6F8"/>
         </a:solidFill>
       </p:bgPr>
     </p:bg>
@@ -15419,11 +15419,11 @@
             <a:r>
               <a:rPr lang="en-US" sz="1200" b="1" spc="200" kern="0" dirty="0">
                 <a:solidFill>
-                  <a:srgbClr val="D62828"/>
+                  <a:srgbClr val="C8161D"/>
                 </a:solidFill>
                 <a:latin typeface="Arial" pitchFamily="34" charset="0"/>
-                <a:ea typeface="Arial" pitchFamily="34" charset="-122"/>
-                <a:cs typeface="Arial" pitchFamily="34" charset="-120"/>
+                <a:ea typeface="BIZ UDPGothic" pitchFamily="34" charset="-122"/>
+                <a:cs typeface="BIZ UDPGothic" pitchFamily="34" charset="-120"/>
               </a:rPr>
               <a:t>RULE 01 — DETAIL</a:t>
             </a:r>
@@ -15458,11 +15458,11 @@
             <a:r>
               <a:rPr lang="en-US" sz="2400" b="1" dirty="0">
                 <a:solidFill>
-                  <a:srgbClr val="F5F5F0"/>
-                </a:solidFill>
-                <a:latin typeface="Noto Sans JP" pitchFamily="34" charset="0"/>
-                <a:ea typeface="Noto Sans JP" pitchFamily="34" charset="-122"/>
-                <a:cs typeface="Noto Sans JP" pitchFamily="34" charset="-120"/>
+                  <a:srgbClr val="16181D"/>
+                </a:solidFill>
+                <a:latin typeface="BIZ UDPGothic" pitchFamily="34" charset="0"/>
+                <a:ea typeface="BIZ UDPGothic" pitchFamily="34" charset="-122"/>
+                <a:cs typeface="BIZ UDPGothic" pitchFamily="34" charset="-120"/>
               </a:rPr>
               <a:t>深刻な地域ほど最優先で認定する</a:t>
             </a:r>
@@ -15497,11 +15497,11 @@
             <a:r>
               <a:rPr lang="en-US" sz="1600" b="1" dirty="0">
                 <a:solidFill>
-                  <a:srgbClr val="F5F5F0"/>
-                </a:solidFill>
-                <a:latin typeface="Noto Sans JP" pitchFamily="34" charset="0"/>
-                <a:ea typeface="Noto Sans JP" pitchFamily="34" charset="-122"/>
-                <a:cs typeface="Noto Sans JP" pitchFamily="34" charset="-120"/>
+                  <a:srgbClr val="16181D"/>
+                </a:solidFill>
+                <a:latin typeface="BIZ UDPGothic" pitchFamily="34" charset="0"/>
+                <a:ea typeface="BIZ UDPGothic" pitchFamily="34" charset="-122"/>
+                <a:cs typeface="BIZ UDPGothic" pitchFamily="34" charset="-120"/>
               </a:rPr>
               <a:t>🧠 客観的な統計データからAIが自動でスコア算出</a:t>
             </a:r>
@@ -15536,11 +15536,11 @@
             <a:r>
               <a:rPr lang="en-US" sz="2600" b="1" dirty="0">
                 <a:solidFill>
-                  <a:srgbClr val="D62828"/>
+                  <a:srgbClr val="C8161D"/>
                 </a:solidFill>
                 <a:latin typeface="Arial" pitchFamily="34" charset="0"/>
-                <a:ea typeface="Arial" pitchFamily="34" charset="-122"/>
-                <a:cs typeface="Arial" pitchFamily="34" charset="-120"/>
+                <a:ea typeface="BIZ UDPGothic" pitchFamily="34" charset="-122"/>
+                <a:cs typeface="BIZ UDPGothic" pitchFamily="34" charset="-120"/>
               </a:rPr>
               <a:t>01</a:t>
             </a:r>
@@ -15575,11 +15575,11 @@
             <a:r>
               <a:rPr lang="en-US" sz="1500" b="1" dirty="0">
                 <a:solidFill>
-                  <a:srgbClr val="F5F5F0"/>
-                </a:solidFill>
-                <a:latin typeface="Noto Sans JP" pitchFamily="34" charset="0"/>
-                <a:ea typeface="Noto Sans JP" pitchFamily="34" charset="-122"/>
-                <a:cs typeface="Noto Sans JP" pitchFamily="34" charset="-120"/>
+                  <a:srgbClr val="16181D"/>
+                </a:solidFill>
+                <a:latin typeface="BIZ UDPGothic" pitchFamily="34" charset="0"/>
+                <a:ea typeface="BIZ UDPGothic" pitchFamily="34" charset="-122"/>
+                <a:cs typeface="BIZ UDPGothic" pitchFamily="34" charset="-120"/>
               </a:rPr>
               <a:t>公共交通機関の廃線・減便率（過去5年）</a:t>
             </a:r>
@@ -15645,11 +15645,11 @@
             <a:r>
               <a:rPr lang="en-US" sz="2600" b="1" dirty="0">
                 <a:solidFill>
-                  <a:srgbClr val="D62828"/>
+                  <a:srgbClr val="C8161D"/>
                 </a:solidFill>
                 <a:latin typeface="Arial" pitchFamily="34" charset="0"/>
-                <a:ea typeface="Arial" pitchFamily="34" charset="-122"/>
-                <a:cs typeface="Arial" pitchFamily="34" charset="-120"/>
+                <a:ea typeface="BIZ UDPGothic" pitchFamily="34" charset="-122"/>
+                <a:cs typeface="BIZ UDPGothic" pitchFamily="34" charset="-120"/>
               </a:rPr>
               <a:t>02</a:t>
             </a:r>
@@ -15684,11 +15684,11 @@
             <a:r>
               <a:rPr lang="en-US" sz="1500" b="1" dirty="0">
                 <a:solidFill>
-                  <a:srgbClr val="F5F5F0"/>
-                </a:solidFill>
-                <a:latin typeface="Noto Sans JP" pitchFamily="34" charset="0"/>
-                <a:ea typeface="Noto Sans JP" pitchFamily="34" charset="-122"/>
-                <a:cs typeface="Noto Sans JP" pitchFamily="34" charset="-120"/>
+                  <a:srgbClr val="16181D"/>
+                </a:solidFill>
+                <a:latin typeface="BIZ UDPGothic" pitchFamily="34" charset="0"/>
+                <a:ea typeface="BIZ UDPGothic" pitchFamily="34" charset="-122"/>
+                <a:cs typeface="BIZ UDPGothic" pitchFamily="34" charset="-120"/>
               </a:rPr>
               <a:t>地域の高齢化率</a:t>
             </a:r>
@@ -15754,11 +15754,11 @@
             <a:r>
               <a:rPr lang="en-US" sz="2600" b="1" dirty="0">
                 <a:solidFill>
-                  <a:srgbClr val="D62828"/>
+                  <a:srgbClr val="C8161D"/>
                 </a:solidFill>
                 <a:latin typeface="Arial" pitchFamily="34" charset="0"/>
-                <a:ea typeface="Arial" pitchFamily="34" charset="-122"/>
-                <a:cs typeface="Arial" pitchFamily="34" charset="-120"/>
+                <a:ea typeface="BIZ UDPGothic" pitchFamily="34" charset="-122"/>
+                <a:cs typeface="BIZ UDPGothic" pitchFamily="34" charset="-120"/>
               </a:rPr>
               <a:t>03</a:t>
             </a:r>
@@ -15793,11 +15793,11 @@
             <a:r>
               <a:rPr lang="en-US" sz="1500" b="1" dirty="0">
                 <a:solidFill>
-                  <a:srgbClr val="F5F5F0"/>
-                </a:solidFill>
-                <a:latin typeface="Noto Sans JP" pitchFamily="34" charset="0"/>
-                <a:ea typeface="Noto Sans JP" pitchFamily="34" charset="-122"/>
-                <a:cs typeface="Noto Sans JP" pitchFamily="34" charset="-120"/>
+                  <a:srgbClr val="16181D"/>
+                </a:solidFill>
+                <a:latin typeface="BIZ UDPGothic" pitchFamily="34" charset="0"/>
+                <a:ea typeface="BIZ UDPGothic" pitchFamily="34" charset="-122"/>
+                <a:cs typeface="BIZ UDPGothic" pitchFamily="34" charset="-120"/>
               </a:rPr>
               <a:t>物流ドライバーの不足率</a:t>
             </a:r>
@@ -15863,13 +15863,13 @@
             <a:r>
               <a:rPr lang="en-US" sz="1200" dirty="0">
                 <a:solidFill>
-                  <a:srgbClr val="F5F5F0">
+                  <a:srgbClr val="16181D">
                     <a:alpha val="80000"/>
                   </a:srgbClr>
                 </a:solidFill>
-                <a:latin typeface="Noto Sans JP" pitchFamily="34" charset="0"/>
-                <a:ea typeface="Noto Sans JP" pitchFamily="34" charset="-122"/>
-                <a:cs typeface="Noto Sans JP" pitchFamily="34" charset="-120"/>
+                <a:latin typeface="BIZ UDPGothic" pitchFamily="34" charset="0"/>
+                <a:ea typeface="BIZ UDPGothic" pitchFamily="34" charset="-122"/>
+                <a:cs typeface="BIZ UDPGothic" pitchFamily="34" charset="-120"/>
               </a:rPr>
               <a:t>認定期間は一律3年間の有期限。以降の扱いは第3の柱（企業単位のガバナンス）で詳述する。</a:t>
             </a:r>
@@ -15904,13 +15904,13 @@
             <a:r>
               <a:rPr lang="en-US" sz="900" dirty="0">
                 <a:solidFill>
-                  <a:srgbClr val="F5F5F0">
+                  <a:srgbClr val="16181D">
                     <a:alpha val="45000"/>
                   </a:srgbClr>
                 </a:solidFill>
-                <a:latin typeface="Noto Sans JP" pitchFamily="34" charset="0"/>
-                <a:ea typeface="Noto Sans JP" pitchFamily="34" charset="-122"/>
-                <a:cs typeface="Noto Sans JP" pitchFamily="34" charset="-120"/>
+                <a:latin typeface="BIZ UDPGothic" pitchFamily="34" charset="0"/>
+                <a:ea typeface="BIZ UDPGothic" pitchFamily="34" charset="-122"/>
+                <a:cs typeface="BIZ UDPGothic" pitchFamily="34" charset="-120"/>
               </a:rPr>
               <a:t>REBOOT JAPAN ── 市民による政策提言プラットフォーム</a:t>
             </a:r>
@@ -15945,13 +15945,13 @@
             <a:r>
               <a:rPr lang="en-US" sz="900" dirty="0">
                 <a:solidFill>
-                  <a:srgbClr val="F5F5F0">
+                  <a:srgbClr val="16181D">
                     <a:alpha val="45000"/>
                   </a:srgbClr>
                 </a:solidFill>
-                <a:latin typeface="Noto Sans JP" pitchFamily="34" charset="0"/>
-                <a:ea typeface="Noto Sans JP" pitchFamily="34" charset="-122"/>
-                <a:cs typeface="Noto Sans JP" pitchFamily="34" charset="-120"/>
+                <a:latin typeface="BIZ UDPGothic" pitchFamily="34" charset="0"/>
+                <a:ea typeface="BIZ UDPGothic" pitchFamily="34" charset="-122"/>
+                <a:cs typeface="BIZ UDPGothic" pitchFamily="34" charset="-120"/>
               </a:rPr>
               <a:t>5</a:t>
             </a:r>
@@ -15973,7 +15973,7 @@
     <p:bg>
       <p:bgPr>
         <a:solidFill>
-          <a:srgbClr val="0A0A0A"/>
+          <a:srgbClr val="F5F6F8"/>
         </a:solidFill>
       </p:bgPr>
     </p:bg>
@@ -16018,11 +16018,11 @@
             <a:r>
               <a:rPr lang="en-US" sz="1200" b="1" spc="200" kern="0" dirty="0">
                 <a:solidFill>
-                  <a:srgbClr val="D62828"/>
+                  <a:srgbClr val="C8161D"/>
                 </a:solidFill>
                 <a:latin typeface="Arial" pitchFamily="34" charset="0"/>
-                <a:ea typeface="Arial" pitchFamily="34" charset="-122"/>
-                <a:cs typeface="Arial" pitchFamily="34" charset="-120"/>
+                <a:ea typeface="BIZ UDPGothic" pitchFamily="34" charset="-122"/>
+                <a:cs typeface="BIZ UDPGothic" pitchFamily="34" charset="-120"/>
               </a:rPr>
               <a:t>RULE 02</a:t>
             </a:r>
@@ -16057,11 +16057,11 @@
             <a:r>
               <a:rPr lang="en-US" sz="2600" b="1" dirty="0">
                 <a:solidFill>
-                  <a:srgbClr val="F5F5F0"/>
-                </a:solidFill>
-                <a:latin typeface="Noto Sans JP" pitchFamily="34" charset="0"/>
-                <a:ea typeface="Noto Sans JP" pitchFamily="34" charset="-122"/>
-                <a:cs typeface="Noto Sans JP" pitchFamily="34" charset="-120"/>
+                  <a:srgbClr val="16181D"/>
+                </a:solidFill>
+                <a:latin typeface="BIZ UDPGothic" pitchFamily="34" charset="0"/>
+                <a:ea typeface="BIZ UDPGothic" pitchFamily="34" charset="-122"/>
+                <a:cs typeface="BIZ UDPGothic" pitchFamily="34" charset="-120"/>
               </a:rPr>
               <a:t>既存業界への補助金は即時全廃</a:t>
             </a:r>
@@ -16086,7 +16086,7 @@
             </a:avLst>
           </a:prstGeom>
           <a:solidFill>
-            <a:srgbClr val="2E2E2E"/>
+            <a:srgbClr val="DDE0E6"/>
           </a:solidFill>
           <a:ln/>
           <a:effectLst>
@@ -16128,8 +16128,8 @@
                   <a:srgbClr val="000000"/>
                 </a:solidFill>
                 <a:latin typeface="Arial" pitchFamily="34" charset="0"/>
-                <a:ea typeface="Arial" pitchFamily="34" charset="-122"/>
-                <a:cs typeface="Arial" pitchFamily="34" charset="-120"/>
+                <a:ea typeface="BIZ UDPGothic" pitchFamily="34" charset="-122"/>
+                <a:cs typeface="BIZ UDPGothic" pitchFamily="34" charset="-120"/>
               </a:rPr>
               <a:t>⚠️</a:t>
             </a:r>
@@ -16164,13 +16164,13 @@
             <a:r>
               <a:rPr lang="en-US" sz="1400" b="1" dirty="0">
                 <a:solidFill>
-                  <a:srgbClr val="F5F5F0">
+                  <a:srgbClr val="16181D">
                     <a:alpha val="70000"/>
                   </a:srgbClr>
                 </a:solidFill>
-                <a:latin typeface="Noto Sans JP" pitchFamily="34" charset="0"/>
-                <a:ea typeface="Noto Sans JP" pitchFamily="34" charset="-122"/>
-                <a:cs typeface="Noto Sans JP" pitchFamily="34" charset="-120"/>
+                <a:latin typeface="BIZ UDPGothic" pitchFamily="34" charset="0"/>
+                <a:ea typeface="BIZ UDPGothic" pitchFamily="34" charset="-122"/>
+                <a:cs typeface="BIZ UDPGothic" pitchFamily="34" charset="-120"/>
               </a:rPr>
               <a:t>これまで</a:t>
             </a:r>
@@ -16208,11 +16208,11 @@
             <a:r>
               <a:rPr lang="en-US" sz="1400" dirty="0">
                 <a:solidFill>
-                  <a:srgbClr val="F5F5F0"/>
-                </a:solidFill>
-                <a:latin typeface="Noto Sans JP" pitchFamily="34" charset="0"/>
-                <a:ea typeface="Noto Sans JP" pitchFamily="34" charset="-122"/>
-                <a:cs typeface="Noto Sans JP" pitchFamily="34" charset="-120"/>
+                  <a:srgbClr val="16181D"/>
+                </a:solidFill>
+                <a:latin typeface="BIZ UDPGothic" pitchFamily="34" charset="0"/>
+                <a:ea typeface="BIZ UDPGothic" pitchFamily="34" charset="-122"/>
+                <a:cs typeface="BIZ UDPGothic" pitchFamily="34" charset="-120"/>
               </a:rPr>
               <a:t>タクシー・バス協会への</a:t>
             </a:r>
@@ -16228,11 +16228,11 @@
             <a:r>
               <a:rPr lang="en-US" sz="1400" dirty="0">
                 <a:solidFill>
-                  <a:srgbClr val="F5F5F0"/>
-                </a:solidFill>
-                <a:latin typeface="Noto Sans JP" pitchFamily="34" charset="0"/>
-                <a:ea typeface="Noto Sans JP" pitchFamily="34" charset="-122"/>
-                <a:cs typeface="Noto Sans JP" pitchFamily="34" charset="-120"/>
+                  <a:srgbClr val="16181D"/>
+                </a:solidFill>
+                <a:latin typeface="BIZ UDPGothic" pitchFamily="34" charset="0"/>
+                <a:ea typeface="BIZ UDPGothic" pitchFamily="34" charset="-122"/>
+                <a:cs typeface="BIZ UDPGothic" pitchFamily="34" charset="-120"/>
               </a:rPr>
               <a:t>燃料費補助・事務局経費など</a:t>
             </a:r>
@@ -16248,11 +16248,11 @@
             <a:r>
               <a:rPr lang="en-US" sz="1400" dirty="0">
                 <a:solidFill>
-                  <a:srgbClr val="F5F5F0"/>
-                </a:solidFill>
-                <a:latin typeface="Noto Sans JP" pitchFamily="34" charset="0"/>
-                <a:ea typeface="Noto Sans JP" pitchFamily="34" charset="-122"/>
-                <a:cs typeface="Noto Sans JP" pitchFamily="34" charset="-120"/>
+                  <a:srgbClr val="16181D"/>
+                </a:solidFill>
+                <a:latin typeface="BIZ UDPGothic" pitchFamily="34" charset="0"/>
+                <a:ea typeface="BIZ UDPGothic" pitchFamily="34" charset="-122"/>
+                <a:cs typeface="BIZ UDPGothic" pitchFamily="34" charset="-120"/>
               </a:rPr>
               <a:t>「延命」のための補助金</a:t>
             </a:r>
@@ -16287,11 +16287,11 @@
             <a:r>
               <a:rPr lang="en-US" sz="2600" dirty="0">
                 <a:solidFill>
-                  <a:srgbClr val="F5F5F0"/>
+                  <a:srgbClr val="16181D"/>
                 </a:solidFill>
                 <a:latin typeface="Arial" pitchFamily="34" charset="0"/>
-                <a:ea typeface="Arial" pitchFamily="34" charset="-122"/>
-                <a:cs typeface="Arial" pitchFamily="34" charset="-120"/>
+                <a:ea typeface="BIZ UDPGothic" pitchFamily="34" charset="-122"/>
+                <a:cs typeface="BIZ UDPGothic" pitchFamily="34" charset="-120"/>
               </a:rPr>
               <a:t>→</a:t>
             </a:r>
@@ -16316,11 +16316,11 @@
             </a:avLst>
           </a:prstGeom>
           <a:solidFill>
-            <a:srgbClr val="1A1A1A"/>
+            <a:srgbClr val="FFFFFF"/>
           </a:solidFill>
           <a:ln w="19050">
             <a:solidFill>
-              <a:srgbClr val="D62828"/>
+              <a:srgbClr val="C8161D"/>
             </a:solidFill>
             <a:prstDash val="solid"/>
           </a:ln>
@@ -16363,8 +16363,8 @@
                   <a:srgbClr val="000000"/>
                 </a:solidFill>
                 <a:latin typeface="Arial" pitchFamily="34" charset="0"/>
-                <a:ea typeface="Arial" pitchFamily="34" charset="-122"/>
-                <a:cs typeface="Arial" pitchFamily="34" charset="-120"/>
+                <a:ea typeface="BIZ UDPGothic" pitchFamily="34" charset="-122"/>
+                <a:cs typeface="BIZ UDPGothic" pitchFamily="34" charset="-120"/>
               </a:rPr>
               <a:t>✅</a:t>
             </a:r>
@@ -16399,11 +16399,11 @@
             <a:r>
               <a:rPr lang="en-US" sz="1400" b="1" dirty="0">
                 <a:solidFill>
-                  <a:srgbClr val="D62828"/>
-                </a:solidFill>
-                <a:latin typeface="Noto Sans JP" pitchFamily="34" charset="0"/>
-                <a:ea typeface="Noto Sans JP" pitchFamily="34" charset="-122"/>
-                <a:cs typeface="Noto Sans JP" pitchFamily="34" charset="-120"/>
+                  <a:srgbClr val="C8161D"/>
+                </a:solidFill>
+                <a:latin typeface="BIZ UDPGothic" pitchFamily="34" charset="0"/>
+                <a:ea typeface="BIZ UDPGothic" pitchFamily="34" charset="-122"/>
+                <a:cs typeface="BIZ UDPGothic" pitchFamily="34" charset="-120"/>
               </a:rPr>
               <a:t>これから</a:t>
             </a:r>
@@ -16441,11 +16441,11 @@
             <a:r>
               <a:rPr lang="en-US" sz="1400" dirty="0">
                 <a:solidFill>
-                  <a:srgbClr val="F5F5F0"/>
-                </a:solidFill>
-                <a:latin typeface="Noto Sans JP" pitchFamily="34" charset="0"/>
-                <a:ea typeface="Noto Sans JP" pitchFamily="34" charset="-122"/>
-                <a:cs typeface="Noto Sans JP" pitchFamily="34" charset="-120"/>
+                  <a:srgbClr val="16181D"/>
+                </a:solidFill>
+                <a:latin typeface="BIZ UDPGothic" pitchFamily="34" charset="0"/>
+                <a:ea typeface="BIZ UDPGothic" pitchFamily="34" charset="-122"/>
+                <a:cs typeface="BIZ UDPGothic" pitchFamily="34" charset="-120"/>
               </a:rPr>
               <a:t>自動運転・無人物流への</a:t>
             </a:r>
@@ -16461,11 +16461,11 @@
             <a:r>
               <a:rPr lang="en-US" sz="1400" dirty="0">
                 <a:solidFill>
-                  <a:srgbClr val="F5F5F0"/>
-                </a:solidFill>
-                <a:latin typeface="Noto Sans JP" pitchFamily="34" charset="0"/>
-                <a:ea typeface="Noto Sans JP" pitchFamily="34" charset="-122"/>
-                <a:cs typeface="Noto Sans JP" pitchFamily="34" charset="-120"/>
+                  <a:srgbClr val="16181D"/>
+                </a:solidFill>
+                <a:latin typeface="BIZ UDPGothic" pitchFamily="34" charset="0"/>
+                <a:ea typeface="BIZ UDPGothic" pitchFamily="34" charset="-122"/>
+                <a:cs typeface="BIZ UDPGothic" pitchFamily="34" charset="-120"/>
               </a:rPr>
               <a:t>業態転換に挑む「企業」への</a:t>
             </a:r>
@@ -16481,11 +16481,11 @@
             <a:r>
               <a:rPr lang="en-US" sz="1400" dirty="0">
                 <a:solidFill>
-                  <a:srgbClr val="F5F5F0"/>
-                </a:solidFill>
-                <a:latin typeface="Noto Sans JP" pitchFamily="34" charset="0"/>
-                <a:ea typeface="Noto Sans JP" pitchFamily="34" charset="-122"/>
-                <a:cs typeface="Noto Sans JP" pitchFamily="34" charset="-120"/>
+                  <a:srgbClr val="16181D"/>
+                </a:solidFill>
+                <a:latin typeface="BIZ UDPGothic" pitchFamily="34" charset="0"/>
+                <a:ea typeface="BIZ UDPGothic" pitchFamily="34" charset="-122"/>
+                <a:cs typeface="BIZ UDPGothic" pitchFamily="34" charset="-120"/>
               </a:rPr>
               <a:t>直接投資に100%振り替え</a:t>
             </a:r>
@@ -16520,13 +16520,13 @@
             <a:r>
               <a:rPr lang="en-US" sz="1200" dirty="0">
                 <a:solidFill>
-                  <a:srgbClr val="F5F5F0">
+                  <a:srgbClr val="16181D">
                     <a:alpha val="80000"/>
                   </a:srgbClr>
                 </a:solidFill>
-                <a:latin typeface="Noto Sans JP" pitchFamily="34" charset="0"/>
-                <a:ea typeface="Noto Sans JP" pitchFamily="34" charset="-122"/>
-                <a:cs typeface="Noto Sans JP" pitchFamily="34" charset="-120"/>
+                <a:latin typeface="BIZ UDPGothic" pitchFamily="34" charset="0"/>
+                <a:ea typeface="BIZ UDPGothic" pitchFamily="34" charset="-122"/>
+                <a:cs typeface="BIZ UDPGothic" pitchFamily="34" charset="-120"/>
               </a:rPr>
               <a:t>特区認定と同時に即時全廃。段階的な経過措置は設けない。</a:t>
             </a:r>
@@ -16561,13 +16561,13 @@
             <a:r>
               <a:rPr lang="en-US" sz="900" dirty="0">
                 <a:solidFill>
-                  <a:srgbClr val="F5F5F0">
+                  <a:srgbClr val="16181D">
                     <a:alpha val="45000"/>
                   </a:srgbClr>
                 </a:solidFill>
-                <a:latin typeface="Noto Sans JP" pitchFamily="34" charset="0"/>
-                <a:ea typeface="Noto Sans JP" pitchFamily="34" charset="-122"/>
-                <a:cs typeface="Noto Sans JP" pitchFamily="34" charset="-120"/>
+                <a:latin typeface="BIZ UDPGothic" pitchFamily="34" charset="0"/>
+                <a:ea typeface="BIZ UDPGothic" pitchFamily="34" charset="-122"/>
+                <a:cs typeface="BIZ UDPGothic" pitchFamily="34" charset="-120"/>
               </a:rPr>
               <a:t>REBOOT JAPAN ── 市民による政策提言プラットフォーム</a:t>
             </a:r>
@@ -16602,13 +16602,13 @@
             <a:r>
               <a:rPr lang="en-US" sz="900" dirty="0">
                 <a:solidFill>
-                  <a:srgbClr val="F5F5F0">
+                  <a:srgbClr val="16181D">
                     <a:alpha val="45000"/>
                   </a:srgbClr>
                 </a:solidFill>
-                <a:latin typeface="Noto Sans JP" pitchFamily="34" charset="0"/>
-                <a:ea typeface="Noto Sans JP" pitchFamily="34" charset="-122"/>
-                <a:cs typeface="Noto Sans JP" pitchFamily="34" charset="-120"/>
+                <a:latin typeface="BIZ UDPGothic" pitchFamily="34" charset="0"/>
+                <a:ea typeface="BIZ UDPGothic" pitchFamily="34" charset="-122"/>
+                <a:cs typeface="BIZ UDPGothic" pitchFamily="34" charset="-120"/>
               </a:rPr>
               <a:t>6</a:t>
             </a:r>
@@ -16630,7 +16630,7 @@
     <p:bg>
       <p:bgPr>
         <a:solidFill>
-          <a:srgbClr val="0A0A0A"/>
+          <a:srgbClr val="F5F6F8"/>
         </a:solidFill>
       </p:bgPr>
     </p:bg>
@@ -16675,11 +16675,11 @@
             <a:r>
               <a:rPr lang="en-US" sz="1200" b="1" spc="200" kern="0" dirty="0">
                 <a:solidFill>
-                  <a:srgbClr val="D62828"/>
+                  <a:srgbClr val="C8161D"/>
                 </a:solidFill>
                 <a:latin typeface="Arial" pitchFamily="34" charset="0"/>
-                <a:ea typeface="Arial" pitchFamily="34" charset="-122"/>
-                <a:cs typeface="Arial" pitchFamily="34" charset="-120"/>
+                <a:ea typeface="BIZ UDPGothic" pitchFamily="34" charset="-122"/>
+                <a:cs typeface="BIZ UDPGothic" pitchFamily="34" charset="-120"/>
               </a:rPr>
               <a:t>RULE 02 — DETAIL</a:t>
             </a:r>
@@ -16714,11 +16714,11 @@
             <a:r>
               <a:rPr lang="en-US" sz="2600" b="1" dirty="0">
                 <a:solidFill>
-                  <a:srgbClr val="F5F5F0"/>
-                </a:solidFill>
-                <a:latin typeface="Noto Sans JP" pitchFamily="34" charset="0"/>
-                <a:ea typeface="Noto Sans JP" pitchFamily="34" charset="-122"/>
-                <a:cs typeface="Noto Sans JP" pitchFamily="34" charset="-120"/>
+                  <a:srgbClr val="16181D"/>
+                </a:solidFill>
+                <a:latin typeface="BIZ UDPGothic" pitchFamily="34" charset="0"/>
+                <a:ea typeface="BIZ UDPGothic" pitchFamily="34" charset="-122"/>
+                <a:cs typeface="BIZ UDPGothic" pitchFamily="34" charset="-120"/>
               </a:rPr>
               <a:t>運転手個人はどうなるのか</a:t>
             </a:r>
@@ -16756,8 +16756,8 @@
                   <a:srgbClr val="000000"/>
                 </a:solidFill>
                 <a:latin typeface="Arial" pitchFamily="34" charset="0"/>
-                <a:ea typeface="Arial" pitchFamily="34" charset="-122"/>
-                <a:cs typeface="Arial" pitchFamily="34" charset="-120"/>
+                <a:ea typeface="BIZ UDPGothic" pitchFamily="34" charset="-122"/>
+                <a:cs typeface="BIZ UDPGothic" pitchFamily="34" charset="-120"/>
               </a:rPr>
               <a:t>👥</a:t>
             </a:r>
@@ -16792,11 +16792,11 @@
             <a:r>
               <a:rPr lang="en-US" sz="1600" b="1" dirty="0">
                 <a:solidFill>
-                  <a:srgbClr val="F5F5F0"/>
-                </a:solidFill>
-                <a:latin typeface="Noto Sans JP" pitchFamily="34" charset="0"/>
-                <a:ea typeface="Noto Sans JP" pitchFamily="34" charset="-122"/>
-                <a:cs typeface="Noto Sans JP" pitchFamily="34" charset="-120"/>
+                  <a:srgbClr val="16181D"/>
+                </a:solidFill>
+                <a:latin typeface="BIZ UDPGothic" pitchFamily="34" charset="0"/>
+                <a:ea typeface="BIZ UDPGothic" pitchFamily="34" charset="-122"/>
+                <a:cs typeface="BIZ UDPGothic" pitchFamily="34" charset="-120"/>
               </a:rPr>
               <a:t>補助金は「会社」への支援であり、運転手個人の雇用そのものを政府が保証していたわけではない</a:t>
             </a:r>
@@ -16821,7 +16821,7 @@
             </a:avLst>
           </a:prstGeom>
           <a:solidFill>
-            <a:srgbClr val="1A1A1A"/>
+            <a:srgbClr val="FFFFFF"/>
           </a:solidFill>
           <a:ln/>
           <a:effectLst>
@@ -16863,11 +16863,11 @@
             <a:r>
               <a:rPr lang="en-US" sz="1500" b="1" dirty="0">
                 <a:solidFill>
-                  <a:srgbClr val="D62828"/>
-                </a:solidFill>
-                <a:latin typeface="Noto Sans JP" pitchFamily="34" charset="0"/>
-                <a:ea typeface="Noto Sans JP" pitchFamily="34" charset="-122"/>
-                <a:cs typeface="Noto Sans JP" pitchFamily="34" charset="-120"/>
+                  <a:srgbClr val="C8161D"/>
+                </a:solidFill>
+                <a:latin typeface="BIZ UDPGothic" pitchFamily="34" charset="0"/>
+                <a:ea typeface="BIZ UDPGothic" pitchFamily="34" charset="-122"/>
+                <a:cs typeface="BIZ UDPGothic" pitchFamily="34" charset="-120"/>
               </a:rPr>
               <a:t>補助金カット後の雇用継続・配置転換・解雇は、すべて会社側の経営判断・労働法上の責任の範囲</a:t>
             </a:r>
@@ -16883,11 +16883,11 @@
             <a:r>
               <a:rPr lang="en-US" sz="1350" dirty="0">
                 <a:solidFill>
-                  <a:srgbClr val="F5F5F0"/>
-                </a:solidFill>
-                <a:latin typeface="Noto Sans JP" pitchFamily="34" charset="0"/>
-                <a:ea typeface="Noto Sans JP" pitchFamily="34" charset="-122"/>
-                <a:cs typeface="Noto Sans JP" pitchFamily="34" charset="-120"/>
+                  <a:srgbClr val="16181D"/>
+                </a:solidFill>
+                <a:latin typeface="BIZ UDPGothic" pitchFamily="34" charset="0"/>
+                <a:ea typeface="BIZ UDPGothic" pitchFamily="34" charset="-122"/>
+                <a:cs typeface="BIZ UDPGothic" pitchFamily="34" charset="-120"/>
               </a:rPr>
               <a:t>会社は補助金がなくなったから即解雇していいわけではなく、労働契約法・労働基準法に基づく通常の解雇規制の下で会社が判断する</a:t>
             </a:r>
@@ -16903,11 +16903,11 @@
             <a:r>
               <a:rPr lang="en-US" sz="1350" dirty="0">
                 <a:solidFill>
-                  <a:srgbClr val="F5F5F0"/>
-                </a:solidFill>
-                <a:latin typeface="Noto Sans JP" pitchFamily="34" charset="0"/>
-                <a:ea typeface="Noto Sans JP" pitchFamily="34" charset="-122"/>
-                <a:cs typeface="Noto Sans JP" pitchFamily="34" charset="-120"/>
+                  <a:srgbClr val="16181D"/>
+                </a:solidFill>
+                <a:latin typeface="BIZ UDPGothic" pitchFamily="34" charset="0"/>
+                <a:ea typeface="BIZ UDPGothic" pitchFamily="34" charset="-122"/>
+                <a:cs typeface="BIZ UDPGothic" pitchFamily="34" charset="-120"/>
               </a:rPr>
               <a:t>本提言は運転手個人向けの特別な移行支援策を独自には設計しない</a:t>
             </a:r>
@@ -16942,13 +16942,13 @@
             <a:r>
               <a:rPr lang="en-US" sz="900" dirty="0">
                 <a:solidFill>
-                  <a:srgbClr val="F5F5F0">
+                  <a:srgbClr val="16181D">
                     <a:alpha val="45000"/>
                   </a:srgbClr>
                 </a:solidFill>
-                <a:latin typeface="Noto Sans JP" pitchFamily="34" charset="0"/>
-                <a:ea typeface="Noto Sans JP" pitchFamily="34" charset="-122"/>
-                <a:cs typeface="Noto Sans JP" pitchFamily="34" charset="-120"/>
+                <a:latin typeface="BIZ UDPGothic" pitchFamily="34" charset="0"/>
+                <a:ea typeface="BIZ UDPGothic" pitchFamily="34" charset="-122"/>
+                <a:cs typeface="BIZ UDPGothic" pitchFamily="34" charset="-120"/>
               </a:rPr>
               <a:t>REBOOT JAPAN ── 市民による政策提言プラットフォーム</a:t>
             </a:r>
@@ -16983,13 +16983,13 @@
             <a:r>
               <a:rPr lang="en-US" sz="900" dirty="0">
                 <a:solidFill>
-                  <a:srgbClr val="F5F5F0">
+                  <a:srgbClr val="16181D">
                     <a:alpha val="45000"/>
                   </a:srgbClr>
                 </a:solidFill>
-                <a:latin typeface="Noto Sans JP" pitchFamily="34" charset="0"/>
-                <a:ea typeface="Noto Sans JP" pitchFamily="34" charset="-122"/>
-                <a:cs typeface="Noto Sans JP" pitchFamily="34" charset="-120"/>
+                <a:latin typeface="BIZ UDPGothic" pitchFamily="34" charset="0"/>
+                <a:ea typeface="BIZ UDPGothic" pitchFamily="34" charset="-122"/>
+                <a:cs typeface="BIZ UDPGothic" pitchFamily="34" charset="-120"/>
               </a:rPr>
               <a:t>7</a:t>
             </a:r>
@@ -17011,7 +17011,7 @@
     <p:bg>
       <p:bgPr>
         <a:solidFill>
-          <a:srgbClr val="0A0A0A"/>
+          <a:srgbClr val="F5F6F8"/>
         </a:solidFill>
       </p:bgPr>
     </p:bg>
@@ -17056,11 +17056,11 @@
             <a:r>
               <a:rPr lang="en-US" sz="1200" b="1" spc="200" kern="0" dirty="0">
                 <a:solidFill>
-                  <a:srgbClr val="D62828"/>
+                  <a:srgbClr val="C8161D"/>
                 </a:solidFill>
                 <a:latin typeface="Arial" pitchFamily="34" charset="0"/>
-                <a:ea typeface="Arial" pitchFamily="34" charset="-122"/>
-                <a:cs typeface="Arial" pitchFamily="34" charset="-120"/>
+                <a:ea typeface="BIZ UDPGothic" pitchFamily="34" charset="-122"/>
+                <a:cs typeface="BIZ UDPGothic" pitchFamily="34" charset="-120"/>
               </a:rPr>
               <a:t>RULE 02 — DETAIL</a:t>
             </a:r>
@@ -17095,11 +17095,11 @@
             <a:r>
               <a:rPr lang="en-US" sz="2600" b="1" dirty="0">
                 <a:solidFill>
-                  <a:srgbClr val="F5F5F0"/>
-                </a:solidFill>
-                <a:latin typeface="Noto Sans JP" pitchFamily="34" charset="0"/>
-                <a:ea typeface="Noto Sans JP" pitchFamily="34" charset="-122"/>
-                <a:cs typeface="Noto Sans JP" pitchFamily="34" charset="-120"/>
+                  <a:srgbClr val="16181D"/>
+                </a:solidFill>
+                <a:latin typeface="BIZ UDPGothic" pitchFamily="34" charset="0"/>
+                <a:ea typeface="BIZ UDPGothic" pitchFamily="34" charset="-122"/>
+                <a:cs typeface="BIZ UDPGothic" pitchFamily="34" charset="-120"/>
               </a:rPr>
               <a:t>個別企業への「資産購入補助」</a:t>
             </a:r>
@@ -17124,11 +17124,11 @@
             </a:avLst>
           </a:prstGeom>
           <a:solidFill>
-            <a:srgbClr val="1A1A1A"/>
+            <a:srgbClr val="FFFFFF"/>
           </a:solidFill>
           <a:ln w="12700">
             <a:solidFill>
-              <a:srgbClr val="2E2E2E"/>
+              <a:srgbClr val="DDE0E6"/>
             </a:solidFill>
             <a:prstDash val="solid"/>
           </a:ln>
@@ -17171,8 +17171,8 @@
                   <a:srgbClr val="000000"/>
                 </a:solidFill>
                 <a:latin typeface="Arial" pitchFamily="34" charset="0"/>
-                <a:ea typeface="Arial" pitchFamily="34" charset="-122"/>
-                <a:cs typeface="Arial" pitchFamily="34" charset="-120"/>
+                <a:ea typeface="BIZ UDPGothic" pitchFamily="34" charset="-122"/>
+                <a:cs typeface="BIZ UDPGothic" pitchFamily="34" charset="-120"/>
               </a:rPr>
               <a:t>🤖</a:t>
             </a:r>
@@ -17210,11 +17210,11 @@
             <a:r>
               <a:rPr lang="en-US" sz="1400" b="1" dirty="0">
                 <a:solidFill>
-                  <a:srgbClr val="F5F5F0"/>
-                </a:solidFill>
-                <a:latin typeface="Noto Sans JP" pitchFamily="34" charset="0"/>
-                <a:ea typeface="Noto Sans JP" pitchFamily="34" charset="-122"/>
-                <a:cs typeface="Noto Sans JP" pitchFamily="34" charset="-120"/>
+                  <a:srgbClr val="16181D"/>
+                </a:solidFill>
+                <a:latin typeface="BIZ UDPGothic" pitchFamily="34" charset="0"/>
+                <a:ea typeface="BIZ UDPGothic" pitchFamily="34" charset="-122"/>
+                <a:cs typeface="BIZ UDPGothic" pitchFamily="34" charset="-120"/>
               </a:rPr>
               <a:t>完全無人車両（レベル4）</a:t>
             </a:r>
@@ -17252,11 +17252,11 @@
             <a:r>
               <a:rPr lang="en-US" sz="1150" dirty="0">
                 <a:solidFill>
-                  <a:srgbClr val="F5F5F0"/>
-                </a:solidFill>
-                <a:latin typeface="Noto Sans JP" pitchFamily="34" charset="0"/>
-                <a:ea typeface="Noto Sans JP" pitchFamily="34" charset="-122"/>
-                <a:cs typeface="Noto Sans JP" pitchFamily="34" charset="-120"/>
+                  <a:srgbClr val="16181D"/>
+                </a:solidFill>
+                <a:latin typeface="BIZ UDPGothic" pitchFamily="34" charset="0"/>
+                <a:ea typeface="BIZ UDPGothic" pitchFamily="34" charset="-122"/>
+                <a:cs typeface="BIZ UDPGothic" pitchFamily="34" charset="-120"/>
               </a:rPr>
               <a:t>自動運転バス・シャトル等の車両購入・改造費</a:t>
             </a:r>
@@ -17281,11 +17281,11 @@
             </a:avLst>
           </a:prstGeom>
           <a:solidFill>
-            <a:srgbClr val="1A1A1A"/>
+            <a:srgbClr val="FFFFFF"/>
           </a:solidFill>
           <a:ln w="12700">
             <a:solidFill>
-              <a:srgbClr val="2E2E2E"/>
+              <a:srgbClr val="DDE0E6"/>
             </a:solidFill>
             <a:prstDash val="solid"/>
           </a:ln>
@@ -17328,8 +17328,8 @@
                   <a:srgbClr val="000000"/>
                 </a:solidFill>
                 <a:latin typeface="Arial" pitchFamily="34" charset="0"/>
-                <a:ea typeface="Arial" pitchFamily="34" charset="-122"/>
-                <a:cs typeface="Arial" pitchFamily="34" charset="-120"/>
+                <a:ea typeface="BIZ UDPGothic" pitchFamily="34" charset="-122"/>
+                <a:cs typeface="BIZ UDPGothic" pitchFamily="34" charset="-120"/>
               </a:rPr>
               <a:t>🚚</a:t>
             </a:r>
@@ -17367,11 +17367,11 @@
             <a:r>
               <a:rPr lang="en-US" sz="1400" b="1" dirty="0">
                 <a:solidFill>
-                  <a:srgbClr val="F5F5F0"/>
-                </a:solidFill>
-                <a:latin typeface="Noto Sans JP" pitchFamily="34" charset="0"/>
-                <a:ea typeface="Noto Sans JP" pitchFamily="34" charset="-122"/>
-                <a:cs typeface="Noto Sans JP" pitchFamily="34" charset="-120"/>
+                  <a:srgbClr val="16181D"/>
+                </a:solidFill>
+                <a:latin typeface="BIZ UDPGothic" pitchFamily="34" charset="0"/>
+                <a:ea typeface="BIZ UDPGothic" pitchFamily="34" charset="-122"/>
+                <a:cs typeface="BIZ UDPGothic" pitchFamily="34" charset="-120"/>
               </a:rPr>
               <a:t>EVトラック</a:t>
             </a:r>
@@ -17409,11 +17409,11 @@
             <a:r>
               <a:rPr lang="en-US" sz="1150" dirty="0">
                 <a:solidFill>
-                  <a:srgbClr val="F5F5F0"/>
-                </a:solidFill>
-                <a:latin typeface="Noto Sans JP" pitchFamily="34" charset="0"/>
-                <a:ea typeface="Noto Sans JP" pitchFamily="34" charset="-122"/>
-                <a:cs typeface="Noto Sans JP" pitchFamily="34" charset="-120"/>
+                  <a:srgbClr val="16181D"/>
+                </a:solidFill>
+                <a:latin typeface="BIZ UDPGothic" pitchFamily="34" charset="0"/>
+                <a:ea typeface="BIZ UDPGothic" pitchFamily="34" charset="-122"/>
+                <a:cs typeface="BIZ UDPGothic" pitchFamily="34" charset="-120"/>
               </a:rPr>
               <a:t>無人物流の幹線輸送を担う車両</a:t>
             </a:r>
@@ -17438,11 +17438,11 @@
             </a:avLst>
           </a:prstGeom>
           <a:solidFill>
-            <a:srgbClr val="1A1A1A"/>
+            <a:srgbClr val="FFFFFF"/>
           </a:solidFill>
           <a:ln w="12700">
             <a:solidFill>
-              <a:srgbClr val="2E2E2E"/>
+              <a:srgbClr val="DDE0E6"/>
             </a:solidFill>
             <a:prstDash val="solid"/>
           </a:ln>
@@ -17485,8 +17485,8 @@
                   <a:srgbClr val="000000"/>
                 </a:solidFill>
                 <a:latin typeface="Arial" pitchFamily="34" charset="0"/>
-                <a:ea typeface="Arial" pitchFamily="34" charset="-122"/>
-                <a:cs typeface="Arial" pitchFamily="34" charset="-120"/>
+                <a:ea typeface="BIZ UDPGothic" pitchFamily="34" charset="-122"/>
+                <a:cs typeface="BIZ UDPGothic" pitchFamily="34" charset="-120"/>
               </a:rPr>
               <a:t>🚜</a:t>
             </a:r>
@@ -17524,11 +17524,11 @@
             <a:r>
               <a:rPr lang="en-US" sz="1400" b="1" dirty="0">
                 <a:solidFill>
-                  <a:srgbClr val="F5F5F0"/>
-                </a:solidFill>
-                <a:latin typeface="Noto Sans JP" pitchFamily="34" charset="0"/>
-                <a:ea typeface="Noto Sans JP" pitchFamily="34" charset="-122"/>
-                <a:cs typeface="Noto Sans JP" pitchFamily="34" charset="-120"/>
+                  <a:srgbClr val="16181D"/>
+                </a:solidFill>
+                <a:latin typeface="BIZ UDPGothic" pitchFamily="34" charset="0"/>
+                <a:ea typeface="BIZ UDPGothic" pitchFamily="34" charset="-122"/>
+                <a:cs typeface="BIZ UDPGothic" pitchFamily="34" charset="-120"/>
               </a:rPr>
               <a:t>スマート農業機械</a:t>
             </a:r>
@@ -17566,11 +17566,11 @@
             <a:r>
               <a:rPr lang="en-US" sz="1150" dirty="0">
                 <a:solidFill>
-                  <a:srgbClr val="F5F5F0"/>
-                </a:solidFill>
-                <a:latin typeface="Noto Sans JP" pitchFamily="34" charset="0"/>
-                <a:ea typeface="Noto Sans JP" pitchFamily="34" charset="-122"/>
-                <a:cs typeface="Noto Sans JP" pitchFamily="34" charset="-120"/>
+                  <a:srgbClr val="16181D"/>
+                </a:solidFill>
+                <a:latin typeface="BIZ UDPGothic" pitchFamily="34" charset="0"/>
+                <a:ea typeface="BIZ UDPGothic" pitchFamily="34" charset="-122"/>
+                <a:cs typeface="BIZ UDPGothic" pitchFamily="34" charset="-120"/>
               </a:rPr>
               <a:t>農地間の遠隔・自動走行に対応する機械</a:t>
             </a:r>
@@ -17605,13 +17605,13 @@
             <a:r>
               <a:rPr lang="en-US" sz="1200" dirty="0">
                 <a:solidFill>
-                  <a:srgbClr val="F5F5F0">
+                  <a:srgbClr val="16181D">
                     <a:alpha val="80000"/>
                   </a:srgbClr>
                 </a:solidFill>
-                <a:latin typeface="Noto Sans JP" pitchFamily="34" charset="0"/>
-                <a:ea typeface="Noto Sans JP" pitchFamily="34" charset="-122"/>
-                <a:cs typeface="Noto Sans JP" pitchFamily="34" charset="-120"/>
+                <a:latin typeface="BIZ UDPGothic" pitchFamily="34" charset="0"/>
+                <a:ea typeface="BIZ UDPGothic" pitchFamily="34" charset="-122"/>
+                <a:cs typeface="BIZ UDPGothic" pitchFamily="34" charset="-120"/>
               </a:rPr>
               <a:t>補助対象は「初期資産購入費用」および「運行システムの構築費用」に100%限定する</a:t>
             </a:r>
@@ -17646,13 +17646,13 @@
             <a:r>
               <a:rPr lang="en-US" sz="900" dirty="0">
                 <a:solidFill>
-                  <a:srgbClr val="F5F5F0">
+                  <a:srgbClr val="16181D">
                     <a:alpha val="45000"/>
                   </a:srgbClr>
                 </a:solidFill>
-                <a:latin typeface="Noto Sans JP" pitchFamily="34" charset="0"/>
-                <a:ea typeface="Noto Sans JP" pitchFamily="34" charset="-122"/>
-                <a:cs typeface="Noto Sans JP" pitchFamily="34" charset="-120"/>
+                <a:latin typeface="BIZ UDPGothic" pitchFamily="34" charset="0"/>
+                <a:ea typeface="BIZ UDPGothic" pitchFamily="34" charset="-122"/>
+                <a:cs typeface="BIZ UDPGothic" pitchFamily="34" charset="-120"/>
               </a:rPr>
               <a:t>REBOOT JAPAN ── 市民による政策提言プラットフォーム</a:t>
             </a:r>
@@ -17687,13 +17687,13 @@
             <a:r>
               <a:rPr lang="en-US" sz="900" dirty="0">
                 <a:solidFill>
-                  <a:srgbClr val="F5F5F0">
+                  <a:srgbClr val="16181D">
                     <a:alpha val="45000"/>
                   </a:srgbClr>
                 </a:solidFill>
-                <a:latin typeface="Noto Sans JP" pitchFamily="34" charset="0"/>
-                <a:ea typeface="Noto Sans JP" pitchFamily="34" charset="-122"/>
-                <a:cs typeface="Noto Sans JP" pitchFamily="34" charset="-120"/>
+                <a:latin typeface="BIZ UDPGothic" pitchFamily="34" charset="0"/>
+                <a:ea typeface="BIZ UDPGothic" pitchFamily="34" charset="-122"/>
+                <a:cs typeface="BIZ UDPGothic" pitchFamily="34" charset="-120"/>
               </a:rPr>
               <a:t>8</a:t>
             </a:r>
@@ -17715,7 +17715,7 @@
     <p:bg>
       <p:bgPr>
         <a:solidFill>
-          <a:srgbClr val="0A0A0A"/>
+          <a:srgbClr val="F5F6F8"/>
         </a:solidFill>
       </p:bgPr>
     </p:bg>
@@ -17760,11 +17760,11 @@
             <a:r>
               <a:rPr lang="en-US" sz="1200" b="1" spc="200" kern="0" dirty="0">
                 <a:solidFill>
-                  <a:srgbClr val="D62828"/>
+                  <a:srgbClr val="C8161D"/>
                 </a:solidFill>
                 <a:latin typeface="Arial" pitchFamily="34" charset="0"/>
-                <a:ea typeface="Arial" pitchFamily="34" charset="-122"/>
-                <a:cs typeface="Arial" pitchFamily="34" charset="-120"/>
+                <a:ea typeface="BIZ UDPGothic" pitchFamily="34" charset="-122"/>
+                <a:cs typeface="BIZ UDPGothic" pitchFamily="34" charset="-120"/>
               </a:rPr>
               <a:t>RULE 02 — DETAIL</a:t>
             </a:r>
@@ -17799,11 +17799,11 @@
             <a:r>
               <a:rPr lang="en-US" sz="2300" b="1" dirty="0">
                 <a:solidFill>
-                  <a:srgbClr val="F5F5F0"/>
-                </a:solidFill>
-                <a:latin typeface="Noto Sans JP" pitchFamily="34" charset="0"/>
-                <a:ea typeface="Noto Sans JP" pitchFamily="34" charset="-122"/>
-                <a:cs typeface="Noto Sans JP" pitchFamily="34" charset="-120"/>
+                  <a:srgbClr val="16181D"/>
+                </a:solidFill>
+                <a:latin typeface="BIZ UDPGothic" pitchFamily="34" charset="0"/>
+                <a:ea typeface="BIZ UDPGothic" pitchFamily="34" charset="-122"/>
+                <a:cs typeface="BIZ UDPGothic" pitchFamily="34" charset="-120"/>
               </a:rPr>
               <a:t>企業にとっての強力なインセンティブ</a:t>
             </a:r>
@@ -17828,7 +17828,7 @@
             </a:avLst>
           </a:prstGeom>
           <a:solidFill>
-            <a:srgbClr val="1A1A1A"/>
+            <a:srgbClr val="FFFFFF"/>
           </a:solidFill>
           <a:ln/>
           <a:effectLst>
@@ -17870,11 +17870,11 @@
             <a:r>
               <a:rPr lang="en-US" sz="1900" b="1" dirty="0">
                 <a:solidFill>
-                  <a:srgbClr val="D62828"/>
-                </a:solidFill>
-                <a:latin typeface="Noto Sans JP" pitchFamily="34" charset="0"/>
-                <a:ea typeface="Noto Sans JP" pitchFamily="34" charset="-122"/>
-                <a:cs typeface="Noto Sans JP" pitchFamily="34" charset="-120"/>
+                  <a:srgbClr val="C8161D"/>
+                </a:solidFill>
+                <a:latin typeface="BIZ UDPGothic" pitchFamily="34" charset="0"/>
+                <a:ea typeface="BIZ UDPGothic" pitchFamily="34" charset="-122"/>
+                <a:cs typeface="BIZ UDPGothic" pitchFamily="34" charset="-120"/>
               </a:rPr>
               <a:t>「古い業態にしがみつくより、最速で特区のルールに賛成して参入したほうが、</a:t>
             </a:r>
@@ -17890,11 +17890,11 @@
             <a:r>
               <a:rPr lang="en-US" sz="1900" b="1" dirty="0">
                 <a:solidFill>
-                  <a:srgbClr val="D62828"/>
-                </a:solidFill>
-                <a:latin typeface="Noto Sans JP" pitchFamily="34" charset="0"/>
-                <a:ea typeface="Noto Sans JP" pitchFamily="34" charset="-122"/>
-                <a:cs typeface="Noto Sans JP" pitchFamily="34" charset="-120"/>
+                  <a:srgbClr val="C8161D"/>
+                </a:solidFill>
+                <a:latin typeface="BIZ UDPGothic" pitchFamily="34" charset="0"/>
+                <a:ea typeface="BIZ UDPGothic" pitchFamily="34" charset="-122"/>
+                <a:cs typeface="BIZ UDPGothic" pitchFamily="34" charset="-120"/>
               </a:rPr>
               <a:t>後の市場競争で圧倒的に優位に立てる」</a:t>
             </a:r>
@@ -17932,11 +17932,11 @@
             <a:r>
               <a:rPr lang="en-US" sz="1350" dirty="0">
                 <a:solidFill>
-                  <a:srgbClr val="F5F5F0"/>
-                </a:solidFill>
-                <a:latin typeface="Noto Sans JP" pitchFamily="34" charset="0"/>
-                <a:ea typeface="Noto Sans JP" pitchFamily="34" charset="-122"/>
-                <a:cs typeface="Noto Sans JP" pitchFamily="34" charset="-120"/>
+                  <a:srgbClr val="16181D"/>
+                </a:solidFill>
+                <a:latin typeface="BIZ UDPGothic" pitchFamily="34" charset="0"/>
+                <a:ea typeface="BIZ UDPGothic" pitchFamily="34" charset="-122"/>
+                <a:cs typeface="BIZ UDPGothic" pitchFamily="34" charset="-120"/>
               </a:rPr>
               <a:t>初期コストが最大の障壁となる次世代資産（自動運転車両・EVトラック等）を、公費が大幅にカバーする。これにより、参入企業は投資回収の負担なく新業態への転換を進められる。</a:t>
             </a:r>
@@ -17971,13 +17971,13 @@
             <a:r>
               <a:rPr lang="en-US" sz="900" dirty="0">
                 <a:solidFill>
-                  <a:srgbClr val="F5F5F0">
+                  <a:srgbClr val="16181D">
                     <a:alpha val="45000"/>
                   </a:srgbClr>
                 </a:solidFill>
-                <a:latin typeface="Noto Sans JP" pitchFamily="34" charset="0"/>
-                <a:ea typeface="Noto Sans JP" pitchFamily="34" charset="-122"/>
-                <a:cs typeface="Noto Sans JP" pitchFamily="34" charset="-120"/>
+                <a:latin typeface="BIZ UDPGothic" pitchFamily="34" charset="0"/>
+                <a:ea typeface="BIZ UDPGothic" pitchFamily="34" charset="-122"/>
+                <a:cs typeface="BIZ UDPGothic" pitchFamily="34" charset="-120"/>
               </a:rPr>
               <a:t>REBOOT JAPAN ── 市民による政策提言プラットフォーム</a:t>
             </a:r>
@@ -18012,13 +18012,13 @@
             <a:r>
               <a:rPr lang="en-US" sz="900" dirty="0">
                 <a:solidFill>
-                  <a:srgbClr val="F5F5F0">
+                  <a:srgbClr val="16181D">
                     <a:alpha val="45000"/>
                   </a:srgbClr>
                 </a:solidFill>
-                <a:latin typeface="Noto Sans JP" pitchFamily="34" charset="0"/>
-                <a:ea typeface="Noto Sans JP" pitchFamily="34" charset="-122"/>
-                <a:cs typeface="Noto Sans JP" pitchFamily="34" charset="-120"/>
+                <a:latin typeface="BIZ UDPGothic" pitchFamily="34" charset="0"/>
+                <a:ea typeface="BIZ UDPGothic" pitchFamily="34" charset="-122"/>
+                <a:cs typeface="BIZ UDPGothic" pitchFamily="34" charset="-120"/>
               </a:rPr>
               <a:t>9</a:t>
             </a:r>
